--- a/sunumlar/6-SINIF-FULL-SUNUM-DETAYLI.pptx
+++ b/sunumlar/6-SINIF-FULL-SUNUM-DETAYLI.pptx
@@ -7,7 +7,7 @@
   <p:sldIdLst>
     <p:sldId id="256" r:id="rId7"/>
     <p:sldId id="257" r:id="rId8"/>
-    <p:sldId id="258" r:id="rId9"/>
+    <p:sldId id="258" r:id="rId10"/>
     <p:sldId id="259" r:id="rId11"/>
     <p:sldId id="260" r:id="rId12"/>
     <p:sldId id="261" r:id="rId13"/>
@@ -554,7 +554,33 @@
           <a:lstStyle/>
           <a:p>
             <a:r>
-              <a:t>Video: 'Veri ve Bilgi Arasındaki Fark' ile başlayın</a:t>
+              <a:t>🎨 GÖRSELLEŞTİRME ÖNERİLERİ:</a:t>
+            </a:r>
+          </a:p>
+          <a:p/>
+          <a:p>
+            <a:r>
+              <a:t>📸 Görsel: Koşullu yapılar akış diyagramı</a:t>
+            </a:r>
+          </a:p>
+          <a:p>
+            <a:r>
+              <a:t>🎬 Video: Koşullu ifadeler Scratch'te</a:t>
+            </a:r>
+          </a:p>
+          <a:p>
+            <a:r>
+              <a:t>📸 Görsel: Farklı grafik türleri örnekleri</a:t>
+            </a:r>
+          </a:p>
+          <a:p>
+            <a:r>
+              <a:t>🎬 Video: Veri görselleştirme önemi</a:t>
+            </a:r>
+          </a:p>
+          <a:p>
+            <a:r>
+              <a:t>💡 İnfografik: Grafik türleri ve kullanım alanları</a:t>
             </a:r>
           </a:p>
         </p:txBody>
@@ -624,7 +650,44 @@
           <a:lstStyle/>
           <a:p>
             <a:r>
-              <a:t>Gösterim: Canlı olarak Excel'de grafik oluşturun</a:t>
+              <a:t>Etkinlik: Öğrencilere Excel'de formül yazdırın</a:t>
+            </a:r>
+          </a:p>
+          <a:p/>
+          <a:p>
+            <a:r>
+              <a:t>🎨 GÖRSELLEŞTİRME ÖNERİLERİ:</a:t>
+            </a:r>
+          </a:p>
+          <a:p/>
+          <a:p>
+            <a:r>
+              <a:t>📸 Görsel: LAN ve WAN ağ topolojileri şeması</a:t>
+            </a:r>
+          </a:p>
+          <a:p>
+            <a:r>
+              <a:t>🎬 Video: İnternet nasıl çalışır? Animasyonlu anlatım</a:t>
+            </a:r>
+          </a:p>
+          <a:p>
+            <a:r>
+              <a:t>💡 İnfografik: Ev ağı kurulumu diyagramı</a:t>
+            </a:r>
+          </a:p>
+          <a:p>
+            <a:r>
+              <a:t>📸 Görsel: Excel arayüzü ekran görüntüsü</a:t>
+            </a:r>
+          </a:p>
+          <a:p>
+            <a:r>
+              <a:t>🎬 Video: Excel temel işlemler (2-3 dk)</a:t>
+            </a:r>
+          </a:p>
+          <a:p>
+            <a:r>
+              <a:t>💡 Ekran kaydı: Formül kullanımı demo</a:t>
             </a:r>
           </a:p>
         </p:txBody>
@@ -694,7 +757,99 @@
           <a:lstStyle/>
           <a:p>
             <a:r>
-              <a:t>Etkinlik: Veri seti verin, ortalama, medyan, mod hesaplasınlar</a:t>
+              <a:t>Gösterim: Canlı olarak Excel'de grafik oluşturun</a:t>
+            </a:r>
+          </a:p>
+          <a:p/>
+          <a:p>
+            <a:r>
+              <a:t>🎨 GÖRSELLEŞTİRME ÖNERİLERİ:</a:t>
+            </a:r>
+          </a:p>
+          <a:p/>
+          <a:p>
+            <a:r>
+              <a:t>📸 Görsel: Akış şeması örnekleri</a:t>
+            </a:r>
+          </a:p>
+          <a:p>
+            <a:r>
+              <a:t>🎬 Video: Algoritma nedir? Günlük hayattan örnekler</a:t>
+            </a:r>
+          </a:p>
+          <a:p>
+            <a:r>
+              <a:t>💡 İnfografik: Akış şeması sembolleri</a:t>
+            </a:r>
+          </a:p>
+          <a:p>
+            <a:r>
+              <a:t>📸 Görsel: Farklı grafik türleri örnekleri</a:t>
+            </a:r>
+          </a:p>
+          <a:p>
+            <a:r>
+              <a:t>🎬 Video: Veri görselleştirme önemi</a:t>
+            </a:r>
+          </a:p>
+          <a:p>
+            <a:r>
+              <a:t>💡 İnfografik: Grafik türleri ve kullanım alanları</a:t>
+            </a:r>
+          </a:p>
+          <a:p>
+            <a:r>
+              <a:t>📸 Görsel: Excel arayüzü ekran görüntüsü</a:t>
+            </a:r>
+          </a:p>
+          <a:p>
+            <a:r>
+              <a:t>🎬 Video: Excel temel işlemler (2-3 dk)</a:t>
+            </a:r>
+          </a:p>
+          <a:p>
+            <a:r>
+              <a:t>💡 Ekran kaydı: Formül kullanımı demo</a:t>
+            </a:r>
+          </a:p>
+          <a:p>
+            <a:r>
+              <a:t>📸 Görsel: Paint araçları ekran görüntüsü</a:t>
+            </a:r>
+          </a:p>
+          <a:p>
+            <a:r>
+              <a:t>🎬 Video: Paint ile basit çizim teknikleri</a:t>
+            </a:r>
+          </a:p>
+          <a:p>
+            <a:r>
+              <a:t>📸 Görsel: Temel tasarım prensipleri</a:t>
+            </a:r>
+          </a:p>
+          <a:p>
+            <a:r>
+              <a:t>🎬 Video: Dijital tasarıma giriş</a:t>
+            </a:r>
+          </a:p>
+          <a:p>
+            <a:r>
+              <a:t>💡 İnfografik: Renk teorisi ve uyumu</a:t>
+            </a:r>
+          </a:p>
+          <a:p>
+            <a:r>
+              <a:t>📸 Görsel: PowerPoint arayüzü ve araçları</a:t>
+            </a:r>
+          </a:p>
+          <a:p>
+            <a:r>
+              <a:t>🎬 Video: Etkili sunum hazırlama ipuçları</a:t>
+            </a:r>
+          </a:p>
+          <a:p>
+            <a:r>
+              <a:t>💡 Ekran kaydı: PowerPoint temel özellikler</a:t>
             </a:r>
           </a:p>
         </p:txBody>
@@ -764,7 +919,54 @@
           <a:lstStyle/>
           <a:p>
             <a:r>
-              <a:t>Tartışma: Okulda veri ile alınabilecek başka kararlar neler?</a:t>
+              <a:t>Etkinlik: Veri seti verin, ortalama, medyan, mod hesaplasınlar</a:t>
+            </a:r>
+          </a:p>
+          <a:p/>
+          <a:p>
+            <a:r>
+              <a:t>🎨 GÖRSELLEŞTİRME ÖNERİLERİ:</a:t>
+            </a:r>
+          </a:p>
+          <a:p/>
+          <a:p>
+            <a:r>
+              <a:t>📸 Görsel: LAN ve WAN ağ topolojileri şeması</a:t>
+            </a:r>
+          </a:p>
+          <a:p>
+            <a:r>
+              <a:t>🎬 Video: İnternet nasıl çalışır? Animasyonlu anlatım</a:t>
+            </a:r>
+          </a:p>
+          <a:p>
+            <a:r>
+              <a:t>💡 İnfografik: Ev ağı kurulumu diyagramı</a:t>
+            </a:r>
+          </a:p>
+          <a:p>
+            <a:r>
+              <a:t>📸 Görsel: Döngü mantığı şeması</a:t>
+            </a:r>
+          </a:p>
+          <a:p>
+            <a:r>
+              <a:t>🎬 Video: Döngüler Scratch'te nasıl kullanılır?</a:t>
+            </a:r>
+          </a:p>
+          <a:p>
+            <a:r>
+              <a:t>📸 Görsel: Farklı grafik türleri örnekleri</a:t>
+            </a:r>
+          </a:p>
+          <a:p>
+            <a:r>
+              <a:t>🎬 Video: Veri görselleştirme önemi</a:t>
+            </a:r>
+          </a:p>
+          <a:p>
+            <a:r>
+              <a:t>💡 İnfografik: Grafik türleri ve kullanım alanları</a:t>
             </a:r>
           </a:p>
         </p:txBody>
@@ -834,7 +1036,54 @@
           <a:lstStyle/>
           <a:p>
             <a:r>
-              <a:t>Tartışma: Sosyal medyada paylaştığınız veriler ne kadar güvenli?</a:t>
+              <a:t>Tartışma: Okulda veri ile alınabilecek başka kararlar neler?</a:t>
+            </a:r>
+          </a:p>
+          <a:p/>
+          <a:p>
+            <a:r>
+              <a:t>🎨 GÖRSELLEŞTİRME ÖNERİLERİ:</a:t>
+            </a:r>
+          </a:p>
+          <a:p/>
+          <a:p>
+            <a:r>
+              <a:t>📸 Görsel: LAN ve WAN ağ topolojileri şeması</a:t>
+            </a:r>
+          </a:p>
+          <a:p>
+            <a:r>
+              <a:t>🎬 Video: İnternet nasıl çalışır? Animasyonlu anlatım</a:t>
+            </a:r>
+          </a:p>
+          <a:p>
+            <a:r>
+              <a:t>💡 İnfografik: Ev ağı kurulumu diyagramı</a:t>
+            </a:r>
+          </a:p>
+          <a:p>
+            <a:r>
+              <a:t>📸 Görsel: Koşullu yapılar akış diyagramı</a:t>
+            </a:r>
+          </a:p>
+          <a:p>
+            <a:r>
+              <a:t>🎬 Video: Koşullu ifadeler Scratch'te</a:t>
+            </a:r>
+          </a:p>
+          <a:p>
+            <a:r>
+              <a:t>📸 Görsel: Farklı grafik türleri örnekleri</a:t>
+            </a:r>
+          </a:p>
+          <a:p>
+            <a:r>
+              <a:t>🎬 Video: Veri görselleştirme önemi</a:t>
+            </a:r>
+          </a:p>
+          <a:p>
+            <a:r>
+              <a:t>💡 İnfografik: Grafik türleri ve kullanım alanları</a:t>
             </a:r>
           </a:p>
         </p:txBody>
@@ -904,7 +1153,54 @@
           <a:lstStyle/>
           <a:p>
             <a:r>
-              <a:t>Quiz yapın</a:t>
+              <a:t>Tartışma: Sosyal medyada paylaştığınız veriler ne kadar güvenli?</a:t>
+            </a:r>
+          </a:p>
+          <a:p/>
+          <a:p>
+            <a:r>
+              <a:t>🎨 GÖRSELLEŞTİRME ÖNERİLERİ:</a:t>
+            </a:r>
+          </a:p>
+          <a:p/>
+          <a:p>
+            <a:r>
+              <a:t>📸 Görsel: LAN ve WAN ağ topolojileri şeması</a:t>
+            </a:r>
+          </a:p>
+          <a:p>
+            <a:r>
+              <a:t>🎬 Video: İnternet nasıl çalışır? Animasyonlu anlatım</a:t>
+            </a:r>
+          </a:p>
+          <a:p>
+            <a:r>
+              <a:t>💡 İnfografik: Ev ağı kurulumu diyagramı</a:t>
+            </a:r>
+          </a:p>
+          <a:p>
+            <a:r>
+              <a:t>📸 Görsel: KVKK logosu ve temel ilkeler</a:t>
+            </a:r>
+          </a:p>
+          <a:p>
+            <a:r>
+              <a:t>🎬 Video: Kişisel veri nedir? Animasyon</a:t>
+            </a:r>
+          </a:p>
+          <a:p>
+            <a:r>
+              <a:t>📸 Görsel: Farklı grafik türleri örnekleri</a:t>
+            </a:r>
+          </a:p>
+          <a:p>
+            <a:r>
+              <a:t>🎬 Video: Veri görselleştirme önemi</a:t>
+            </a:r>
+          </a:p>
+          <a:p>
+            <a:r>
+              <a:t>💡 İnfografik: Grafik türleri ve kullanım alanları</a:t>
             </a:r>
           </a:p>
         </p:txBody>
@@ -974,7 +1270,529 @@
           <a:lstStyle/>
           <a:p>
             <a:r>
+              <a:t>Quiz yapın</a:t>
+            </a:r>
+          </a:p>
+          <a:p/>
+          <a:p>
+            <a:r>
+              <a:t>🎨 GÖRSELLEŞTİRME ÖNERİLERİ:</a:t>
+            </a:r>
+          </a:p>
+          <a:p/>
+          <a:p>
+            <a:r>
+              <a:t>📸 Görsel: CPU, RAM ve anakart fotoğrafları</a:t>
+            </a:r>
+          </a:p>
+          <a:p>
+            <a:r>
+              <a:t>🎬 Video: Bilgisayar donanımı tanıtım videosu (1-2 dk)</a:t>
+            </a:r>
+          </a:p>
+          <a:p>
+            <a:r>
+              <a:t>💡 İnfografik: Bilgisayar bileşenleri şeması</a:t>
+            </a:r>
+          </a:p>
+          <a:p>
+            <a:r>
+              <a:t>📸 Görsel: KVKK logosu ve temel ilkeler</a:t>
+            </a:r>
+          </a:p>
+          <a:p>
+            <a:r>
+              <a:t>🎬 Video: Kişisel veri nedir? Animasyon</a:t>
+            </a:r>
+          </a:p>
+          <a:p>
+            <a:r>
+              <a:t>📸 Görsel: Koşullu yapılar akış diyagramı</a:t>
+            </a:r>
+          </a:p>
+          <a:p>
+            <a:r>
+              <a:t>🎬 Video: Koşullu ifadeler Scratch'te</a:t>
+            </a:r>
+          </a:p>
+          <a:p>
+            <a:r>
+              <a:t>📸 Görsel: Farklı grafik türleri örnekleri</a:t>
+            </a:r>
+          </a:p>
+          <a:p>
+            <a:r>
+              <a:t>🎬 Video: Veri görselleştirme önemi</a:t>
+            </a:r>
+          </a:p>
+          <a:p>
+            <a:r>
+              <a:t>💡 İnfografik: Grafik türleri ve kullanım alanları</a:t>
+            </a:r>
+          </a:p>
+          <a:p>
+            <a:r>
+              <a:t>📸 Görsel: Excel arayüzü ekran görüntüsü</a:t>
+            </a:r>
+          </a:p>
+          <a:p>
+            <a:r>
+              <a:t>🎬 Video: Excel temel işlemler (2-3 dk)</a:t>
+            </a:r>
+          </a:p>
+          <a:p>
+            <a:r>
+              <a:t>💡 Ekran kaydı: Formül kullanımı demo</a:t>
+            </a:r>
+          </a:p>
+        </p:txBody>
+      </p:sp>
+      <p:sp>
+        <p:nvSpPr>
+          <p:cNvPr id="4" name="Slide Number Placeholder 3"/>
+          <p:cNvSpPr>
+            <a:spLocks noGrp="1"/>
+          </p:cNvSpPr>
+          <p:nvPr>
+            <p:ph type="sldNum" idx="5" sz="quarter"/>
+          </p:nvPr>
+        </p:nvSpPr>
+        <p:spPr/>
+      </p:sp>
+    </p:spTree>
+  </p:cSld>
+  <p:clrMapOvr>
+    <a:masterClrMapping/>
+  </p:clrMapOvr>
+</p:notes>
+</file>
+
+<file path=ppt/notesSlides/notesSlide16.xml><?xml version="1.0" encoding="utf-8"?>
+<p:notes xmlns:a="http://schemas.openxmlformats.org/drawingml/2006/main" xmlns:p="http://schemas.openxmlformats.org/presentationml/2006/main" xmlns:r="http://schemas.openxmlformats.org/officeDocument/2006/relationships">
+  <p:cSld>
+    <p:spTree>
+      <p:nvGrpSpPr>
+        <p:cNvPr id="1" name=""/>
+        <p:cNvGrpSpPr/>
+        <p:nvPr/>
+      </p:nvGrpSpPr>
+      <p:grpSpPr>
+        <a:xfrm>
+          <a:off x="0" y="0"/>
+          <a:ext cx="0" cy="0"/>
+          <a:chOff x="0" y="0"/>
+          <a:chExt cx="0" cy="0"/>
+        </a:xfrm>
+      </p:grpSpPr>
+      <p:sp>
+        <p:nvSpPr>
+          <p:cNvPr id="2" name="Slide Image Placeholder 1"/>
+          <p:cNvSpPr>
+            <a:spLocks noGrp="1"/>
+          </p:cNvSpPr>
+          <p:nvPr>
+            <p:ph type="sldImg" idx="2"/>
+          </p:nvPr>
+        </p:nvSpPr>
+        <p:spPr/>
+      </p:sp>
+      <p:sp>
+        <p:nvSpPr>
+          <p:cNvPr id="3" name="Notes Placeholder 2"/>
+          <p:cNvSpPr>
+            <a:spLocks noGrp="1"/>
+          </p:cNvSpPr>
+          <p:nvPr>
+            <p:ph type="body" idx="3" sz="quarter"/>
+          </p:nvPr>
+        </p:nvSpPr>
+        <p:spPr/>
+        <p:txBody>
+          <a:bodyPr/>
+          <a:lstStyle/>
+          <a:p>
+            <a:r>
               <a:t>Tüm kaynakları önceden inceleyin</a:t>
+            </a:r>
+          </a:p>
+          <a:p/>
+          <a:p>
+            <a:r>
+              <a:t>🎨 GÖRSELLEŞTİRME ÖNERİLERİ:</a:t>
+            </a:r>
+          </a:p>
+          <a:p/>
+          <a:p>
+            <a:r>
+              <a:t>📸 Görsel: Farklı grafik türleri örnekleri</a:t>
+            </a:r>
+          </a:p>
+          <a:p>
+            <a:r>
+              <a:t>🎬 Video: Veri görselleştirme önemi</a:t>
+            </a:r>
+          </a:p>
+          <a:p>
+            <a:r>
+              <a:t>💡 İnfografik: Grafik türleri ve kullanım alanları</a:t>
+            </a:r>
+          </a:p>
+          <a:p>
+            <a:r>
+              <a:t>📸 Görsel: Excel arayüzü ekran görüntüsü</a:t>
+            </a:r>
+          </a:p>
+          <a:p>
+            <a:r>
+              <a:t>🎬 Video: Excel temel işlemler (2-3 dk)</a:t>
+            </a:r>
+          </a:p>
+          <a:p>
+            <a:r>
+              <a:t>💡 Ekran kaydı: Formül kullanımı demo</a:t>
+            </a:r>
+          </a:p>
+        </p:txBody>
+      </p:sp>
+      <p:sp>
+        <p:nvSpPr>
+          <p:cNvPr id="4" name="Slide Number Placeholder 3"/>
+          <p:cNvSpPr>
+            <a:spLocks noGrp="1"/>
+          </p:cNvSpPr>
+          <p:nvPr>
+            <p:ph type="sldNum" idx="5" sz="quarter"/>
+          </p:nvPr>
+        </p:nvSpPr>
+        <p:spPr/>
+      </p:sp>
+    </p:spTree>
+  </p:cSld>
+  <p:clrMapOvr>
+    <a:masterClrMapping/>
+  </p:clrMapOvr>
+</p:notes>
+</file>
+
+<file path=ppt/notesSlides/notesSlide17.xml><?xml version="1.0" encoding="utf-8"?>
+<p:notes xmlns:a="http://schemas.openxmlformats.org/drawingml/2006/main" xmlns:p="http://schemas.openxmlformats.org/presentationml/2006/main" xmlns:r="http://schemas.openxmlformats.org/officeDocument/2006/relationships">
+  <p:cSld>
+    <p:spTree>
+      <p:nvGrpSpPr>
+        <p:cNvPr id="1" name=""/>
+        <p:cNvGrpSpPr/>
+        <p:nvPr/>
+      </p:nvGrpSpPr>
+      <p:grpSpPr>
+        <a:xfrm>
+          <a:off x="0" y="0"/>
+          <a:ext cx="0" cy="0"/>
+          <a:chOff x="0" y="0"/>
+          <a:chExt cx="0" cy="0"/>
+        </a:xfrm>
+      </p:grpSpPr>
+      <p:sp>
+        <p:nvSpPr>
+          <p:cNvPr id="2" name="Slide Image Placeholder 1"/>
+          <p:cNvSpPr>
+            <a:spLocks noGrp="1"/>
+          </p:cNvSpPr>
+          <p:nvPr>
+            <p:ph type="sldImg" idx="2"/>
+          </p:nvPr>
+        </p:nvSpPr>
+        <p:spPr/>
+      </p:sp>
+      <p:sp>
+        <p:nvSpPr>
+          <p:cNvPr id="3" name="Notes Placeholder 2"/>
+          <p:cNvSpPr>
+            <a:spLocks noGrp="1"/>
+          </p:cNvSpPr>
+          <p:nvPr>
+            <p:ph type="body" idx="3" sz="quarter"/>
+          </p:nvPr>
+        </p:nvSpPr>
+        <p:spPr/>
+        <p:txBody>
+          <a:bodyPr/>
+          <a:lstStyle/>
+          <a:p>
+            <a:r>
+              <a:t>🎨 GÖRSELLEŞTİRME ÖNERİLERİ:</a:t>
+            </a:r>
+          </a:p>
+          <a:p/>
+          <a:p>
+            <a:r>
+              <a:t>📸 Görsel: Farklı grafik türleri örnekleri</a:t>
+            </a:r>
+          </a:p>
+          <a:p>
+            <a:r>
+              <a:t>🎬 Video: Veri görselleştirme önemi</a:t>
+            </a:r>
+          </a:p>
+          <a:p>
+            <a:r>
+              <a:t>💡 İnfografik: Grafik türleri ve kullanım alanları</a:t>
+            </a:r>
+          </a:p>
+        </p:txBody>
+      </p:sp>
+      <p:sp>
+        <p:nvSpPr>
+          <p:cNvPr id="4" name="Slide Number Placeholder 3"/>
+          <p:cNvSpPr>
+            <a:spLocks noGrp="1"/>
+          </p:cNvSpPr>
+          <p:nvPr>
+            <p:ph type="sldNum" idx="5" sz="quarter"/>
+          </p:nvPr>
+        </p:nvSpPr>
+        <p:spPr/>
+      </p:sp>
+    </p:spTree>
+  </p:cSld>
+  <p:clrMapOvr>
+    <a:masterClrMapping/>
+  </p:clrMapOvr>
+</p:notes>
+</file>
+
+<file path=ppt/notesSlides/notesSlide18.xml><?xml version="1.0" encoding="utf-8"?>
+<p:notes xmlns:a="http://schemas.openxmlformats.org/drawingml/2006/main" xmlns:p="http://schemas.openxmlformats.org/presentationml/2006/main" xmlns:r="http://schemas.openxmlformats.org/officeDocument/2006/relationships">
+  <p:cSld>
+    <p:spTree>
+      <p:nvGrpSpPr>
+        <p:cNvPr id="1" name=""/>
+        <p:cNvGrpSpPr/>
+        <p:nvPr/>
+      </p:nvGrpSpPr>
+      <p:grpSpPr>
+        <a:xfrm>
+          <a:off x="0" y="0"/>
+          <a:ext cx="0" cy="0"/>
+          <a:chOff x="0" y="0"/>
+          <a:chExt cx="0" cy="0"/>
+        </a:xfrm>
+      </p:grpSpPr>
+      <p:sp>
+        <p:nvSpPr>
+          <p:cNvPr id="2" name="Slide Image Placeholder 1"/>
+          <p:cNvSpPr>
+            <a:spLocks noGrp="1"/>
+          </p:cNvSpPr>
+          <p:nvPr>
+            <p:ph type="sldImg" idx="2"/>
+          </p:nvPr>
+        </p:nvSpPr>
+        <p:spPr/>
+      </p:sp>
+      <p:sp>
+        <p:nvSpPr>
+          <p:cNvPr id="3" name="Notes Placeholder 2"/>
+          <p:cNvSpPr>
+            <a:spLocks noGrp="1"/>
+          </p:cNvSpPr>
+          <p:nvPr>
+            <p:ph type="body" idx="3" sz="quarter"/>
+          </p:nvPr>
+        </p:nvSpPr>
+        <p:spPr/>
+        <p:txBody>
+          <a:bodyPr/>
+          <a:lstStyle/>
+          <a:p>
+            <a:r>
+              <a:t>🎨 GÖRSELLEŞTİRME ÖNERİLERİ:</a:t>
+            </a:r>
+          </a:p>
+          <a:p/>
+          <a:p>
+            <a:r>
+              <a:t>📸 Görsel: CPU, RAM ve anakart fotoğrafları</a:t>
+            </a:r>
+          </a:p>
+          <a:p>
+            <a:r>
+              <a:t>🎬 Video: Bilgisayar donanımı tanıtım videosu (1-2 dk)</a:t>
+            </a:r>
+          </a:p>
+          <a:p>
+            <a:r>
+              <a:t>💡 İnfografik: Bilgisayar bileşenleri şeması</a:t>
+            </a:r>
+          </a:p>
+          <a:p>
+            <a:r>
+              <a:t>📸 Görsel: Scratch arayüzü ekran görüntüsü</a:t>
+            </a:r>
+          </a:p>
+          <a:p>
+            <a:r>
+              <a:t>🎬 Video: Scratch ile basit oyun yapımı (3-5 dk)</a:t>
+            </a:r>
+          </a:p>
+          <a:p>
+            <a:r>
+              <a:t>💡 Ekran kaydı: Adım adım Scratch projesi</a:t>
+            </a:r>
+          </a:p>
+          <a:p>
+            <a:r>
+              <a:t>📸 Görsel: Koşullu yapılar akış diyagramı</a:t>
+            </a:r>
+          </a:p>
+          <a:p>
+            <a:r>
+              <a:t>🎬 Video: Koşullu ifadeler Scratch'te</a:t>
+            </a:r>
+          </a:p>
+        </p:txBody>
+      </p:sp>
+      <p:sp>
+        <p:nvSpPr>
+          <p:cNvPr id="4" name="Slide Number Placeholder 3"/>
+          <p:cNvSpPr>
+            <a:spLocks noGrp="1"/>
+          </p:cNvSpPr>
+          <p:nvPr>
+            <p:ph type="sldNum" idx="5" sz="quarter"/>
+          </p:nvPr>
+        </p:nvSpPr>
+        <p:spPr/>
+      </p:sp>
+    </p:spTree>
+  </p:cSld>
+  <p:clrMapOvr>
+    <a:masterClrMapping/>
+  </p:clrMapOvr>
+</p:notes>
+</file>
+
+<file path=ppt/notesSlides/notesSlide19.xml><?xml version="1.0" encoding="utf-8"?>
+<p:notes xmlns:a="http://schemas.openxmlformats.org/drawingml/2006/main" xmlns:p="http://schemas.openxmlformats.org/presentationml/2006/main" xmlns:r="http://schemas.openxmlformats.org/officeDocument/2006/relationships">
+  <p:cSld>
+    <p:spTree>
+      <p:nvGrpSpPr>
+        <p:cNvPr id="1" name=""/>
+        <p:cNvGrpSpPr/>
+        <p:nvPr/>
+      </p:nvGrpSpPr>
+      <p:grpSpPr>
+        <a:xfrm>
+          <a:off x="0" y="0"/>
+          <a:ext cx="0" cy="0"/>
+          <a:chOff x="0" y="0"/>
+          <a:chExt cx="0" cy="0"/>
+        </a:xfrm>
+      </p:grpSpPr>
+      <p:sp>
+        <p:nvSpPr>
+          <p:cNvPr id="2" name="Slide Image Placeholder 1"/>
+          <p:cNvSpPr>
+            <a:spLocks noGrp="1"/>
+          </p:cNvSpPr>
+          <p:nvPr>
+            <p:ph type="sldImg" idx="2"/>
+          </p:nvPr>
+        </p:nvSpPr>
+        <p:spPr/>
+      </p:sp>
+      <p:sp>
+        <p:nvSpPr>
+          <p:cNvPr id="3" name="Notes Placeholder 2"/>
+          <p:cNvSpPr>
+            <a:spLocks noGrp="1"/>
+          </p:cNvSpPr>
+          <p:nvPr>
+            <p:ph type="body" idx="3" sz="quarter"/>
+          </p:nvPr>
+        </p:nvSpPr>
+        <p:spPr/>
+        <p:txBody>
+          <a:bodyPr/>
+          <a:lstStyle/>
+          <a:p>
+            <a:r>
+              <a:t>🎨 GÖRSELLEŞTİRME ÖNERİLERİ:</a:t>
+            </a:r>
+          </a:p>
+          <a:p/>
+          <a:p>
+            <a:r>
+              <a:t>📸 Görsel: CPU, RAM ve anakart fotoğrafları</a:t>
+            </a:r>
+          </a:p>
+          <a:p>
+            <a:r>
+              <a:t>🎬 Video: Bilgisayar donanımı tanıtım videosu (1-2 dk)</a:t>
+            </a:r>
+          </a:p>
+          <a:p>
+            <a:r>
+              <a:t>💡 İnfografik: Bilgisayar bileşenleri şeması</a:t>
+            </a:r>
+          </a:p>
+          <a:p>
+            <a:r>
+              <a:t>📸 Görsel: MS Word arayüz ekran görüntüsü</a:t>
+            </a:r>
+          </a:p>
+          <a:p>
+            <a:r>
+              <a:t>🎬 Video: Word temel özellikleri demo (2-3 dk)</a:t>
+            </a:r>
+          </a:p>
+          <a:p>
+            <a:r>
+              <a:t>💡 Ekran kaydı: Biçimlendirme araçları kullanımı</a:t>
+            </a:r>
+          </a:p>
+          <a:p>
+            <a:r>
+              <a:t>📸 Görsel: LAN ve WAN ağ topolojileri şeması</a:t>
+            </a:r>
+          </a:p>
+          <a:p>
+            <a:r>
+              <a:t>🎬 Video: İnternet nasıl çalışır? Animasyonlu anlatım</a:t>
+            </a:r>
+          </a:p>
+          <a:p>
+            <a:r>
+              <a:t>💡 İnfografik: Ev ağı kurulumu diyagramı</a:t>
+            </a:r>
+          </a:p>
+          <a:p>
+            <a:r>
+              <a:t>📸 Görsel: Scratch arayüzü ekran görüntüsü</a:t>
+            </a:r>
+          </a:p>
+          <a:p>
+            <a:r>
+              <a:t>🎬 Video: Scratch ile basit oyun yapımı (3-5 dk)</a:t>
+            </a:r>
+          </a:p>
+          <a:p>
+            <a:r>
+              <a:t>💡 Ekran kaydı: Adım adım Scratch projesi</a:t>
+            </a:r>
+          </a:p>
+          <a:p>
+            <a:r>
+              <a:t>📸 Görsel: Farklı grafik türleri örnekleri</a:t>
+            </a:r>
+          </a:p>
+          <a:p>
+            <a:r>
+              <a:t>🎬 Video: Veri görselleştirme önemi</a:t>
+            </a:r>
+          </a:p>
+          <a:p>
+            <a:r>
+              <a:t>💡 İnfografik: Grafik türleri ve kullanım alanları</a:t>
             </a:r>
           </a:p>
         </p:txBody>
@@ -1044,7 +1862,1289 @@
           <a:lstStyle/>
           <a:p>
             <a:r>
-              <a:t>Tartışma: Günlük hayattan veri örnekleri verin (fiyatlar, notlar, hava durumu)</a:t>
+              <a:t>Video: 'Veri ve Bilgi Arasındaki Fark' ile başlayın</a:t>
+            </a:r>
+          </a:p>
+          <a:p/>
+          <a:p>
+            <a:r>
+              <a:t>🎨 GÖRSELLEŞTİRME ÖNERİLERİ:</a:t>
+            </a:r>
+          </a:p>
+          <a:p/>
+          <a:p>
+            <a:r>
+              <a:t>📸 Görsel: CPU, RAM ve anakart fotoğrafları</a:t>
+            </a:r>
+          </a:p>
+          <a:p>
+            <a:r>
+              <a:t>🎬 Video: Bilgisayar donanımı tanıtım videosu (1-2 dk)</a:t>
+            </a:r>
+          </a:p>
+          <a:p>
+            <a:r>
+              <a:t>💡 İnfografik: Bilgisayar bileşenleri şeması</a:t>
+            </a:r>
+          </a:p>
+          <a:p>
+            <a:r>
+              <a:t>📸 Görsel: Scratch arayüzü ekran görüntüsü</a:t>
+            </a:r>
+          </a:p>
+          <a:p>
+            <a:r>
+              <a:t>🎬 Video: Scratch ile basit oyun yapımı (3-5 dk)</a:t>
+            </a:r>
+          </a:p>
+          <a:p>
+            <a:r>
+              <a:t>💡 Ekran kaydı: Adım adım Scratch projesi</a:t>
+            </a:r>
+          </a:p>
+          <a:p>
+            <a:r>
+              <a:t>📸 Görsel: Farklı grafik türleri örnekleri</a:t>
+            </a:r>
+          </a:p>
+          <a:p>
+            <a:r>
+              <a:t>🎬 Video: Veri görselleştirme önemi</a:t>
+            </a:r>
+          </a:p>
+          <a:p>
+            <a:r>
+              <a:t>💡 İnfografik: Grafik türleri ve kullanım alanları</a:t>
+            </a:r>
+          </a:p>
+          <a:p>
+            <a:r>
+              <a:t>📸 Görsel: Excel arayüzü ekran görüntüsü</a:t>
+            </a:r>
+          </a:p>
+          <a:p>
+            <a:r>
+              <a:t>🎬 Video: Excel temel işlemler (2-3 dk)</a:t>
+            </a:r>
+          </a:p>
+          <a:p>
+            <a:r>
+              <a:t>💡 Ekran kaydı: Formül kullanımı demo</a:t>
+            </a:r>
+          </a:p>
+        </p:txBody>
+      </p:sp>
+      <p:sp>
+        <p:nvSpPr>
+          <p:cNvPr id="4" name="Slide Number Placeholder 3"/>
+          <p:cNvSpPr>
+            <a:spLocks noGrp="1"/>
+          </p:cNvSpPr>
+          <p:nvPr>
+            <p:ph type="sldNum" idx="5" sz="quarter"/>
+          </p:nvPr>
+        </p:nvSpPr>
+        <p:spPr/>
+      </p:sp>
+    </p:spTree>
+  </p:cSld>
+  <p:clrMapOvr>
+    <a:masterClrMapping/>
+  </p:clrMapOvr>
+</p:notes>
+</file>
+
+<file path=ppt/notesSlides/notesSlide20.xml><?xml version="1.0" encoding="utf-8"?>
+<p:notes xmlns:a="http://schemas.openxmlformats.org/drawingml/2006/main" xmlns:p="http://schemas.openxmlformats.org/presentationml/2006/main" xmlns:r="http://schemas.openxmlformats.org/officeDocument/2006/relationships">
+  <p:cSld>
+    <p:spTree>
+      <p:nvGrpSpPr>
+        <p:cNvPr id="1" name=""/>
+        <p:cNvGrpSpPr/>
+        <p:nvPr/>
+      </p:nvGrpSpPr>
+      <p:grpSpPr>
+        <a:xfrm>
+          <a:off x="0" y="0"/>
+          <a:ext cx="0" cy="0"/>
+          <a:chOff x="0" y="0"/>
+          <a:chExt cx="0" cy="0"/>
+        </a:xfrm>
+      </p:grpSpPr>
+      <p:sp>
+        <p:nvSpPr>
+          <p:cNvPr id="2" name="Slide Image Placeholder 1"/>
+          <p:cNvSpPr>
+            <a:spLocks noGrp="1"/>
+          </p:cNvSpPr>
+          <p:nvPr>
+            <p:ph type="sldImg" idx="2"/>
+          </p:nvPr>
+        </p:nvSpPr>
+        <p:spPr/>
+      </p:sp>
+      <p:sp>
+        <p:nvSpPr>
+          <p:cNvPr id="3" name="Notes Placeholder 2"/>
+          <p:cNvSpPr>
+            <a:spLocks noGrp="1"/>
+          </p:cNvSpPr>
+          <p:nvPr>
+            <p:ph type="body" idx="3" sz="quarter"/>
+          </p:nvPr>
+        </p:nvSpPr>
+        <p:spPr/>
+        <p:txBody>
+          <a:bodyPr/>
+          <a:lstStyle/>
+          <a:p>
+            <a:r>
+              <a:t>🎨 GÖRSELLEŞTİRME ÖNERİLERİ:</a:t>
+            </a:r>
+          </a:p>
+          <a:p/>
+          <a:p>
+            <a:r>
+              <a:t>📸 Görsel: CPU, RAM ve anakart fotoğrafları</a:t>
+            </a:r>
+          </a:p>
+          <a:p>
+            <a:r>
+              <a:t>🎬 Video: Bilgisayar donanımı tanıtım videosu (1-2 dk)</a:t>
+            </a:r>
+          </a:p>
+          <a:p>
+            <a:r>
+              <a:t>💡 İnfografik: Bilgisayar bileşenleri şeması</a:t>
+            </a:r>
+          </a:p>
+          <a:p>
+            <a:r>
+              <a:t>📸 Görsel: MS Word arayüz ekran görüntüsü</a:t>
+            </a:r>
+          </a:p>
+          <a:p>
+            <a:r>
+              <a:t>🎬 Video: Word temel özellikleri demo (2-3 dk)</a:t>
+            </a:r>
+          </a:p>
+          <a:p>
+            <a:r>
+              <a:t>💡 Ekran kaydı: Biçimlendirme araçları kullanımı</a:t>
+            </a:r>
+          </a:p>
+          <a:p>
+            <a:r>
+              <a:t>📸 Görsel: LAN ve WAN ağ topolojileri şeması</a:t>
+            </a:r>
+          </a:p>
+          <a:p>
+            <a:r>
+              <a:t>🎬 Video: İnternet nasıl çalışır? Animasyonlu anlatım</a:t>
+            </a:r>
+          </a:p>
+          <a:p>
+            <a:r>
+              <a:t>💡 İnfografik: Ev ağı kurulumu diyagramı</a:t>
+            </a:r>
+          </a:p>
+        </p:txBody>
+      </p:sp>
+      <p:sp>
+        <p:nvSpPr>
+          <p:cNvPr id="4" name="Slide Number Placeholder 3"/>
+          <p:cNvSpPr>
+            <a:spLocks noGrp="1"/>
+          </p:cNvSpPr>
+          <p:nvPr>
+            <p:ph type="sldNum" idx="5" sz="quarter"/>
+          </p:nvPr>
+        </p:nvSpPr>
+        <p:spPr/>
+      </p:sp>
+    </p:spTree>
+  </p:cSld>
+  <p:clrMapOvr>
+    <a:masterClrMapping/>
+  </p:clrMapOvr>
+</p:notes>
+</file>
+
+<file path=ppt/notesSlides/notesSlide21.xml><?xml version="1.0" encoding="utf-8"?>
+<p:notes xmlns:a="http://schemas.openxmlformats.org/drawingml/2006/main" xmlns:p="http://schemas.openxmlformats.org/presentationml/2006/main" xmlns:r="http://schemas.openxmlformats.org/officeDocument/2006/relationships">
+  <p:cSld>
+    <p:spTree>
+      <p:nvGrpSpPr>
+        <p:cNvPr id="1" name=""/>
+        <p:cNvGrpSpPr/>
+        <p:nvPr/>
+      </p:nvGrpSpPr>
+      <p:grpSpPr>
+        <a:xfrm>
+          <a:off x="0" y="0"/>
+          <a:ext cx="0" cy="0"/>
+          <a:chOff x="0" y="0"/>
+          <a:chExt cx="0" cy="0"/>
+        </a:xfrm>
+      </p:grpSpPr>
+      <p:sp>
+        <p:nvSpPr>
+          <p:cNvPr id="2" name="Slide Image Placeholder 1"/>
+          <p:cNvSpPr>
+            <a:spLocks noGrp="1"/>
+          </p:cNvSpPr>
+          <p:nvPr>
+            <p:ph type="sldImg" idx="2"/>
+          </p:nvPr>
+        </p:nvSpPr>
+        <p:spPr/>
+      </p:sp>
+      <p:sp>
+        <p:nvSpPr>
+          <p:cNvPr id="3" name="Notes Placeholder 2"/>
+          <p:cNvSpPr>
+            <a:spLocks noGrp="1"/>
+          </p:cNvSpPr>
+          <p:nvPr>
+            <p:ph type="body" idx="3" sz="quarter"/>
+          </p:nvPr>
+        </p:nvSpPr>
+        <p:spPr/>
+        <p:txBody>
+          <a:bodyPr/>
+          <a:lstStyle/>
+          <a:p>
+            <a:r>
+              <a:t>🎨 GÖRSELLEŞTİRME ÖNERİLERİ:</a:t>
+            </a:r>
+          </a:p>
+          <a:p/>
+          <a:p>
+            <a:r>
+              <a:t>📸 Görsel: Temel tasarım prensipleri</a:t>
+            </a:r>
+          </a:p>
+          <a:p>
+            <a:r>
+              <a:t>🎬 Video: Dijital tasarıma giriş</a:t>
+            </a:r>
+          </a:p>
+          <a:p>
+            <a:r>
+              <a:t>💡 İnfografik: Renk teorisi ve uyumu</a:t>
+            </a:r>
+          </a:p>
+        </p:txBody>
+      </p:sp>
+      <p:sp>
+        <p:nvSpPr>
+          <p:cNvPr id="4" name="Slide Number Placeholder 3"/>
+          <p:cNvSpPr>
+            <a:spLocks noGrp="1"/>
+          </p:cNvSpPr>
+          <p:nvPr>
+            <p:ph type="sldNum" idx="5" sz="quarter"/>
+          </p:nvPr>
+        </p:nvSpPr>
+        <p:spPr/>
+      </p:sp>
+    </p:spTree>
+  </p:cSld>
+  <p:clrMapOvr>
+    <a:masterClrMapping/>
+  </p:clrMapOvr>
+</p:notes>
+</file>
+
+<file path=ppt/notesSlides/notesSlide22.xml><?xml version="1.0" encoding="utf-8"?>
+<p:notes xmlns:a="http://schemas.openxmlformats.org/drawingml/2006/main" xmlns:p="http://schemas.openxmlformats.org/presentationml/2006/main" xmlns:r="http://schemas.openxmlformats.org/officeDocument/2006/relationships">
+  <p:cSld>
+    <p:spTree>
+      <p:nvGrpSpPr>
+        <p:cNvPr id="1" name=""/>
+        <p:cNvGrpSpPr/>
+        <p:nvPr/>
+      </p:nvGrpSpPr>
+      <p:grpSpPr>
+        <a:xfrm>
+          <a:off x="0" y="0"/>
+          <a:ext cx="0" cy="0"/>
+          <a:chOff x="0" y="0"/>
+          <a:chExt cx="0" cy="0"/>
+        </a:xfrm>
+      </p:grpSpPr>
+      <p:sp>
+        <p:nvSpPr>
+          <p:cNvPr id="2" name="Slide Image Placeholder 1"/>
+          <p:cNvSpPr>
+            <a:spLocks noGrp="1"/>
+          </p:cNvSpPr>
+          <p:nvPr>
+            <p:ph type="sldImg" idx="2"/>
+          </p:nvPr>
+        </p:nvSpPr>
+        <p:spPr/>
+      </p:sp>
+      <p:sp>
+        <p:nvSpPr>
+          <p:cNvPr id="3" name="Notes Placeholder 2"/>
+          <p:cNvSpPr>
+            <a:spLocks noGrp="1"/>
+          </p:cNvSpPr>
+          <p:nvPr>
+            <p:ph type="body" idx="3" sz="quarter"/>
+          </p:nvPr>
+        </p:nvSpPr>
+        <p:spPr/>
+        <p:txBody>
+          <a:bodyPr/>
+          <a:lstStyle/>
+          <a:p>
+            <a:r>
+              <a:t>🎨 GÖRSELLEŞTİRME ÖNERİLERİ:</a:t>
+            </a:r>
+          </a:p>
+          <a:p/>
+          <a:p>
+            <a:r>
+              <a:t>📸 Görsel: LAN ve WAN ağ topolojileri şeması</a:t>
+            </a:r>
+          </a:p>
+          <a:p>
+            <a:r>
+              <a:t>🎬 Video: İnternet nasıl çalışır? Animasyonlu anlatım</a:t>
+            </a:r>
+          </a:p>
+          <a:p>
+            <a:r>
+              <a:t>💡 İnfografik: Ev ağı kurulumu diyagramı</a:t>
+            </a:r>
+          </a:p>
+          <a:p>
+            <a:r>
+              <a:t>📸 Görsel: Koşullu yapılar akış diyagramı</a:t>
+            </a:r>
+          </a:p>
+          <a:p>
+            <a:r>
+              <a:t>🎬 Video: Koşullu ifadeler Scratch'te</a:t>
+            </a:r>
+          </a:p>
+        </p:txBody>
+      </p:sp>
+      <p:sp>
+        <p:nvSpPr>
+          <p:cNvPr id="4" name="Slide Number Placeholder 3"/>
+          <p:cNvSpPr>
+            <a:spLocks noGrp="1"/>
+          </p:cNvSpPr>
+          <p:nvPr>
+            <p:ph type="sldNum" idx="5" sz="quarter"/>
+          </p:nvPr>
+        </p:nvSpPr>
+        <p:spPr/>
+      </p:sp>
+    </p:spTree>
+  </p:cSld>
+  <p:clrMapOvr>
+    <a:masterClrMapping/>
+  </p:clrMapOvr>
+</p:notes>
+</file>
+
+<file path=ppt/notesSlides/notesSlide23.xml><?xml version="1.0" encoding="utf-8"?>
+<p:notes xmlns:a="http://schemas.openxmlformats.org/drawingml/2006/main" xmlns:p="http://schemas.openxmlformats.org/presentationml/2006/main" xmlns:r="http://schemas.openxmlformats.org/officeDocument/2006/relationships">
+  <p:cSld>
+    <p:spTree>
+      <p:nvGrpSpPr>
+        <p:cNvPr id="1" name=""/>
+        <p:cNvGrpSpPr/>
+        <p:nvPr/>
+      </p:nvGrpSpPr>
+      <p:grpSpPr>
+        <a:xfrm>
+          <a:off x="0" y="0"/>
+          <a:ext cx="0" cy="0"/>
+          <a:chOff x="0" y="0"/>
+          <a:chExt cx="0" cy="0"/>
+        </a:xfrm>
+      </p:grpSpPr>
+      <p:sp>
+        <p:nvSpPr>
+          <p:cNvPr id="2" name="Slide Image Placeholder 1"/>
+          <p:cNvSpPr>
+            <a:spLocks noGrp="1"/>
+          </p:cNvSpPr>
+          <p:nvPr>
+            <p:ph type="sldImg" idx="2"/>
+          </p:nvPr>
+        </p:nvSpPr>
+        <p:spPr/>
+      </p:sp>
+      <p:sp>
+        <p:nvSpPr>
+          <p:cNvPr id="3" name="Notes Placeholder 2"/>
+          <p:cNvSpPr>
+            <a:spLocks noGrp="1"/>
+          </p:cNvSpPr>
+          <p:nvPr>
+            <p:ph type="body" idx="3" sz="quarter"/>
+          </p:nvPr>
+        </p:nvSpPr>
+        <p:spPr/>
+        <p:txBody>
+          <a:bodyPr/>
+          <a:lstStyle/>
+          <a:p>
+            <a:r>
+              <a:t>🎨 GÖRSELLEŞTİRME ÖNERİLERİ:</a:t>
+            </a:r>
+          </a:p>
+          <a:p/>
+          <a:p>
+            <a:r>
+              <a:t>📸 Görsel: CPU, RAM ve anakart fotoğrafları</a:t>
+            </a:r>
+          </a:p>
+          <a:p>
+            <a:r>
+              <a:t>🎬 Video: Bilgisayar donanımı tanıtım videosu (1-2 dk)</a:t>
+            </a:r>
+          </a:p>
+          <a:p>
+            <a:r>
+              <a:t>💡 İnfografik: Bilgisayar bileşenleri şeması</a:t>
+            </a:r>
+          </a:p>
+          <a:p>
+            <a:r>
+              <a:t>📸 Görsel: LAN ve WAN ağ topolojileri şeması</a:t>
+            </a:r>
+          </a:p>
+          <a:p>
+            <a:r>
+              <a:t>🎬 Video: İnternet nasıl çalışır? Animasyonlu anlatım</a:t>
+            </a:r>
+          </a:p>
+          <a:p>
+            <a:r>
+              <a:t>💡 İnfografik: Ev ağı kurulumu diyagramı</a:t>
+            </a:r>
+          </a:p>
+          <a:p>
+            <a:r>
+              <a:t>📸 Görsel: Telif hakları sembolleri (©, ®, ™)</a:t>
+            </a:r>
+          </a:p>
+          <a:p>
+            <a:r>
+              <a:t>🎬 Video: Dijital etik ve telif hakları</a:t>
+            </a:r>
+          </a:p>
+          <a:p>
+            <a:r>
+              <a:t>💡 İnfografik: Lisans türleri karşılaştırması</a:t>
+            </a:r>
+          </a:p>
+          <a:p>
+            <a:r>
+              <a:t>📸 Görsel: Yapay zeka uygulama örnekleri (Siri, Alexa, ChatGPT)</a:t>
+            </a:r>
+          </a:p>
+          <a:p>
+            <a:r>
+              <a:t>🎬 Video: Yapay zeka nedir? Çocuklar için anlatım</a:t>
+            </a:r>
+          </a:p>
+          <a:p>
+            <a:r>
+              <a:t>💡 İnfografik: AI kullanım alanları</a:t>
+            </a:r>
+          </a:p>
+          <a:p>
+            <a:r>
+              <a:t>📸 Görsel: Akış şeması örnekleri</a:t>
+            </a:r>
+          </a:p>
+          <a:p>
+            <a:r>
+              <a:t>🎬 Video: Algoritma nedir? Günlük hayattan örnekler</a:t>
+            </a:r>
+          </a:p>
+          <a:p>
+            <a:r>
+              <a:t>💡 İnfografik: Akış şeması sembolleri</a:t>
+            </a:r>
+          </a:p>
+          <a:p>
+            <a:r>
+              <a:t>📸 Görsel: Koşullu yapılar akış diyagramı</a:t>
+            </a:r>
+          </a:p>
+          <a:p>
+            <a:r>
+              <a:t>🎬 Video: Koşullu ifadeler Scratch'te</a:t>
+            </a:r>
+          </a:p>
+          <a:p>
+            <a:r>
+              <a:t>📸 Görsel: Farklı grafik türleri örnekleri</a:t>
+            </a:r>
+          </a:p>
+          <a:p>
+            <a:r>
+              <a:t>🎬 Video: Veri görselleştirme önemi</a:t>
+            </a:r>
+          </a:p>
+          <a:p>
+            <a:r>
+              <a:t>💡 İnfografik: Grafik türleri ve kullanım alanları</a:t>
+            </a:r>
+          </a:p>
+          <a:p>
+            <a:r>
+              <a:t>📸 Görsel: Paint araçları ekran görüntüsü</a:t>
+            </a:r>
+          </a:p>
+          <a:p>
+            <a:r>
+              <a:t>🎬 Video: Paint ile basit çizim teknikleri</a:t>
+            </a:r>
+          </a:p>
+          <a:p>
+            <a:r>
+              <a:t>📸 Görsel: Temel tasarım prensipleri</a:t>
+            </a:r>
+          </a:p>
+          <a:p>
+            <a:r>
+              <a:t>🎬 Video: Dijital tasarıma giriş</a:t>
+            </a:r>
+          </a:p>
+          <a:p>
+            <a:r>
+              <a:t>💡 İnfografik: Renk teorisi ve uyumu</a:t>
+            </a:r>
+          </a:p>
+        </p:txBody>
+      </p:sp>
+      <p:sp>
+        <p:nvSpPr>
+          <p:cNvPr id="4" name="Slide Number Placeholder 3"/>
+          <p:cNvSpPr>
+            <a:spLocks noGrp="1"/>
+          </p:cNvSpPr>
+          <p:nvPr>
+            <p:ph type="sldNum" idx="5" sz="quarter"/>
+          </p:nvPr>
+        </p:nvSpPr>
+        <p:spPr/>
+      </p:sp>
+    </p:spTree>
+  </p:cSld>
+  <p:clrMapOvr>
+    <a:masterClrMapping/>
+  </p:clrMapOvr>
+</p:notes>
+</file>
+
+<file path=ppt/notesSlides/notesSlide24.xml><?xml version="1.0" encoding="utf-8"?>
+<p:notes xmlns:a="http://schemas.openxmlformats.org/drawingml/2006/main" xmlns:p="http://schemas.openxmlformats.org/presentationml/2006/main" xmlns:r="http://schemas.openxmlformats.org/officeDocument/2006/relationships">
+  <p:cSld>
+    <p:spTree>
+      <p:nvGrpSpPr>
+        <p:cNvPr id="1" name=""/>
+        <p:cNvGrpSpPr/>
+        <p:nvPr/>
+      </p:nvGrpSpPr>
+      <p:grpSpPr>
+        <a:xfrm>
+          <a:off x="0" y="0"/>
+          <a:ext cx="0" cy="0"/>
+          <a:chOff x="0" y="0"/>
+          <a:chExt cx="0" cy="0"/>
+        </a:xfrm>
+      </p:grpSpPr>
+      <p:sp>
+        <p:nvSpPr>
+          <p:cNvPr id="2" name="Slide Image Placeholder 1"/>
+          <p:cNvSpPr>
+            <a:spLocks noGrp="1"/>
+          </p:cNvSpPr>
+          <p:nvPr>
+            <p:ph type="sldImg" idx="2"/>
+          </p:nvPr>
+        </p:nvSpPr>
+        <p:spPr/>
+      </p:sp>
+      <p:sp>
+        <p:nvSpPr>
+          <p:cNvPr id="3" name="Notes Placeholder 2"/>
+          <p:cNvSpPr>
+            <a:spLocks noGrp="1"/>
+          </p:cNvSpPr>
+          <p:nvPr>
+            <p:ph type="body" idx="3" sz="quarter"/>
+          </p:nvPr>
+        </p:nvSpPr>
+        <p:spPr/>
+        <p:txBody>
+          <a:bodyPr/>
+          <a:lstStyle/>
+          <a:p>
+            <a:r>
+              <a:t>🎨 GÖRSELLEŞTİRME ÖNERİLERİ:</a:t>
+            </a:r>
+          </a:p>
+          <a:p/>
+          <a:p>
+            <a:r>
+              <a:t>📸 Görsel: CPU, RAM ve anakart fotoğrafları</a:t>
+            </a:r>
+          </a:p>
+          <a:p>
+            <a:r>
+              <a:t>🎬 Video: Bilgisayar donanımı tanıtım videosu (1-2 dk)</a:t>
+            </a:r>
+          </a:p>
+          <a:p>
+            <a:r>
+              <a:t>💡 İnfografik: Bilgisayar bileşenleri şeması</a:t>
+            </a:r>
+          </a:p>
+          <a:p>
+            <a:r>
+              <a:t>📸 Görsel: MS Word arayüz ekran görüntüsü</a:t>
+            </a:r>
+          </a:p>
+          <a:p>
+            <a:r>
+              <a:t>🎬 Video: Word temel özellikleri demo (2-3 dk)</a:t>
+            </a:r>
+          </a:p>
+          <a:p>
+            <a:r>
+              <a:t>💡 Ekran kaydı: Biçimlendirme araçları kullanımı</a:t>
+            </a:r>
+          </a:p>
+          <a:p>
+            <a:r>
+              <a:t>📸 Görsel: LAN ve WAN ağ topolojileri şeması</a:t>
+            </a:r>
+          </a:p>
+          <a:p>
+            <a:r>
+              <a:t>🎬 Video: İnternet nasıl çalışır? Animasyonlu anlatım</a:t>
+            </a:r>
+          </a:p>
+          <a:p>
+            <a:r>
+              <a:t>💡 İnfografik: Ev ağı kurulumu diyagramı</a:t>
+            </a:r>
+          </a:p>
+          <a:p>
+            <a:r>
+              <a:t>📸 Görsel: Farklı grafik türleri örnekleri</a:t>
+            </a:r>
+          </a:p>
+          <a:p>
+            <a:r>
+              <a:t>🎬 Video: Veri görselleştirme önemi</a:t>
+            </a:r>
+          </a:p>
+          <a:p>
+            <a:r>
+              <a:t>💡 İnfografik: Grafik türleri ve kullanım alanları</a:t>
+            </a:r>
+          </a:p>
+          <a:p>
+            <a:r>
+              <a:t>📸 Görsel: Excel arayüzü ekran görüntüsü</a:t>
+            </a:r>
+          </a:p>
+          <a:p>
+            <a:r>
+              <a:t>🎬 Video: Excel temel işlemler (2-3 dk)</a:t>
+            </a:r>
+          </a:p>
+          <a:p>
+            <a:r>
+              <a:t>💡 Ekran kaydı: Formül kullanımı demo</a:t>
+            </a:r>
+          </a:p>
+        </p:txBody>
+      </p:sp>
+      <p:sp>
+        <p:nvSpPr>
+          <p:cNvPr id="4" name="Slide Number Placeholder 3"/>
+          <p:cNvSpPr>
+            <a:spLocks noGrp="1"/>
+          </p:cNvSpPr>
+          <p:nvPr>
+            <p:ph type="sldNum" idx="5" sz="quarter"/>
+          </p:nvPr>
+        </p:nvSpPr>
+        <p:spPr/>
+      </p:sp>
+    </p:spTree>
+  </p:cSld>
+  <p:clrMapOvr>
+    <a:masterClrMapping/>
+  </p:clrMapOvr>
+</p:notes>
+</file>
+
+<file path=ppt/notesSlides/notesSlide25.xml><?xml version="1.0" encoding="utf-8"?>
+<p:notes xmlns:a="http://schemas.openxmlformats.org/drawingml/2006/main" xmlns:p="http://schemas.openxmlformats.org/presentationml/2006/main" xmlns:r="http://schemas.openxmlformats.org/officeDocument/2006/relationships">
+  <p:cSld>
+    <p:spTree>
+      <p:nvGrpSpPr>
+        <p:cNvPr id="1" name=""/>
+        <p:cNvGrpSpPr/>
+        <p:nvPr/>
+      </p:nvGrpSpPr>
+      <p:grpSpPr>
+        <a:xfrm>
+          <a:off x="0" y="0"/>
+          <a:ext cx="0" cy="0"/>
+          <a:chOff x="0" y="0"/>
+          <a:chExt cx="0" cy="0"/>
+        </a:xfrm>
+      </p:grpSpPr>
+      <p:sp>
+        <p:nvSpPr>
+          <p:cNvPr id="2" name="Slide Image Placeholder 1"/>
+          <p:cNvSpPr>
+            <a:spLocks noGrp="1"/>
+          </p:cNvSpPr>
+          <p:nvPr>
+            <p:ph type="sldImg" idx="2"/>
+          </p:nvPr>
+        </p:nvSpPr>
+        <p:spPr/>
+      </p:sp>
+      <p:sp>
+        <p:nvSpPr>
+          <p:cNvPr id="3" name="Notes Placeholder 2"/>
+          <p:cNvSpPr>
+            <a:spLocks noGrp="1"/>
+          </p:cNvSpPr>
+          <p:nvPr>
+            <p:ph type="body" idx="3" sz="quarter"/>
+          </p:nvPr>
+        </p:nvSpPr>
+        <p:spPr/>
+        <p:txBody>
+          <a:bodyPr/>
+          <a:lstStyle/>
+          <a:p>
+            <a:r>
+              <a:t>🎨 GÖRSELLEŞTİRME ÖNERİLERİ:</a:t>
+            </a:r>
+          </a:p>
+          <a:p/>
+          <a:p>
+            <a:r>
+              <a:t>📸 Görsel: LAN ve WAN ağ topolojileri şeması</a:t>
+            </a:r>
+          </a:p>
+          <a:p>
+            <a:r>
+              <a:t>🎬 Video: İnternet nasıl çalışır? Animasyonlu anlatım</a:t>
+            </a:r>
+          </a:p>
+          <a:p>
+            <a:r>
+              <a:t>💡 İnfografik: Ev ağı kurulumu diyagramı</a:t>
+            </a:r>
+          </a:p>
+          <a:p>
+            <a:r>
+              <a:t>📸 Görsel: Yapay zeka uygulama örnekleri (Siri, Alexa, ChatGPT)</a:t>
+            </a:r>
+          </a:p>
+          <a:p>
+            <a:r>
+              <a:t>🎬 Video: Yapay zeka nedir? Çocuklar için anlatım</a:t>
+            </a:r>
+          </a:p>
+          <a:p>
+            <a:r>
+              <a:t>💡 İnfografik: AI kullanım alanları</a:t>
+            </a:r>
+          </a:p>
+          <a:p>
+            <a:r>
+              <a:t>📸 Görsel: Farklı grafik türleri örnekleri</a:t>
+            </a:r>
+          </a:p>
+          <a:p>
+            <a:r>
+              <a:t>🎬 Video: Veri görselleştirme önemi</a:t>
+            </a:r>
+          </a:p>
+          <a:p>
+            <a:r>
+              <a:t>💡 İnfografik: Grafik türleri ve kullanım alanları</a:t>
+            </a:r>
+          </a:p>
+        </p:txBody>
+      </p:sp>
+      <p:sp>
+        <p:nvSpPr>
+          <p:cNvPr id="4" name="Slide Number Placeholder 3"/>
+          <p:cNvSpPr>
+            <a:spLocks noGrp="1"/>
+          </p:cNvSpPr>
+          <p:nvPr>
+            <p:ph type="sldNum" idx="5" sz="quarter"/>
+          </p:nvPr>
+        </p:nvSpPr>
+        <p:spPr/>
+      </p:sp>
+    </p:spTree>
+  </p:cSld>
+  <p:clrMapOvr>
+    <a:masterClrMapping/>
+  </p:clrMapOvr>
+</p:notes>
+</file>
+
+<file path=ppt/notesSlides/notesSlide26.xml><?xml version="1.0" encoding="utf-8"?>
+<p:notes xmlns:a="http://schemas.openxmlformats.org/drawingml/2006/main" xmlns:p="http://schemas.openxmlformats.org/presentationml/2006/main" xmlns:r="http://schemas.openxmlformats.org/officeDocument/2006/relationships">
+  <p:cSld>
+    <p:spTree>
+      <p:nvGrpSpPr>
+        <p:cNvPr id="1" name=""/>
+        <p:cNvGrpSpPr/>
+        <p:nvPr/>
+      </p:nvGrpSpPr>
+      <p:grpSpPr>
+        <a:xfrm>
+          <a:off x="0" y="0"/>
+          <a:ext cx="0" cy="0"/>
+          <a:chOff x="0" y="0"/>
+          <a:chExt cx="0" cy="0"/>
+        </a:xfrm>
+      </p:grpSpPr>
+      <p:sp>
+        <p:nvSpPr>
+          <p:cNvPr id="2" name="Slide Image Placeholder 1"/>
+          <p:cNvSpPr>
+            <a:spLocks noGrp="1"/>
+          </p:cNvSpPr>
+          <p:nvPr>
+            <p:ph type="sldImg" idx="2"/>
+          </p:nvPr>
+        </p:nvSpPr>
+        <p:spPr/>
+      </p:sp>
+      <p:sp>
+        <p:nvSpPr>
+          <p:cNvPr id="3" name="Notes Placeholder 2"/>
+          <p:cNvSpPr>
+            <a:spLocks noGrp="1"/>
+          </p:cNvSpPr>
+          <p:nvPr>
+            <p:ph type="body" idx="3" sz="quarter"/>
+          </p:nvPr>
+        </p:nvSpPr>
+        <p:spPr/>
+        <p:txBody>
+          <a:bodyPr/>
+          <a:lstStyle/>
+          <a:p>
+            <a:r>
+              <a:t>🎨 GÖRSELLEŞTİRME ÖNERİLERİ:</a:t>
+            </a:r>
+          </a:p>
+          <a:p/>
+          <a:p>
+            <a:r>
+              <a:t>📸 Görsel: CPU, RAM ve anakart fotoğrafları</a:t>
+            </a:r>
+          </a:p>
+          <a:p>
+            <a:r>
+              <a:t>🎬 Video: Bilgisayar donanımı tanıtım videosu (1-2 dk)</a:t>
+            </a:r>
+          </a:p>
+          <a:p>
+            <a:r>
+              <a:t>💡 İnfografik: Bilgisayar bileşenleri şeması</a:t>
+            </a:r>
+          </a:p>
+          <a:p>
+            <a:r>
+              <a:t>📸 Görsel: MS Word arayüz ekran görüntüsü</a:t>
+            </a:r>
+          </a:p>
+          <a:p>
+            <a:r>
+              <a:t>🎬 Video: Word temel özellikleri demo (2-3 dk)</a:t>
+            </a:r>
+          </a:p>
+          <a:p>
+            <a:r>
+              <a:t>💡 Ekran kaydı: Biçimlendirme araçları kullanımı</a:t>
+            </a:r>
+          </a:p>
+          <a:p>
+            <a:r>
+              <a:t>📸 Görsel: LAN ve WAN ağ topolojileri şeması</a:t>
+            </a:r>
+          </a:p>
+          <a:p>
+            <a:r>
+              <a:t>🎬 Video: İnternet nasıl çalışır? Animasyonlu anlatım</a:t>
+            </a:r>
+          </a:p>
+          <a:p>
+            <a:r>
+              <a:t>💡 İnfografik: Ev ağı kurulumu diyagramı</a:t>
+            </a:r>
+          </a:p>
+        </p:txBody>
+      </p:sp>
+      <p:sp>
+        <p:nvSpPr>
+          <p:cNvPr id="4" name="Slide Number Placeholder 3"/>
+          <p:cNvSpPr>
+            <a:spLocks noGrp="1"/>
+          </p:cNvSpPr>
+          <p:nvPr>
+            <p:ph type="sldNum" idx="5" sz="quarter"/>
+          </p:nvPr>
+        </p:nvSpPr>
+        <p:spPr/>
+      </p:sp>
+    </p:spTree>
+  </p:cSld>
+  <p:clrMapOvr>
+    <a:masterClrMapping/>
+  </p:clrMapOvr>
+</p:notes>
+</file>
+
+<file path=ppt/notesSlides/notesSlide27.xml><?xml version="1.0" encoding="utf-8"?>
+<p:notes xmlns:a="http://schemas.openxmlformats.org/drawingml/2006/main" xmlns:p="http://schemas.openxmlformats.org/presentationml/2006/main" xmlns:r="http://schemas.openxmlformats.org/officeDocument/2006/relationships">
+  <p:cSld>
+    <p:spTree>
+      <p:nvGrpSpPr>
+        <p:cNvPr id="1" name=""/>
+        <p:cNvGrpSpPr/>
+        <p:nvPr/>
+      </p:nvGrpSpPr>
+      <p:grpSpPr>
+        <a:xfrm>
+          <a:off x="0" y="0"/>
+          <a:ext cx="0" cy="0"/>
+          <a:chOff x="0" y="0"/>
+          <a:chExt cx="0" cy="0"/>
+        </a:xfrm>
+      </p:grpSpPr>
+      <p:sp>
+        <p:nvSpPr>
+          <p:cNvPr id="2" name="Slide Image Placeholder 1"/>
+          <p:cNvSpPr>
+            <a:spLocks noGrp="1"/>
+          </p:cNvSpPr>
+          <p:nvPr>
+            <p:ph type="sldImg" idx="2"/>
+          </p:nvPr>
+        </p:nvSpPr>
+        <p:spPr/>
+      </p:sp>
+      <p:sp>
+        <p:nvSpPr>
+          <p:cNvPr id="3" name="Notes Placeholder 2"/>
+          <p:cNvSpPr>
+            <a:spLocks noGrp="1"/>
+          </p:cNvSpPr>
+          <p:nvPr>
+            <p:ph type="body" idx="3" sz="quarter"/>
+          </p:nvPr>
+        </p:nvSpPr>
+        <p:spPr/>
+        <p:txBody>
+          <a:bodyPr/>
+          <a:lstStyle/>
+          <a:p>
+            <a:r>
+              <a:t>🎨 GÖRSELLEŞTİRME ÖNERİLERİ:</a:t>
+            </a:r>
+          </a:p>
+          <a:p/>
+          <a:p>
+            <a:r>
+              <a:t>📸 Görsel: Temel tasarım prensipleri</a:t>
+            </a:r>
+          </a:p>
+          <a:p>
+            <a:r>
+              <a:t>🎬 Video: Dijital tasarıma giriş</a:t>
+            </a:r>
+          </a:p>
+          <a:p>
+            <a:r>
+              <a:t>💡 İnfografik: Renk teorisi ve uyumu</a:t>
+            </a:r>
+          </a:p>
+        </p:txBody>
+      </p:sp>
+      <p:sp>
+        <p:nvSpPr>
+          <p:cNvPr id="4" name="Slide Number Placeholder 3"/>
+          <p:cNvSpPr>
+            <a:spLocks noGrp="1"/>
+          </p:cNvSpPr>
+          <p:nvPr>
+            <p:ph type="sldNum" idx="5" sz="quarter"/>
+          </p:nvPr>
+        </p:nvSpPr>
+        <p:spPr/>
+      </p:sp>
+    </p:spTree>
+  </p:cSld>
+  <p:clrMapOvr>
+    <a:masterClrMapping/>
+  </p:clrMapOvr>
+</p:notes>
+</file>
+
+<file path=ppt/notesSlides/notesSlide28.xml><?xml version="1.0" encoding="utf-8"?>
+<p:notes xmlns:a="http://schemas.openxmlformats.org/drawingml/2006/main" xmlns:p="http://schemas.openxmlformats.org/presentationml/2006/main" xmlns:r="http://schemas.openxmlformats.org/officeDocument/2006/relationships">
+  <p:cSld>
+    <p:spTree>
+      <p:nvGrpSpPr>
+        <p:cNvPr id="1" name=""/>
+        <p:cNvGrpSpPr/>
+        <p:nvPr/>
+      </p:nvGrpSpPr>
+      <p:grpSpPr>
+        <a:xfrm>
+          <a:off x="0" y="0"/>
+          <a:ext cx="0" cy="0"/>
+          <a:chOff x="0" y="0"/>
+          <a:chExt cx="0" cy="0"/>
+        </a:xfrm>
+      </p:grpSpPr>
+      <p:sp>
+        <p:nvSpPr>
+          <p:cNvPr id="2" name="Slide Image Placeholder 1"/>
+          <p:cNvSpPr>
+            <a:spLocks noGrp="1"/>
+          </p:cNvSpPr>
+          <p:nvPr>
+            <p:ph type="sldImg" idx="2"/>
+          </p:nvPr>
+        </p:nvSpPr>
+        <p:spPr/>
+      </p:sp>
+      <p:sp>
+        <p:nvSpPr>
+          <p:cNvPr id="3" name="Notes Placeholder 2"/>
+          <p:cNvSpPr>
+            <a:spLocks noGrp="1"/>
+          </p:cNvSpPr>
+          <p:nvPr>
+            <p:ph type="body" idx="3" sz="quarter"/>
+          </p:nvPr>
+        </p:nvSpPr>
+        <p:spPr/>
+        <p:txBody>
+          <a:bodyPr/>
+          <a:lstStyle/>
+          <a:p>
+            <a:r>
+              <a:t>🎨 GÖRSELLEŞTİRME ÖNERİLERİ:</a:t>
+            </a:r>
+          </a:p>
+          <a:p/>
+          <a:p>
+            <a:r>
+              <a:t>📸 Görsel: CPU, RAM ve anakart fotoğrafları</a:t>
+            </a:r>
+          </a:p>
+          <a:p>
+            <a:r>
+              <a:t>🎬 Video: Bilgisayar donanımı tanıtım videosu (1-2 dk)</a:t>
+            </a:r>
+          </a:p>
+          <a:p>
+            <a:r>
+              <a:t>💡 İnfografik: Bilgisayar bileşenleri şeması</a:t>
+            </a:r>
+          </a:p>
+          <a:p>
+            <a:r>
+              <a:t>📸 Görsel: MS Word arayüz ekran görüntüsü</a:t>
+            </a:r>
+          </a:p>
+          <a:p>
+            <a:r>
+              <a:t>🎬 Video: Word temel özellikleri demo (2-3 dk)</a:t>
+            </a:r>
+          </a:p>
+          <a:p>
+            <a:r>
+              <a:t>💡 Ekran kaydı: Biçimlendirme araçları kullanımı</a:t>
+            </a:r>
+          </a:p>
+          <a:p>
+            <a:r>
+              <a:t>📸 Görsel: LAN ve WAN ağ topolojileri şeması</a:t>
+            </a:r>
+          </a:p>
+          <a:p>
+            <a:r>
+              <a:t>🎬 Video: İnternet nasıl çalışır? Animasyonlu anlatım</a:t>
+            </a:r>
+          </a:p>
+          <a:p>
+            <a:r>
+              <a:t>💡 İnfografik: Ev ağı kurulumu diyagramı</a:t>
+            </a:r>
+          </a:p>
+          <a:p>
+            <a:r>
+              <a:t>📸 Görsel: Scratch arayüzü ekran görüntüsü</a:t>
+            </a:r>
+          </a:p>
+          <a:p>
+            <a:r>
+              <a:t>🎬 Video: Scratch ile basit oyun yapımı (3-5 dk)</a:t>
+            </a:r>
+          </a:p>
+          <a:p>
+            <a:r>
+              <a:t>💡 Ekran kaydı: Adım adım Scratch projesi</a:t>
+            </a:r>
+          </a:p>
+          <a:p>
+            <a:r>
+              <a:t>📸 Görsel: Farklı grafik türleri örnekleri</a:t>
+            </a:r>
+          </a:p>
+          <a:p>
+            <a:r>
+              <a:t>🎬 Video: Veri görselleştirme önemi</a:t>
+            </a:r>
+          </a:p>
+          <a:p>
+            <a:r>
+              <a:t>💡 İnfografik: Grafik türleri ve kullanım alanları</a:t>
+            </a:r>
+          </a:p>
+          <a:p>
+            <a:r>
+              <a:t>📸 Görsel: Temel tasarım prensipleri</a:t>
+            </a:r>
+          </a:p>
+          <a:p>
+            <a:r>
+              <a:t>🎬 Video: Dijital tasarıma giriş</a:t>
+            </a:r>
+          </a:p>
+          <a:p>
+            <a:r>
+              <a:t>💡 İnfografik: Renk teorisi ve uyumu</a:t>
+            </a:r>
+          </a:p>
+        </p:txBody>
+      </p:sp>
+      <p:sp>
+        <p:nvSpPr>
+          <p:cNvPr id="4" name="Slide Number Placeholder 3"/>
+          <p:cNvSpPr>
+            <a:spLocks noGrp="1"/>
+          </p:cNvSpPr>
+          <p:nvPr>
+            <p:ph type="sldNum" idx="5" sz="quarter"/>
+          </p:nvPr>
+        </p:nvSpPr>
+        <p:spPr/>
+      </p:sp>
+    </p:spTree>
+  </p:cSld>
+  <p:clrMapOvr>
+    <a:masterClrMapping/>
+  </p:clrMapOvr>
+</p:notes>
+</file>
+
+<file path=ppt/notesSlides/notesSlide29.xml><?xml version="1.0" encoding="utf-8"?>
+<p:notes xmlns:a="http://schemas.openxmlformats.org/drawingml/2006/main" xmlns:p="http://schemas.openxmlformats.org/presentationml/2006/main" xmlns:r="http://schemas.openxmlformats.org/officeDocument/2006/relationships">
+  <p:cSld>
+    <p:spTree>
+      <p:nvGrpSpPr>
+        <p:cNvPr id="1" name=""/>
+        <p:cNvGrpSpPr/>
+        <p:nvPr/>
+      </p:nvGrpSpPr>
+      <p:grpSpPr>
+        <a:xfrm>
+          <a:off x="0" y="0"/>
+          <a:ext cx="0" cy="0"/>
+          <a:chOff x="0" y="0"/>
+          <a:chExt cx="0" cy="0"/>
+        </a:xfrm>
+      </p:grpSpPr>
+      <p:sp>
+        <p:nvSpPr>
+          <p:cNvPr id="2" name="Slide Image Placeholder 1"/>
+          <p:cNvSpPr>
+            <a:spLocks noGrp="1"/>
+          </p:cNvSpPr>
+          <p:nvPr>
+            <p:ph type="sldImg" idx="2"/>
+          </p:nvPr>
+        </p:nvSpPr>
+        <p:spPr/>
+      </p:sp>
+      <p:sp>
+        <p:nvSpPr>
+          <p:cNvPr id="3" name="Notes Placeholder 2"/>
+          <p:cNvSpPr>
+            <a:spLocks noGrp="1"/>
+          </p:cNvSpPr>
+          <p:nvPr>
+            <p:ph type="body" idx="3" sz="quarter"/>
+          </p:nvPr>
+        </p:nvSpPr>
+        <p:spPr/>
+        <p:txBody>
+          <a:bodyPr/>
+          <a:lstStyle/>
+          <a:p>
+            <a:r>
+              <a:t>🎨 GÖRSELLEŞTİRME ÖNERİLERİ:</a:t>
+            </a:r>
+          </a:p>
+          <a:p/>
+          <a:p>
+            <a:r>
+              <a:t>📸 Görsel: Akış şeması örnekleri</a:t>
+            </a:r>
+          </a:p>
+          <a:p>
+            <a:r>
+              <a:t>🎬 Video: Algoritma nedir? Günlük hayattan örnekler</a:t>
+            </a:r>
+          </a:p>
+          <a:p>
+            <a:r>
+              <a:t>💡 İnfografik: Akış şeması sembolleri</a:t>
+            </a:r>
+          </a:p>
+          <a:p>
+            <a:r>
+              <a:t>📸 Görsel: Koşullu yapılar akış diyagramı</a:t>
+            </a:r>
+          </a:p>
+          <a:p>
+            <a:r>
+              <a:t>🎬 Video: Koşullu ifadeler Scratch'te</a:t>
             </a:r>
           </a:p>
         </p:txBody>
@@ -1114,7 +3214,1284 @@
           <a:lstStyle/>
           <a:p>
             <a:r>
-              <a:t>Etkinlik: Sınıfta mini anket yapın (favori ders, hobi, vs.)</a:t>
+              <a:t>Tartışma: Günlük hayattan veri örnekleri verin (fiyatlar, notlar, hava durumu)</a:t>
+            </a:r>
+          </a:p>
+          <a:p/>
+          <a:p>
+            <a:r>
+              <a:t>🎨 GÖRSELLEŞTİRME ÖNERİLERİ:</a:t>
+            </a:r>
+          </a:p>
+          <a:p/>
+          <a:p>
+            <a:r>
+              <a:t>📸 Görsel: LAN ve WAN ağ topolojileri şeması</a:t>
+            </a:r>
+          </a:p>
+          <a:p>
+            <a:r>
+              <a:t>🎬 Video: İnternet nasıl çalışır? Animasyonlu anlatım</a:t>
+            </a:r>
+          </a:p>
+          <a:p>
+            <a:r>
+              <a:t>💡 İnfografik: Ev ağı kurulumu diyagramı</a:t>
+            </a:r>
+          </a:p>
+          <a:p>
+            <a:r>
+              <a:t>📸 Görsel: Farklı grafik türleri örnekleri</a:t>
+            </a:r>
+          </a:p>
+          <a:p>
+            <a:r>
+              <a:t>🎬 Video: Veri görselleştirme önemi</a:t>
+            </a:r>
+          </a:p>
+          <a:p>
+            <a:r>
+              <a:t>💡 İnfografik: Grafik türleri ve kullanım alanları</a:t>
+            </a:r>
+          </a:p>
+        </p:txBody>
+      </p:sp>
+      <p:sp>
+        <p:nvSpPr>
+          <p:cNvPr id="4" name="Slide Number Placeholder 3"/>
+          <p:cNvSpPr>
+            <a:spLocks noGrp="1"/>
+          </p:cNvSpPr>
+          <p:nvPr>
+            <p:ph type="sldNum" idx="5" sz="quarter"/>
+          </p:nvPr>
+        </p:nvSpPr>
+        <p:spPr/>
+      </p:sp>
+    </p:spTree>
+  </p:cSld>
+  <p:clrMapOvr>
+    <a:masterClrMapping/>
+  </p:clrMapOvr>
+</p:notes>
+</file>
+
+<file path=ppt/notesSlides/notesSlide30.xml><?xml version="1.0" encoding="utf-8"?>
+<p:notes xmlns:a="http://schemas.openxmlformats.org/drawingml/2006/main" xmlns:p="http://schemas.openxmlformats.org/presentationml/2006/main" xmlns:r="http://schemas.openxmlformats.org/officeDocument/2006/relationships">
+  <p:cSld>
+    <p:spTree>
+      <p:nvGrpSpPr>
+        <p:cNvPr id="1" name=""/>
+        <p:cNvGrpSpPr/>
+        <p:nvPr/>
+      </p:nvGrpSpPr>
+      <p:grpSpPr>
+        <a:xfrm>
+          <a:off x="0" y="0"/>
+          <a:ext cx="0" cy="0"/>
+          <a:chOff x="0" y="0"/>
+          <a:chExt cx="0" cy="0"/>
+        </a:xfrm>
+      </p:grpSpPr>
+      <p:sp>
+        <p:nvSpPr>
+          <p:cNvPr id="2" name="Slide Image Placeholder 1"/>
+          <p:cNvSpPr>
+            <a:spLocks noGrp="1"/>
+          </p:cNvSpPr>
+          <p:nvPr>
+            <p:ph type="sldImg" idx="2"/>
+          </p:nvPr>
+        </p:nvSpPr>
+        <p:spPr/>
+      </p:sp>
+      <p:sp>
+        <p:nvSpPr>
+          <p:cNvPr id="3" name="Notes Placeholder 2"/>
+          <p:cNvSpPr>
+            <a:spLocks noGrp="1"/>
+          </p:cNvSpPr>
+          <p:nvPr>
+            <p:ph type="body" idx="3" sz="quarter"/>
+          </p:nvPr>
+        </p:nvSpPr>
+        <p:spPr/>
+        <p:txBody>
+          <a:bodyPr/>
+          <a:lstStyle/>
+          <a:p>
+            <a:r>
+              <a:t>🎨 GÖRSELLEŞTİRME ÖNERİLERİ:</a:t>
+            </a:r>
+          </a:p>
+          <a:p/>
+          <a:p>
+            <a:r>
+              <a:t>📸 Görsel: CPU, RAM ve anakart fotoğrafları</a:t>
+            </a:r>
+          </a:p>
+          <a:p>
+            <a:r>
+              <a:t>🎬 Video: Bilgisayar donanımı tanıtım videosu (1-2 dk)</a:t>
+            </a:r>
+          </a:p>
+          <a:p>
+            <a:r>
+              <a:t>💡 İnfografik: Bilgisayar bileşenleri şeması</a:t>
+            </a:r>
+          </a:p>
+          <a:p>
+            <a:r>
+              <a:t>📸 Görsel: Akış şeması örnekleri</a:t>
+            </a:r>
+          </a:p>
+          <a:p>
+            <a:r>
+              <a:t>🎬 Video: Algoritma nedir? Günlük hayattan örnekler</a:t>
+            </a:r>
+          </a:p>
+          <a:p>
+            <a:r>
+              <a:t>💡 İnfografik: Akış şeması sembolleri</a:t>
+            </a:r>
+          </a:p>
+          <a:p>
+            <a:r>
+              <a:t>📸 Görsel: Döngü mantığı şeması</a:t>
+            </a:r>
+          </a:p>
+          <a:p>
+            <a:r>
+              <a:t>🎬 Video: Döngüler Scratch'te nasıl kullanılır?</a:t>
+            </a:r>
+          </a:p>
+          <a:p>
+            <a:r>
+              <a:t>📸 Görsel: Koşullu yapılar akış diyagramı</a:t>
+            </a:r>
+          </a:p>
+          <a:p>
+            <a:r>
+              <a:t>🎬 Video: Koşullu ifadeler Scratch'te</a:t>
+            </a:r>
+          </a:p>
+          <a:p>
+            <a:r>
+              <a:t>📸 Görsel: Temel tasarım prensipleri</a:t>
+            </a:r>
+          </a:p>
+          <a:p>
+            <a:r>
+              <a:t>🎬 Video: Dijital tasarıma giriş</a:t>
+            </a:r>
+          </a:p>
+          <a:p>
+            <a:r>
+              <a:t>💡 İnfografik: Renk teorisi ve uyumu</a:t>
+            </a:r>
+          </a:p>
+        </p:txBody>
+      </p:sp>
+      <p:sp>
+        <p:nvSpPr>
+          <p:cNvPr id="4" name="Slide Number Placeholder 3"/>
+          <p:cNvSpPr>
+            <a:spLocks noGrp="1"/>
+          </p:cNvSpPr>
+          <p:nvPr>
+            <p:ph type="sldNum" idx="5" sz="quarter"/>
+          </p:nvPr>
+        </p:nvSpPr>
+        <p:spPr/>
+      </p:sp>
+    </p:spTree>
+  </p:cSld>
+  <p:clrMapOvr>
+    <a:masterClrMapping/>
+  </p:clrMapOvr>
+</p:notes>
+</file>
+
+<file path=ppt/notesSlides/notesSlide31.xml><?xml version="1.0" encoding="utf-8"?>
+<p:notes xmlns:a="http://schemas.openxmlformats.org/drawingml/2006/main" xmlns:p="http://schemas.openxmlformats.org/presentationml/2006/main" xmlns:r="http://schemas.openxmlformats.org/officeDocument/2006/relationships">
+  <p:cSld>
+    <p:spTree>
+      <p:nvGrpSpPr>
+        <p:cNvPr id="1" name=""/>
+        <p:cNvGrpSpPr/>
+        <p:nvPr/>
+      </p:nvGrpSpPr>
+      <p:grpSpPr>
+        <a:xfrm>
+          <a:off x="0" y="0"/>
+          <a:ext cx="0" cy="0"/>
+          <a:chOff x="0" y="0"/>
+          <a:chExt cx="0" cy="0"/>
+        </a:xfrm>
+      </p:grpSpPr>
+      <p:sp>
+        <p:nvSpPr>
+          <p:cNvPr id="2" name="Slide Image Placeholder 1"/>
+          <p:cNvSpPr>
+            <a:spLocks noGrp="1"/>
+          </p:cNvSpPr>
+          <p:nvPr>
+            <p:ph type="sldImg" idx="2"/>
+          </p:nvPr>
+        </p:nvSpPr>
+        <p:spPr/>
+      </p:sp>
+      <p:sp>
+        <p:nvSpPr>
+          <p:cNvPr id="3" name="Notes Placeholder 2"/>
+          <p:cNvSpPr>
+            <a:spLocks noGrp="1"/>
+          </p:cNvSpPr>
+          <p:nvPr>
+            <p:ph type="body" idx="3" sz="quarter"/>
+          </p:nvPr>
+        </p:nvSpPr>
+        <p:spPr/>
+        <p:txBody>
+          <a:bodyPr/>
+          <a:lstStyle/>
+          <a:p>
+            <a:r>
+              <a:t>🎨 GÖRSELLEŞTİRME ÖNERİLERİ:</a:t>
+            </a:r>
+          </a:p>
+          <a:p/>
+          <a:p>
+            <a:r>
+              <a:t>📸 Görsel: CPU, RAM ve anakart fotoğrafları</a:t>
+            </a:r>
+          </a:p>
+          <a:p>
+            <a:r>
+              <a:t>🎬 Video: Bilgisayar donanımı tanıtım videosu (1-2 dk)</a:t>
+            </a:r>
+          </a:p>
+          <a:p>
+            <a:r>
+              <a:t>💡 İnfografik: Bilgisayar bileşenleri şeması</a:t>
+            </a:r>
+          </a:p>
+          <a:p>
+            <a:r>
+              <a:t>📸 Görsel: LAN ve WAN ağ topolojileri şeması</a:t>
+            </a:r>
+          </a:p>
+          <a:p>
+            <a:r>
+              <a:t>🎬 Video: İnternet nasıl çalışır? Animasyonlu anlatım</a:t>
+            </a:r>
+          </a:p>
+          <a:p>
+            <a:r>
+              <a:t>💡 İnfografik: Ev ağı kurulumu diyagramı</a:t>
+            </a:r>
+          </a:p>
+          <a:p>
+            <a:r>
+              <a:t>📸 Görsel: Scratch arayüzü ekran görüntüsü</a:t>
+            </a:r>
+          </a:p>
+          <a:p>
+            <a:r>
+              <a:t>🎬 Video: Scratch ile basit oyun yapımı (3-5 dk)</a:t>
+            </a:r>
+          </a:p>
+          <a:p>
+            <a:r>
+              <a:t>💡 Ekran kaydı: Adım adım Scratch projesi</a:t>
+            </a:r>
+          </a:p>
+          <a:p>
+            <a:r>
+              <a:t>📸 Görsel: Akış şeması örnekleri</a:t>
+            </a:r>
+          </a:p>
+          <a:p>
+            <a:r>
+              <a:t>🎬 Video: Algoritma nedir? Günlük hayattan örnekler</a:t>
+            </a:r>
+          </a:p>
+          <a:p>
+            <a:r>
+              <a:t>💡 İnfografik: Akış şeması sembolleri</a:t>
+            </a:r>
+          </a:p>
+          <a:p>
+            <a:r>
+              <a:t>📸 Görsel: Koşullu yapılar akış diyagramı</a:t>
+            </a:r>
+          </a:p>
+          <a:p>
+            <a:r>
+              <a:t>🎬 Video: Koşullu ifadeler Scratch'te</a:t>
+            </a:r>
+          </a:p>
+        </p:txBody>
+      </p:sp>
+      <p:sp>
+        <p:nvSpPr>
+          <p:cNvPr id="4" name="Slide Number Placeholder 3"/>
+          <p:cNvSpPr>
+            <a:spLocks noGrp="1"/>
+          </p:cNvSpPr>
+          <p:nvPr>
+            <p:ph type="sldNum" idx="5" sz="quarter"/>
+          </p:nvPr>
+        </p:nvSpPr>
+        <p:spPr/>
+      </p:sp>
+    </p:spTree>
+  </p:cSld>
+  <p:clrMapOvr>
+    <a:masterClrMapping/>
+  </p:clrMapOvr>
+</p:notes>
+</file>
+
+<file path=ppt/notesSlides/notesSlide32.xml><?xml version="1.0" encoding="utf-8"?>
+<p:notes xmlns:a="http://schemas.openxmlformats.org/drawingml/2006/main" xmlns:p="http://schemas.openxmlformats.org/presentationml/2006/main" xmlns:r="http://schemas.openxmlformats.org/officeDocument/2006/relationships">
+  <p:cSld>
+    <p:spTree>
+      <p:nvGrpSpPr>
+        <p:cNvPr id="1" name=""/>
+        <p:cNvGrpSpPr/>
+        <p:nvPr/>
+      </p:nvGrpSpPr>
+      <p:grpSpPr>
+        <a:xfrm>
+          <a:off x="0" y="0"/>
+          <a:ext cx="0" cy="0"/>
+          <a:chOff x="0" y="0"/>
+          <a:chExt cx="0" cy="0"/>
+        </a:xfrm>
+      </p:grpSpPr>
+      <p:sp>
+        <p:nvSpPr>
+          <p:cNvPr id="2" name="Slide Image Placeholder 1"/>
+          <p:cNvSpPr>
+            <a:spLocks noGrp="1"/>
+          </p:cNvSpPr>
+          <p:nvPr>
+            <p:ph type="sldImg" idx="2"/>
+          </p:nvPr>
+        </p:nvSpPr>
+        <p:spPr/>
+      </p:sp>
+      <p:sp>
+        <p:nvSpPr>
+          <p:cNvPr id="3" name="Notes Placeholder 2"/>
+          <p:cNvSpPr>
+            <a:spLocks noGrp="1"/>
+          </p:cNvSpPr>
+          <p:nvPr>
+            <p:ph type="body" idx="3" sz="quarter"/>
+          </p:nvPr>
+        </p:nvSpPr>
+        <p:spPr/>
+        <p:txBody>
+          <a:bodyPr/>
+          <a:lstStyle/>
+          <a:p>
+            <a:r>
+              <a:t>🎨 GÖRSELLEŞTİRME ÖNERİLERİ:</a:t>
+            </a:r>
+          </a:p>
+          <a:p/>
+          <a:p>
+            <a:r>
+              <a:t>📸 Görsel: CPU, RAM ve anakart fotoğrafları</a:t>
+            </a:r>
+          </a:p>
+          <a:p>
+            <a:r>
+              <a:t>🎬 Video: Bilgisayar donanımı tanıtım videosu (1-2 dk)</a:t>
+            </a:r>
+          </a:p>
+          <a:p>
+            <a:r>
+              <a:t>💡 İnfografik: Bilgisayar bileşenleri şeması</a:t>
+            </a:r>
+          </a:p>
+          <a:p>
+            <a:r>
+              <a:t>📸 Görsel: LAN ve WAN ağ topolojileri şeması</a:t>
+            </a:r>
+          </a:p>
+          <a:p>
+            <a:r>
+              <a:t>🎬 Video: İnternet nasıl çalışır? Animasyonlu anlatım</a:t>
+            </a:r>
+          </a:p>
+          <a:p>
+            <a:r>
+              <a:t>💡 İnfografik: Ev ağı kurulumu diyagramı</a:t>
+            </a:r>
+          </a:p>
+          <a:p>
+            <a:r>
+              <a:t>📸 Görsel: Scratch arayüzü ekran görüntüsü</a:t>
+            </a:r>
+          </a:p>
+          <a:p>
+            <a:r>
+              <a:t>🎬 Video: Scratch ile basit oyun yapımı (3-5 dk)</a:t>
+            </a:r>
+          </a:p>
+          <a:p>
+            <a:r>
+              <a:t>💡 Ekran kaydı: Adım adım Scratch projesi</a:t>
+            </a:r>
+          </a:p>
+          <a:p>
+            <a:r>
+              <a:t>📸 Görsel: Akış şeması örnekleri</a:t>
+            </a:r>
+          </a:p>
+          <a:p>
+            <a:r>
+              <a:t>🎬 Video: Algoritma nedir? Günlük hayattan örnekler</a:t>
+            </a:r>
+          </a:p>
+          <a:p>
+            <a:r>
+              <a:t>💡 İnfografik: Akış şeması sembolleri</a:t>
+            </a:r>
+          </a:p>
+          <a:p>
+            <a:r>
+              <a:t>📸 Görsel: Koşullu yapılar akış diyagramı</a:t>
+            </a:r>
+          </a:p>
+          <a:p>
+            <a:r>
+              <a:t>🎬 Video: Koşullu ifadeler Scratch'te</a:t>
+            </a:r>
+          </a:p>
+        </p:txBody>
+      </p:sp>
+      <p:sp>
+        <p:nvSpPr>
+          <p:cNvPr id="4" name="Slide Number Placeholder 3"/>
+          <p:cNvSpPr>
+            <a:spLocks noGrp="1"/>
+          </p:cNvSpPr>
+          <p:nvPr>
+            <p:ph type="sldNum" idx="5" sz="quarter"/>
+          </p:nvPr>
+        </p:nvSpPr>
+        <p:spPr/>
+      </p:sp>
+    </p:spTree>
+  </p:cSld>
+  <p:clrMapOvr>
+    <a:masterClrMapping/>
+  </p:clrMapOvr>
+</p:notes>
+</file>
+
+<file path=ppt/notesSlides/notesSlide33.xml><?xml version="1.0" encoding="utf-8"?>
+<p:notes xmlns:a="http://schemas.openxmlformats.org/drawingml/2006/main" xmlns:p="http://schemas.openxmlformats.org/presentationml/2006/main" xmlns:r="http://schemas.openxmlformats.org/officeDocument/2006/relationships">
+  <p:cSld>
+    <p:spTree>
+      <p:nvGrpSpPr>
+        <p:cNvPr id="1" name=""/>
+        <p:cNvGrpSpPr/>
+        <p:nvPr/>
+      </p:nvGrpSpPr>
+      <p:grpSpPr>
+        <a:xfrm>
+          <a:off x="0" y="0"/>
+          <a:ext cx="0" cy="0"/>
+          <a:chOff x="0" y="0"/>
+          <a:chExt cx="0" cy="0"/>
+        </a:xfrm>
+      </p:grpSpPr>
+      <p:sp>
+        <p:nvSpPr>
+          <p:cNvPr id="2" name="Slide Image Placeholder 1"/>
+          <p:cNvSpPr>
+            <a:spLocks noGrp="1"/>
+          </p:cNvSpPr>
+          <p:nvPr>
+            <p:ph type="sldImg" idx="2"/>
+          </p:nvPr>
+        </p:nvSpPr>
+        <p:spPr/>
+      </p:sp>
+      <p:sp>
+        <p:nvSpPr>
+          <p:cNvPr id="3" name="Notes Placeholder 2"/>
+          <p:cNvSpPr>
+            <a:spLocks noGrp="1"/>
+          </p:cNvSpPr>
+          <p:nvPr>
+            <p:ph type="body" idx="3" sz="quarter"/>
+          </p:nvPr>
+        </p:nvSpPr>
+        <p:spPr/>
+        <p:txBody>
+          <a:bodyPr/>
+          <a:lstStyle/>
+          <a:p>
+            <a:r>
+              <a:t>🎨 GÖRSELLEŞTİRME ÖNERİLERİ:</a:t>
+            </a:r>
+          </a:p>
+          <a:p/>
+          <a:p>
+            <a:r>
+              <a:t>📸 Görsel: LAN ve WAN ağ topolojileri şeması</a:t>
+            </a:r>
+          </a:p>
+          <a:p>
+            <a:r>
+              <a:t>🎬 Video: İnternet nasıl çalışır? Animasyonlu anlatım</a:t>
+            </a:r>
+          </a:p>
+          <a:p>
+            <a:r>
+              <a:t>💡 İnfografik: Ev ağı kurulumu diyagramı</a:t>
+            </a:r>
+          </a:p>
+          <a:p>
+            <a:r>
+              <a:t>📸 Görsel: Koşullu yapılar akış diyagramı</a:t>
+            </a:r>
+          </a:p>
+          <a:p>
+            <a:r>
+              <a:t>🎬 Video: Koşullu ifadeler Scratch'te</a:t>
+            </a:r>
+          </a:p>
+        </p:txBody>
+      </p:sp>
+      <p:sp>
+        <p:nvSpPr>
+          <p:cNvPr id="4" name="Slide Number Placeholder 3"/>
+          <p:cNvSpPr>
+            <a:spLocks noGrp="1"/>
+          </p:cNvSpPr>
+          <p:nvPr>
+            <p:ph type="sldNum" idx="5" sz="quarter"/>
+          </p:nvPr>
+        </p:nvSpPr>
+        <p:spPr/>
+      </p:sp>
+    </p:spTree>
+  </p:cSld>
+  <p:clrMapOvr>
+    <a:masterClrMapping/>
+  </p:clrMapOvr>
+</p:notes>
+</file>
+
+<file path=ppt/notesSlides/notesSlide34.xml><?xml version="1.0" encoding="utf-8"?>
+<p:notes xmlns:a="http://schemas.openxmlformats.org/drawingml/2006/main" xmlns:p="http://schemas.openxmlformats.org/presentationml/2006/main" xmlns:r="http://schemas.openxmlformats.org/officeDocument/2006/relationships">
+  <p:cSld>
+    <p:spTree>
+      <p:nvGrpSpPr>
+        <p:cNvPr id="1" name=""/>
+        <p:cNvGrpSpPr/>
+        <p:nvPr/>
+      </p:nvGrpSpPr>
+      <p:grpSpPr>
+        <a:xfrm>
+          <a:off x="0" y="0"/>
+          <a:ext cx="0" cy="0"/>
+          <a:chOff x="0" y="0"/>
+          <a:chExt cx="0" cy="0"/>
+        </a:xfrm>
+      </p:grpSpPr>
+      <p:sp>
+        <p:nvSpPr>
+          <p:cNvPr id="2" name="Slide Image Placeholder 1"/>
+          <p:cNvSpPr>
+            <a:spLocks noGrp="1"/>
+          </p:cNvSpPr>
+          <p:nvPr>
+            <p:ph type="sldImg" idx="2"/>
+          </p:nvPr>
+        </p:nvSpPr>
+        <p:spPr/>
+      </p:sp>
+      <p:sp>
+        <p:nvSpPr>
+          <p:cNvPr id="3" name="Notes Placeholder 2"/>
+          <p:cNvSpPr>
+            <a:spLocks noGrp="1"/>
+          </p:cNvSpPr>
+          <p:nvPr>
+            <p:ph type="body" idx="3" sz="quarter"/>
+          </p:nvPr>
+        </p:nvSpPr>
+        <p:spPr/>
+        <p:txBody>
+          <a:bodyPr/>
+          <a:lstStyle/>
+          <a:p>
+            <a:r>
+              <a:t>🎨 GÖRSELLEŞTİRME ÖNERİLERİ:</a:t>
+            </a:r>
+          </a:p>
+          <a:p/>
+          <a:p>
+            <a:r>
+              <a:t>📸 Görsel: LAN ve WAN ağ topolojileri şeması</a:t>
+            </a:r>
+          </a:p>
+          <a:p>
+            <a:r>
+              <a:t>🎬 Video: İnternet nasıl çalışır? Animasyonlu anlatım</a:t>
+            </a:r>
+          </a:p>
+          <a:p>
+            <a:r>
+              <a:t>💡 İnfografik: Ev ağı kurulumu diyagramı</a:t>
+            </a:r>
+          </a:p>
+          <a:p>
+            <a:r>
+              <a:t>📸 Görsel: Döngü mantığı şeması</a:t>
+            </a:r>
+          </a:p>
+          <a:p>
+            <a:r>
+              <a:t>🎬 Video: Döngüler Scratch'te nasıl kullanılır?</a:t>
+            </a:r>
+          </a:p>
+          <a:p>
+            <a:r>
+              <a:t>📸 Görsel: Koşullu yapılar akış diyagramı</a:t>
+            </a:r>
+          </a:p>
+          <a:p>
+            <a:r>
+              <a:t>🎬 Video: Koşullu ifadeler Scratch'te</a:t>
+            </a:r>
+          </a:p>
+        </p:txBody>
+      </p:sp>
+      <p:sp>
+        <p:nvSpPr>
+          <p:cNvPr id="4" name="Slide Number Placeholder 3"/>
+          <p:cNvSpPr>
+            <a:spLocks noGrp="1"/>
+          </p:cNvSpPr>
+          <p:nvPr>
+            <p:ph type="sldNum" idx="5" sz="quarter"/>
+          </p:nvPr>
+        </p:nvSpPr>
+        <p:spPr/>
+      </p:sp>
+    </p:spTree>
+  </p:cSld>
+  <p:clrMapOvr>
+    <a:masterClrMapping/>
+  </p:clrMapOvr>
+</p:notes>
+</file>
+
+<file path=ppt/notesSlides/notesSlide35.xml><?xml version="1.0" encoding="utf-8"?>
+<p:notes xmlns:a="http://schemas.openxmlformats.org/drawingml/2006/main" xmlns:p="http://schemas.openxmlformats.org/presentationml/2006/main" xmlns:r="http://schemas.openxmlformats.org/officeDocument/2006/relationships">
+  <p:cSld>
+    <p:spTree>
+      <p:nvGrpSpPr>
+        <p:cNvPr id="1" name=""/>
+        <p:cNvGrpSpPr/>
+        <p:nvPr/>
+      </p:nvGrpSpPr>
+      <p:grpSpPr>
+        <a:xfrm>
+          <a:off x="0" y="0"/>
+          <a:ext cx="0" cy="0"/>
+          <a:chOff x="0" y="0"/>
+          <a:chExt cx="0" cy="0"/>
+        </a:xfrm>
+      </p:grpSpPr>
+      <p:sp>
+        <p:nvSpPr>
+          <p:cNvPr id="2" name="Slide Image Placeholder 1"/>
+          <p:cNvSpPr>
+            <a:spLocks noGrp="1"/>
+          </p:cNvSpPr>
+          <p:nvPr>
+            <p:ph type="sldImg" idx="2"/>
+          </p:nvPr>
+        </p:nvSpPr>
+        <p:spPr/>
+      </p:sp>
+      <p:sp>
+        <p:nvSpPr>
+          <p:cNvPr id="3" name="Notes Placeholder 2"/>
+          <p:cNvSpPr>
+            <a:spLocks noGrp="1"/>
+          </p:cNvSpPr>
+          <p:nvPr>
+            <p:ph type="body" idx="3" sz="quarter"/>
+          </p:nvPr>
+        </p:nvSpPr>
+        <p:spPr/>
+        <p:txBody>
+          <a:bodyPr/>
+          <a:lstStyle/>
+          <a:p>
+            <a:r>
+              <a:t>🎨 GÖRSELLEŞTİRME ÖNERİLERİ:</a:t>
+            </a:r>
+          </a:p>
+          <a:p/>
+          <a:p>
+            <a:r>
+              <a:t>📸 Görsel: CPU, RAM ve anakart fotoğrafları</a:t>
+            </a:r>
+          </a:p>
+          <a:p>
+            <a:r>
+              <a:t>🎬 Video: Bilgisayar donanımı tanıtım videosu (1-2 dk)</a:t>
+            </a:r>
+          </a:p>
+          <a:p>
+            <a:r>
+              <a:t>💡 İnfografik: Bilgisayar bileşenleri şeması</a:t>
+            </a:r>
+          </a:p>
+          <a:p>
+            <a:r>
+              <a:t>📸 Görsel: LAN ve WAN ağ topolojileri şeması</a:t>
+            </a:r>
+          </a:p>
+          <a:p>
+            <a:r>
+              <a:t>🎬 Video: İnternet nasıl çalışır? Animasyonlu anlatım</a:t>
+            </a:r>
+          </a:p>
+          <a:p>
+            <a:r>
+              <a:t>💡 İnfografik: Ev ağı kurulumu diyagramı</a:t>
+            </a:r>
+          </a:p>
+          <a:p>
+            <a:r>
+              <a:t>📸 Görsel: Scratch arayüzü ekran görüntüsü</a:t>
+            </a:r>
+          </a:p>
+          <a:p>
+            <a:r>
+              <a:t>🎬 Video: Scratch ile basit oyun yapımı (3-5 dk)</a:t>
+            </a:r>
+          </a:p>
+          <a:p>
+            <a:r>
+              <a:t>💡 Ekran kaydı: Adım adım Scratch projesi</a:t>
+            </a:r>
+          </a:p>
+          <a:p>
+            <a:r>
+              <a:t>📸 Görsel: Akış şeması örnekleri</a:t>
+            </a:r>
+          </a:p>
+          <a:p>
+            <a:r>
+              <a:t>🎬 Video: Algoritma nedir? Günlük hayattan örnekler</a:t>
+            </a:r>
+          </a:p>
+          <a:p>
+            <a:r>
+              <a:t>💡 İnfografik: Akış şeması sembolleri</a:t>
+            </a:r>
+          </a:p>
+        </p:txBody>
+      </p:sp>
+      <p:sp>
+        <p:nvSpPr>
+          <p:cNvPr id="4" name="Slide Number Placeholder 3"/>
+          <p:cNvSpPr>
+            <a:spLocks noGrp="1"/>
+          </p:cNvSpPr>
+          <p:nvPr>
+            <p:ph type="sldNum" idx="5" sz="quarter"/>
+          </p:nvPr>
+        </p:nvSpPr>
+        <p:spPr/>
+      </p:sp>
+    </p:spTree>
+  </p:cSld>
+  <p:clrMapOvr>
+    <a:masterClrMapping/>
+  </p:clrMapOvr>
+</p:notes>
+</file>
+
+<file path=ppt/notesSlides/notesSlide36.xml><?xml version="1.0" encoding="utf-8"?>
+<p:notes xmlns:a="http://schemas.openxmlformats.org/drawingml/2006/main" xmlns:p="http://schemas.openxmlformats.org/presentationml/2006/main" xmlns:r="http://schemas.openxmlformats.org/officeDocument/2006/relationships">
+  <p:cSld>
+    <p:spTree>
+      <p:nvGrpSpPr>
+        <p:cNvPr id="1" name=""/>
+        <p:cNvGrpSpPr/>
+        <p:nvPr/>
+      </p:nvGrpSpPr>
+      <p:grpSpPr>
+        <a:xfrm>
+          <a:off x="0" y="0"/>
+          <a:ext cx="0" cy="0"/>
+          <a:chOff x="0" y="0"/>
+          <a:chExt cx="0" cy="0"/>
+        </a:xfrm>
+      </p:grpSpPr>
+      <p:sp>
+        <p:nvSpPr>
+          <p:cNvPr id="2" name="Slide Image Placeholder 1"/>
+          <p:cNvSpPr>
+            <a:spLocks noGrp="1"/>
+          </p:cNvSpPr>
+          <p:nvPr>
+            <p:ph type="sldImg" idx="2"/>
+          </p:nvPr>
+        </p:nvSpPr>
+        <p:spPr/>
+      </p:sp>
+      <p:sp>
+        <p:nvSpPr>
+          <p:cNvPr id="3" name="Notes Placeholder 2"/>
+          <p:cNvSpPr>
+            <a:spLocks noGrp="1"/>
+          </p:cNvSpPr>
+          <p:nvPr>
+            <p:ph type="body" idx="3" sz="quarter"/>
+          </p:nvPr>
+        </p:nvSpPr>
+        <p:spPr/>
+        <p:txBody>
+          <a:bodyPr/>
+          <a:lstStyle/>
+          <a:p>
+            <a:r>
+              <a:t>🎨 GÖRSELLEŞTİRME ÖNERİLERİ:</a:t>
+            </a:r>
+          </a:p>
+          <a:p/>
+          <a:p>
+            <a:r>
+              <a:t>📸 Görsel: CPU, RAM ve anakart fotoğrafları</a:t>
+            </a:r>
+          </a:p>
+          <a:p>
+            <a:r>
+              <a:t>🎬 Video: Bilgisayar donanımı tanıtım videosu (1-2 dk)</a:t>
+            </a:r>
+          </a:p>
+          <a:p>
+            <a:r>
+              <a:t>💡 İnfografik: Bilgisayar bileşenleri şeması</a:t>
+            </a:r>
+          </a:p>
+          <a:p>
+            <a:r>
+              <a:t>📸 Görsel: LAN ve WAN ağ topolojileri şeması</a:t>
+            </a:r>
+          </a:p>
+          <a:p>
+            <a:r>
+              <a:t>🎬 Video: İnternet nasıl çalışır? Animasyonlu anlatım</a:t>
+            </a:r>
+          </a:p>
+          <a:p>
+            <a:r>
+              <a:t>💡 İnfografik: Ev ağı kurulumu diyagramı</a:t>
+            </a:r>
+          </a:p>
+          <a:p>
+            <a:r>
+              <a:t>📸 Görsel: Akış şeması örnekleri</a:t>
+            </a:r>
+          </a:p>
+          <a:p>
+            <a:r>
+              <a:t>🎬 Video: Algoritma nedir? Günlük hayattan örnekler</a:t>
+            </a:r>
+          </a:p>
+          <a:p>
+            <a:r>
+              <a:t>💡 İnfografik: Akış şeması sembolleri</a:t>
+            </a:r>
+          </a:p>
+          <a:p>
+            <a:r>
+              <a:t>📸 Görsel: Döngü mantığı şeması</a:t>
+            </a:r>
+          </a:p>
+          <a:p>
+            <a:r>
+              <a:t>🎬 Video: Döngüler Scratch'te nasıl kullanılır?</a:t>
+            </a:r>
+          </a:p>
+          <a:p>
+            <a:r>
+              <a:t>📸 Görsel: Temel tasarım prensipleri</a:t>
+            </a:r>
+          </a:p>
+          <a:p>
+            <a:r>
+              <a:t>🎬 Video: Dijital tasarıma giriş</a:t>
+            </a:r>
+          </a:p>
+          <a:p>
+            <a:r>
+              <a:t>💡 İnfografik: Renk teorisi ve uyumu</a:t>
+            </a:r>
+          </a:p>
+        </p:txBody>
+      </p:sp>
+      <p:sp>
+        <p:nvSpPr>
+          <p:cNvPr id="4" name="Slide Number Placeholder 3"/>
+          <p:cNvSpPr>
+            <a:spLocks noGrp="1"/>
+          </p:cNvSpPr>
+          <p:nvPr>
+            <p:ph type="sldNum" idx="5" sz="quarter"/>
+          </p:nvPr>
+        </p:nvSpPr>
+        <p:spPr/>
+      </p:sp>
+    </p:spTree>
+  </p:cSld>
+  <p:clrMapOvr>
+    <a:masterClrMapping/>
+  </p:clrMapOvr>
+</p:notes>
+</file>
+
+<file path=ppt/notesSlides/notesSlide37.xml><?xml version="1.0" encoding="utf-8"?>
+<p:notes xmlns:a="http://schemas.openxmlformats.org/drawingml/2006/main" xmlns:p="http://schemas.openxmlformats.org/presentationml/2006/main" xmlns:r="http://schemas.openxmlformats.org/officeDocument/2006/relationships">
+  <p:cSld>
+    <p:spTree>
+      <p:nvGrpSpPr>
+        <p:cNvPr id="1" name=""/>
+        <p:cNvGrpSpPr/>
+        <p:nvPr/>
+      </p:nvGrpSpPr>
+      <p:grpSpPr>
+        <a:xfrm>
+          <a:off x="0" y="0"/>
+          <a:ext cx="0" cy="0"/>
+          <a:chOff x="0" y="0"/>
+          <a:chExt cx="0" cy="0"/>
+        </a:xfrm>
+      </p:grpSpPr>
+      <p:sp>
+        <p:nvSpPr>
+          <p:cNvPr id="2" name="Slide Image Placeholder 1"/>
+          <p:cNvSpPr>
+            <a:spLocks noGrp="1"/>
+          </p:cNvSpPr>
+          <p:nvPr>
+            <p:ph type="sldImg" idx="2"/>
+          </p:nvPr>
+        </p:nvSpPr>
+        <p:spPr/>
+      </p:sp>
+      <p:sp>
+        <p:nvSpPr>
+          <p:cNvPr id="3" name="Notes Placeholder 2"/>
+          <p:cNvSpPr>
+            <a:spLocks noGrp="1"/>
+          </p:cNvSpPr>
+          <p:nvPr>
+            <p:ph type="body" idx="3" sz="quarter"/>
+          </p:nvPr>
+        </p:nvSpPr>
+        <p:spPr/>
+        <p:txBody>
+          <a:bodyPr/>
+          <a:lstStyle/>
+          <a:p>
+            <a:r>
+              <a:t>🎨 GÖRSELLEŞTİRME ÖNERİLERİ:</a:t>
+            </a:r>
+          </a:p>
+          <a:p/>
+          <a:p>
+            <a:r>
+              <a:t>📸 Görsel: CPU, RAM ve anakart fotoğrafları</a:t>
+            </a:r>
+          </a:p>
+          <a:p>
+            <a:r>
+              <a:t>🎬 Video: Bilgisayar donanımı tanıtım videosu (1-2 dk)</a:t>
+            </a:r>
+          </a:p>
+          <a:p>
+            <a:r>
+              <a:t>💡 İnfografik: Bilgisayar bileşenleri şeması</a:t>
+            </a:r>
+          </a:p>
+          <a:p>
+            <a:r>
+              <a:t>📸 Görsel: Scratch arayüzü ekran görüntüsü</a:t>
+            </a:r>
+          </a:p>
+          <a:p>
+            <a:r>
+              <a:t>🎬 Video: Scratch ile basit oyun yapımı (3-5 dk)</a:t>
+            </a:r>
+          </a:p>
+          <a:p>
+            <a:r>
+              <a:t>💡 Ekran kaydı: Adım adım Scratch projesi</a:t>
+            </a:r>
+          </a:p>
+          <a:p>
+            <a:r>
+              <a:t>📸 Görsel: Koşullu yapılar akış diyagramı</a:t>
+            </a:r>
+          </a:p>
+          <a:p>
+            <a:r>
+              <a:t>🎬 Video: Koşullu ifadeler Scratch'te</a:t>
+            </a:r>
+          </a:p>
+        </p:txBody>
+      </p:sp>
+      <p:sp>
+        <p:nvSpPr>
+          <p:cNvPr id="4" name="Slide Number Placeholder 3"/>
+          <p:cNvSpPr>
+            <a:spLocks noGrp="1"/>
+          </p:cNvSpPr>
+          <p:nvPr>
+            <p:ph type="sldNum" idx="5" sz="quarter"/>
+          </p:nvPr>
+        </p:nvSpPr>
+        <p:spPr/>
+      </p:sp>
+    </p:spTree>
+  </p:cSld>
+  <p:clrMapOvr>
+    <a:masterClrMapping/>
+  </p:clrMapOvr>
+</p:notes>
+</file>
+
+<file path=ppt/notesSlides/notesSlide38.xml><?xml version="1.0" encoding="utf-8"?>
+<p:notes xmlns:a="http://schemas.openxmlformats.org/drawingml/2006/main" xmlns:p="http://schemas.openxmlformats.org/presentationml/2006/main" xmlns:r="http://schemas.openxmlformats.org/officeDocument/2006/relationships">
+  <p:cSld>
+    <p:spTree>
+      <p:nvGrpSpPr>
+        <p:cNvPr id="1" name=""/>
+        <p:cNvGrpSpPr/>
+        <p:nvPr/>
+      </p:nvGrpSpPr>
+      <p:grpSpPr>
+        <a:xfrm>
+          <a:off x="0" y="0"/>
+          <a:ext cx="0" cy="0"/>
+          <a:chOff x="0" y="0"/>
+          <a:chExt cx="0" cy="0"/>
+        </a:xfrm>
+      </p:grpSpPr>
+      <p:sp>
+        <p:nvSpPr>
+          <p:cNvPr id="2" name="Slide Image Placeholder 1"/>
+          <p:cNvSpPr>
+            <a:spLocks noGrp="1"/>
+          </p:cNvSpPr>
+          <p:nvPr>
+            <p:ph type="sldImg" idx="2"/>
+          </p:nvPr>
+        </p:nvSpPr>
+        <p:spPr/>
+      </p:sp>
+      <p:sp>
+        <p:nvSpPr>
+          <p:cNvPr id="3" name="Notes Placeholder 2"/>
+          <p:cNvSpPr>
+            <a:spLocks noGrp="1"/>
+          </p:cNvSpPr>
+          <p:nvPr>
+            <p:ph type="body" idx="3" sz="quarter"/>
+          </p:nvPr>
+        </p:nvSpPr>
+        <p:spPr/>
+        <p:txBody>
+          <a:bodyPr/>
+          <a:lstStyle/>
+          <a:p>
+            <a:r>
+              <a:t>🎨 GÖRSELLEŞTİRME ÖNERİLERİ:</a:t>
+            </a:r>
+          </a:p>
+          <a:p/>
+          <a:p>
+            <a:r>
+              <a:t>📸 Görsel: CPU, RAM ve anakart fotoğrafları</a:t>
+            </a:r>
+          </a:p>
+          <a:p>
+            <a:r>
+              <a:t>🎬 Video: Bilgisayar donanımı tanıtım videosu (1-2 dk)</a:t>
+            </a:r>
+          </a:p>
+          <a:p>
+            <a:r>
+              <a:t>💡 İnfografik: Bilgisayar bileşenleri şeması</a:t>
+            </a:r>
+          </a:p>
+          <a:p>
+            <a:r>
+              <a:t>📸 Görsel: Yapay zeka uygulama örnekleri (Siri, Alexa, ChatGPT)</a:t>
+            </a:r>
+          </a:p>
+          <a:p>
+            <a:r>
+              <a:t>🎬 Video: Yapay zeka nedir? Çocuklar için anlatım</a:t>
+            </a:r>
+          </a:p>
+          <a:p>
+            <a:r>
+              <a:t>💡 İnfografik: AI kullanım alanları</a:t>
+            </a:r>
+          </a:p>
+          <a:p>
+            <a:r>
+              <a:t>📸 Görsel: Scratch arayüzü ekran görüntüsü</a:t>
+            </a:r>
+          </a:p>
+          <a:p>
+            <a:r>
+              <a:t>🎬 Video: Scratch ile basit oyun yapımı (3-5 dk)</a:t>
+            </a:r>
+          </a:p>
+          <a:p>
+            <a:r>
+              <a:t>💡 Ekran kaydı: Adım adım Scratch projesi</a:t>
+            </a:r>
+          </a:p>
+          <a:p>
+            <a:r>
+              <a:t>📸 Görsel: Değişken kavramı görselleştirmesi</a:t>
+            </a:r>
+          </a:p>
+          <a:p>
+            <a:r>
+              <a:t>🎬 Video: Scratch'te değişken kullanımı</a:t>
+            </a:r>
+          </a:p>
+        </p:txBody>
+      </p:sp>
+      <p:sp>
+        <p:nvSpPr>
+          <p:cNvPr id="4" name="Slide Number Placeholder 3"/>
+          <p:cNvSpPr>
+            <a:spLocks noGrp="1"/>
+          </p:cNvSpPr>
+          <p:nvPr>
+            <p:ph type="sldNum" idx="5" sz="quarter"/>
+          </p:nvPr>
+        </p:nvSpPr>
+        <p:spPr/>
+      </p:sp>
+    </p:spTree>
+  </p:cSld>
+  <p:clrMapOvr>
+    <a:masterClrMapping/>
+  </p:clrMapOvr>
+</p:notes>
+</file>
+
+<file path=ppt/notesSlides/notesSlide39.xml><?xml version="1.0" encoding="utf-8"?>
+<p:notes xmlns:a="http://schemas.openxmlformats.org/drawingml/2006/main" xmlns:p="http://schemas.openxmlformats.org/presentationml/2006/main" xmlns:r="http://schemas.openxmlformats.org/officeDocument/2006/relationships">
+  <p:cSld>
+    <p:spTree>
+      <p:nvGrpSpPr>
+        <p:cNvPr id="1" name=""/>
+        <p:cNvGrpSpPr/>
+        <p:nvPr/>
+      </p:nvGrpSpPr>
+      <p:grpSpPr>
+        <a:xfrm>
+          <a:off x="0" y="0"/>
+          <a:ext cx="0" cy="0"/>
+          <a:chOff x="0" y="0"/>
+          <a:chExt cx="0" cy="0"/>
+        </a:xfrm>
+      </p:grpSpPr>
+      <p:sp>
+        <p:nvSpPr>
+          <p:cNvPr id="2" name="Slide Image Placeholder 1"/>
+          <p:cNvSpPr>
+            <a:spLocks noGrp="1"/>
+          </p:cNvSpPr>
+          <p:nvPr>
+            <p:ph type="sldImg" idx="2"/>
+          </p:nvPr>
+        </p:nvSpPr>
+        <p:spPr/>
+      </p:sp>
+      <p:sp>
+        <p:nvSpPr>
+          <p:cNvPr id="3" name="Notes Placeholder 2"/>
+          <p:cNvSpPr>
+            <a:spLocks noGrp="1"/>
+          </p:cNvSpPr>
+          <p:nvPr>
+            <p:ph type="body" idx="3" sz="quarter"/>
+          </p:nvPr>
+        </p:nvSpPr>
+        <p:spPr/>
+        <p:txBody>
+          <a:bodyPr/>
+          <a:lstStyle/>
+          <a:p>
+            <a:r>
+              <a:t>🎨 GÖRSELLEŞTİRME ÖNERİLERİ:</a:t>
+            </a:r>
+          </a:p>
+          <a:p/>
+          <a:p>
+            <a:r>
+              <a:t>📸 Görsel: LAN ve WAN ağ topolojileri şeması</a:t>
+            </a:r>
+          </a:p>
+          <a:p>
+            <a:r>
+              <a:t>🎬 Video: İnternet nasıl çalışır? Animasyonlu anlatım</a:t>
+            </a:r>
+          </a:p>
+          <a:p>
+            <a:r>
+              <a:t>💡 İnfografik: Ev ağı kurulumu diyagramı</a:t>
+            </a:r>
+          </a:p>
+          <a:p>
+            <a:r>
+              <a:t>📸 Görsel: Scratch arayüzü ekran görüntüsü</a:t>
+            </a:r>
+          </a:p>
+          <a:p>
+            <a:r>
+              <a:t>🎬 Video: Scratch ile basit oyun yapımı (3-5 dk)</a:t>
+            </a:r>
+          </a:p>
+          <a:p>
+            <a:r>
+              <a:t>💡 Ekran kaydı: Adım adım Scratch projesi</a:t>
+            </a:r>
+          </a:p>
+          <a:p>
+            <a:r>
+              <a:t>📸 Görsel: Döngü mantığı şeması</a:t>
+            </a:r>
+          </a:p>
+          <a:p>
+            <a:r>
+              <a:t>🎬 Video: Döngüler Scratch'te nasıl kullanılır?</a:t>
             </a:r>
           </a:p>
         </p:txBody>
@@ -1184,7 +4561,1244 @@
           <a:lstStyle/>
           <a:p>
             <a:r>
-              <a:t>Etkinlik: Öğrencilere veri örnekleri verin, hangi türe ait olduklarını bulsunlar</a:t>
+              <a:t>Etkinlik: Sınıfta mini anket yapın (favori ders, hobi, vs.)</a:t>
+            </a:r>
+          </a:p>
+          <a:p/>
+          <a:p>
+            <a:r>
+              <a:t>🎨 GÖRSELLEŞTİRME ÖNERİLERİ:</a:t>
+            </a:r>
+          </a:p>
+          <a:p/>
+          <a:p>
+            <a:r>
+              <a:t>📸 Görsel: LAN ve WAN ağ topolojileri şeması</a:t>
+            </a:r>
+          </a:p>
+          <a:p>
+            <a:r>
+              <a:t>🎬 Video: İnternet nasıl çalışır? Animasyonlu anlatım</a:t>
+            </a:r>
+          </a:p>
+          <a:p>
+            <a:r>
+              <a:t>💡 İnfografik: Ev ağı kurulumu diyagramı</a:t>
+            </a:r>
+          </a:p>
+          <a:p>
+            <a:r>
+              <a:t>📸 Görsel: Farklı grafik türleri örnekleri</a:t>
+            </a:r>
+          </a:p>
+          <a:p>
+            <a:r>
+              <a:t>🎬 Video: Veri görselleştirme önemi</a:t>
+            </a:r>
+          </a:p>
+          <a:p>
+            <a:r>
+              <a:t>💡 İnfografik: Grafik türleri ve kullanım alanları</a:t>
+            </a:r>
+          </a:p>
+        </p:txBody>
+      </p:sp>
+      <p:sp>
+        <p:nvSpPr>
+          <p:cNvPr id="4" name="Slide Number Placeholder 3"/>
+          <p:cNvSpPr>
+            <a:spLocks noGrp="1"/>
+          </p:cNvSpPr>
+          <p:nvPr>
+            <p:ph type="sldNum" idx="5" sz="quarter"/>
+          </p:nvPr>
+        </p:nvSpPr>
+        <p:spPr/>
+      </p:sp>
+    </p:spTree>
+  </p:cSld>
+  <p:clrMapOvr>
+    <a:masterClrMapping/>
+  </p:clrMapOvr>
+</p:notes>
+</file>
+
+<file path=ppt/notesSlides/notesSlide40.xml><?xml version="1.0" encoding="utf-8"?>
+<p:notes xmlns:a="http://schemas.openxmlformats.org/drawingml/2006/main" xmlns:p="http://schemas.openxmlformats.org/presentationml/2006/main" xmlns:r="http://schemas.openxmlformats.org/officeDocument/2006/relationships">
+  <p:cSld>
+    <p:spTree>
+      <p:nvGrpSpPr>
+        <p:cNvPr id="1" name=""/>
+        <p:cNvGrpSpPr/>
+        <p:nvPr/>
+      </p:nvGrpSpPr>
+      <p:grpSpPr>
+        <a:xfrm>
+          <a:off x="0" y="0"/>
+          <a:ext cx="0" cy="0"/>
+          <a:chOff x="0" y="0"/>
+          <a:chExt cx="0" cy="0"/>
+        </a:xfrm>
+      </p:grpSpPr>
+      <p:sp>
+        <p:nvSpPr>
+          <p:cNvPr id="2" name="Slide Image Placeholder 1"/>
+          <p:cNvSpPr>
+            <a:spLocks noGrp="1"/>
+          </p:cNvSpPr>
+          <p:nvPr>
+            <p:ph type="sldImg" idx="2"/>
+          </p:nvPr>
+        </p:nvSpPr>
+        <p:spPr/>
+      </p:sp>
+      <p:sp>
+        <p:nvSpPr>
+          <p:cNvPr id="3" name="Notes Placeholder 2"/>
+          <p:cNvSpPr>
+            <a:spLocks noGrp="1"/>
+          </p:cNvSpPr>
+          <p:nvPr>
+            <p:ph type="body" idx="3" sz="quarter"/>
+          </p:nvPr>
+        </p:nvSpPr>
+        <p:spPr/>
+        <p:txBody>
+          <a:bodyPr/>
+          <a:lstStyle/>
+          <a:p>
+            <a:r>
+              <a:t>🎨 GÖRSELLEŞTİRME ÖNERİLERİ:</a:t>
+            </a:r>
+          </a:p>
+          <a:p/>
+          <a:p>
+            <a:r>
+              <a:t>📸 Görsel: LAN ve WAN ağ topolojileri şeması</a:t>
+            </a:r>
+          </a:p>
+          <a:p>
+            <a:r>
+              <a:t>🎬 Video: İnternet nasıl çalışır? Animasyonlu anlatım</a:t>
+            </a:r>
+          </a:p>
+          <a:p>
+            <a:r>
+              <a:t>💡 İnfografik: Ev ağı kurulumu diyagramı</a:t>
+            </a:r>
+          </a:p>
+          <a:p>
+            <a:r>
+              <a:t>📸 Görsel: Scratch arayüzü ekran görüntüsü</a:t>
+            </a:r>
+          </a:p>
+          <a:p>
+            <a:r>
+              <a:t>🎬 Video: Scratch ile basit oyun yapımı (3-5 dk)</a:t>
+            </a:r>
+          </a:p>
+          <a:p>
+            <a:r>
+              <a:t>💡 Ekran kaydı: Adım adım Scratch projesi</a:t>
+            </a:r>
+          </a:p>
+        </p:txBody>
+      </p:sp>
+      <p:sp>
+        <p:nvSpPr>
+          <p:cNvPr id="4" name="Slide Number Placeholder 3"/>
+          <p:cNvSpPr>
+            <a:spLocks noGrp="1"/>
+          </p:cNvSpPr>
+          <p:nvPr>
+            <p:ph type="sldNum" idx="5" sz="quarter"/>
+          </p:nvPr>
+        </p:nvSpPr>
+        <p:spPr/>
+      </p:sp>
+    </p:spTree>
+  </p:cSld>
+  <p:clrMapOvr>
+    <a:masterClrMapping/>
+  </p:clrMapOvr>
+</p:notes>
+</file>
+
+<file path=ppt/notesSlides/notesSlide41.xml><?xml version="1.0" encoding="utf-8"?>
+<p:notes xmlns:a="http://schemas.openxmlformats.org/drawingml/2006/main" xmlns:p="http://schemas.openxmlformats.org/presentationml/2006/main" xmlns:r="http://schemas.openxmlformats.org/officeDocument/2006/relationships">
+  <p:cSld>
+    <p:spTree>
+      <p:nvGrpSpPr>
+        <p:cNvPr id="1" name=""/>
+        <p:cNvGrpSpPr/>
+        <p:nvPr/>
+      </p:nvGrpSpPr>
+      <p:grpSpPr>
+        <a:xfrm>
+          <a:off x="0" y="0"/>
+          <a:ext cx="0" cy="0"/>
+          <a:chOff x="0" y="0"/>
+          <a:chExt cx="0" cy="0"/>
+        </a:xfrm>
+      </p:grpSpPr>
+      <p:sp>
+        <p:nvSpPr>
+          <p:cNvPr id="2" name="Slide Image Placeholder 1"/>
+          <p:cNvSpPr>
+            <a:spLocks noGrp="1"/>
+          </p:cNvSpPr>
+          <p:nvPr>
+            <p:ph type="sldImg" idx="2"/>
+          </p:nvPr>
+        </p:nvSpPr>
+        <p:spPr/>
+      </p:sp>
+      <p:sp>
+        <p:nvSpPr>
+          <p:cNvPr id="3" name="Notes Placeholder 2"/>
+          <p:cNvSpPr>
+            <a:spLocks noGrp="1"/>
+          </p:cNvSpPr>
+          <p:nvPr>
+            <p:ph type="body" idx="3" sz="quarter"/>
+          </p:nvPr>
+        </p:nvSpPr>
+        <p:spPr/>
+        <p:txBody>
+          <a:bodyPr/>
+          <a:lstStyle/>
+          <a:p>
+            <a:r>
+              <a:t>🎨 GÖRSELLEŞTİRME ÖNERİLERİ:</a:t>
+            </a:r>
+          </a:p>
+          <a:p/>
+          <a:p>
+            <a:r>
+              <a:t>📸 Görsel: Çeşitli giriş aygıtları (klavye, fare, mikrofon, kamera)</a:t>
+            </a:r>
+          </a:p>
+          <a:p>
+            <a:r>
+              <a:t>🎬 Video: Giriş aygıtlarının nasıl çalıştığını gösteren animasyon</a:t>
+            </a:r>
+          </a:p>
+          <a:p>
+            <a:r>
+              <a:t>📸 Görsel: LAN ve WAN ağ topolojileri şeması</a:t>
+            </a:r>
+          </a:p>
+          <a:p>
+            <a:r>
+              <a:t>🎬 Video: İnternet nasıl çalışır? Animasyonlu anlatım</a:t>
+            </a:r>
+          </a:p>
+          <a:p>
+            <a:r>
+              <a:t>💡 İnfografik: Ev ağı kurulumu diyagramı</a:t>
+            </a:r>
+          </a:p>
+          <a:p>
+            <a:r>
+              <a:t>📸 Görsel: Yapay zeka uygulama örnekleri (Siri, Alexa, ChatGPT)</a:t>
+            </a:r>
+          </a:p>
+          <a:p>
+            <a:r>
+              <a:t>🎬 Video: Yapay zeka nedir? Çocuklar için anlatım</a:t>
+            </a:r>
+          </a:p>
+          <a:p>
+            <a:r>
+              <a:t>💡 İnfografik: AI kullanım alanları</a:t>
+            </a:r>
+          </a:p>
+          <a:p>
+            <a:r>
+              <a:t>📸 Görsel: Scratch arayüzü ekran görüntüsü</a:t>
+            </a:r>
+          </a:p>
+          <a:p>
+            <a:r>
+              <a:t>🎬 Video: Scratch ile basit oyun yapımı (3-5 dk)</a:t>
+            </a:r>
+          </a:p>
+          <a:p>
+            <a:r>
+              <a:t>💡 Ekran kaydı: Adım adım Scratch projesi</a:t>
+            </a:r>
+          </a:p>
+          <a:p>
+            <a:r>
+              <a:t>📸 Görsel: Döngü mantığı şeması</a:t>
+            </a:r>
+          </a:p>
+          <a:p>
+            <a:r>
+              <a:t>🎬 Video: Döngüler Scratch'te nasıl kullanılır?</a:t>
+            </a:r>
+          </a:p>
+          <a:p>
+            <a:r>
+              <a:t>📸 Görsel: Paint araçları ekran görüntüsü</a:t>
+            </a:r>
+          </a:p>
+          <a:p>
+            <a:r>
+              <a:t>🎬 Video: Paint ile basit çizim teknikleri</a:t>
+            </a:r>
+          </a:p>
+        </p:txBody>
+      </p:sp>
+      <p:sp>
+        <p:nvSpPr>
+          <p:cNvPr id="4" name="Slide Number Placeholder 3"/>
+          <p:cNvSpPr>
+            <a:spLocks noGrp="1"/>
+          </p:cNvSpPr>
+          <p:nvPr>
+            <p:ph type="sldNum" idx="5" sz="quarter"/>
+          </p:nvPr>
+        </p:nvSpPr>
+        <p:spPr/>
+      </p:sp>
+    </p:spTree>
+  </p:cSld>
+  <p:clrMapOvr>
+    <a:masterClrMapping/>
+  </p:clrMapOvr>
+</p:notes>
+</file>
+
+<file path=ppt/notesSlides/notesSlide42.xml><?xml version="1.0" encoding="utf-8"?>
+<p:notes xmlns:a="http://schemas.openxmlformats.org/drawingml/2006/main" xmlns:p="http://schemas.openxmlformats.org/presentationml/2006/main" xmlns:r="http://schemas.openxmlformats.org/officeDocument/2006/relationships">
+  <p:cSld>
+    <p:spTree>
+      <p:nvGrpSpPr>
+        <p:cNvPr id="1" name=""/>
+        <p:cNvGrpSpPr/>
+        <p:nvPr/>
+      </p:nvGrpSpPr>
+      <p:grpSpPr>
+        <a:xfrm>
+          <a:off x="0" y="0"/>
+          <a:ext cx="0" cy="0"/>
+          <a:chOff x="0" y="0"/>
+          <a:chExt cx="0" cy="0"/>
+        </a:xfrm>
+      </p:grpSpPr>
+      <p:sp>
+        <p:nvSpPr>
+          <p:cNvPr id="2" name="Slide Image Placeholder 1"/>
+          <p:cNvSpPr>
+            <a:spLocks noGrp="1"/>
+          </p:cNvSpPr>
+          <p:nvPr>
+            <p:ph type="sldImg" idx="2"/>
+          </p:nvPr>
+        </p:nvSpPr>
+        <p:spPr/>
+      </p:sp>
+      <p:sp>
+        <p:nvSpPr>
+          <p:cNvPr id="3" name="Notes Placeholder 2"/>
+          <p:cNvSpPr>
+            <a:spLocks noGrp="1"/>
+          </p:cNvSpPr>
+          <p:nvPr>
+            <p:ph type="body" idx="3" sz="quarter"/>
+          </p:nvPr>
+        </p:nvSpPr>
+        <p:spPr/>
+        <p:txBody>
+          <a:bodyPr/>
+          <a:lstStyle/>
+          <a:p>
+            <a:r>
+              <a:t>🎨 GÖRSELLEŞTİRME ÖNERİLERİ:</a:t>
+            </a:r>
+          </a:p>
+          <a:p/>
+          <a:p>
+            <a:r>
+              <a:t>📸 Görsel: Scratch arayüzü ekran görüntüsü</a:t>
+            </a:r>
+          </a:p>
+          <a:p>
+            <a:r>
+              <a:t>🎬 Video: Scratch ile basit oyun yapımı (3-5 dk)</a:t>
+            </a:r>
+          </a:p>
+          <a:p>
+            <a:r>
+              <a:t>💡 Ekran kaydı: Adım adım Scratch projesi</a:t>
+            </a:r>
+          </a:p>
+        </p:txBody>
+      </p:sp>
+      <p:sp>
+        <p:nvSpPr>
+          <p:cNvPr id="4" name="Slide Number Placeholder 3"/>
+          <p:cNvSpPr>
+            <a:spLocks noGrp="1"/>
+          </p:cNvSpPr>
+          <p:nvPr>
+            <p:ph type="sldNum" idx="5" sz="quarter"/>
+          </p:nvPr>
+        </p:nvSpPr>
+        <p:spPr/>
+      </p:sp>
+    </p:spTree>
+  </p:cSld>
+  <p:clrMapOvr>
+    <a:masterClrMapping/>
+  </p:clrMapOvr>
+</p:notes>
+</file>
+
+<file path=ppt/notesSlides/notesSlide43.xml><?xml version="1.0" encoding="utf-8"?>
+<p:notes xmlns:a="http://schemas.openxmlformats.org/drawingml/2006/main" xmlns:p="http://schemas.openxmlformats.org/presentationml/2006/main" xmlns:r="http://schemas.openxmlformats.org/officeDocument/2006/relationships">
+  <p:cSld>
+    <p:spTree>
+      <p:nvGrpSpPr>
+        <p:cNvPr id="1" name=""/>
+        <p:cNvGrpSpPr/>
+        <p:nvPr/>
+      </p:nvGrpSpPr>
+      <p:grpSpPr>
+        <a:xfrm>
+          <a:off x="0" y="0"/>
+          <a:ext cx="0" cy="0"/>
+          <a:chOff x="0" y="0"/>
+          <a:chExt cx="0" cy="0"/>
+        </a:xfrm>
+      </p:grpSpPr>
+      <p:sp>
+        <p:nvSpPr>
+          <p:cNvPr id="2" name="Slide Image Placeholder 1"/>
+          <p:cNvSpPr>
+            <a:spLocks noGrp="1"/>
+          </p:cNvSpPr>
+          <p:nvPr>
+            <p:ph type="sldImg" idx="2"/>
+          </p:nvPr>
+        </p:nvSpPr>
+        <p:spPr/>
+      </p:sp>
+      <p:sp>
+        <p:nvSpPr>
+          <p:cNvPr id="3" name="Notes Placeholder 2"/>
+          <p:cNvSpPr>
+            <a:spLocks noGrp="1"/>
+          </p:cNvSpPr>
+          <p:nvPr>
+            <p:ph type="body" idx="3" sz="quarter"/>
+          </p:nvPr>
+        </p:nvSpPr>
+        <p:spPr/>
+        <p:txBody>
+          <a:bodyPr/>
+          <a:lstStyle/>
+          <a:p>
+            <a:r>
+              <a:t>🎨 GÖRSELLEŞTİRME ÖNERİLERİ:</a:t>
+            </a:r>
+          </a:p>
+          <a:p/>
+          <a:p>
+            <a:r>
+              <a:t>📸 Görsel: LAN ve WAN ağ topolojileri şeması</a:t>
+            </a:r>
+          </a:p>
+          <a:p>
+            <a:r>
+              <a:t>🎬 Video: İnternet nasıl çalışır? Animasyonlu anlatım</a:t>
+            </a:r>
+          </a:p>
+          <a:p>
+            <a:r>
+              <a:t>💡 İnfografik: Ev ağı kurulumu diyagramı</a:t>
+            </a:r>
+          </a:p>
+          <a:p>
+            <a:r>
+              <a:t>📸 Görsel: Yapay zeka uygulama örnekleri (Siri, Alexa, ChatGPT)</a:t>
+            </a:r>
+          </a:p>
+          <a:p>
+            <a:r>
+              <a:t>🎬 Video: Yapay zeka nedir? Çocuklar için anlatım</a:t>
+            </a:r>
+          </a:p>
+          <a:p>
+            <a:r>
+              <a:t>💡 İnfografik: AI kullanım alanları</a:t>
+            </a:r>
+          </a:p>
+          <a:p>
+            <a:r>
+              <a:t>📸 Görsel: Değişken kavramı görselleştirmesi</a:t>
+            </a:r>
+          </a:p>
+          <a:p>
+            <a:r>
+              <a:t>🎬 Video: Scratch'te değişken kullanımı</a:t>
+            </a:r>
+          </a:p>
+          <a:p>
+            <a:r>
+              <a:t>📸 Görsel: Temel tasarım prensipleri</a:t>
+            </a:r>
+          </a:p>
+          <a:p>
+            <a:r>
+              <a:t>🎬 Video: Dijital tasarıma giriş</a:t>
+            </a:r>
+          </a:p>
+          <a:p>
+            <a:r>
+              <a:t>💡 İnfografik: Renk teorisi ve uyumu</a:t>
+            </a:r>
+          </a:p>
+        </p:txBody>
+      </p:sp>
+      <p:sp>
+        <p:nvSpPr>
+          <p:cNvPr id="4" name="Slide Number Placeholder 3"/>
+          <p:cNvSpPr>
+            <a:spLocks noGrp="1"/>
+          </p:cNvSpPr>
+          <p:nvPr>
+            <p:ph type="sldNum" idx="5" sz="quarter"/>
+          </p:nvPr>
+        </p:nvSpPr>
+        <p:spPr/>
+      </p:sp>
+    </p:spTree>
+  </p:cSld>
+  <p:clrMapOvr>
+    <a:masterClrMapping/>
+  </p:clrMapOvr>
+</p:notes>
+</file>
+
+<file path=ppt/notesSlides/notesSlide44.xml><?xml version="1.0" encoding="utf-8"?>
+<p:notes xmlns:a="http://schemas.openxmlformats.org/drawingml/2006/main" xmlns:p="http://schemas.openxmlformats.org/presentationml/2006/main" xmlns:r="http://schemas.openxmlformats.org/officeDocument/2006/relationships">
+  <p:cSld>
+    <p:spTree>
+      <p:nvGrpSpPr>
+        <p:cNvPr id="1" name=""/>
+        <p:cNvGrpSpPr/>
+        <p:nvPr/>
+      </p:nvGrpSpPr>
+      <p:grpSpPr>
+        <a:xfrm>
+          <a:off x="0" y="0"/>
+          <a:ext cx="0" cy="0"/>
+          <a:chOff x="0" y="0"/>
+          <a:chExt cx="0" cy="0"/>
+        </a:xfrm>
+      </p:grpSpPr>
+      <p:sp>
+        <p:nvSpPr>
+          <p:cNvPr id="2" name="Slide Image Placeholder 1"/>
+          <p:cNvSpPr>
+            <a:spLocks noGrp="1"/>
+          </p:cNvSpPr>
+          <p:nvPr>
+            <p:ph type="sldImg" idx="2"/>
+          </p:nvPr>
+        </p:nvSpPr>
+        <p:spPr/>
+      </p:sp>
+      <p:sp>
+        <p:nvSpPr>
+          <p:cNvPr id="3" name="Notes Placeholder 2"/>
+          <p:cNvSpPr>
+            <a:spLocks noGrp="1"/>
+          </p:cNvSpPr>
+          <p:nvPr>
+            <p:ph type="body" idx="3" sz="quarter"/>
+          </p:nvPr>
+        </p:nvSpPr>
+        <p:spPr/>
+        <p:txBody>
+          <a:bodyPr/>
+          <a:lstStyle/>
+          <a:p>
+            <a:r>
+              <a:t>🎨 GÖRSELLEŞTİRME ÖNERİLERİ:</a:t>
+            </a:r>
+          </a:p>
+          <a:p/>
+          <a:p>
+            <a:r>
+              <a:t>📸 Görsel: Scratch arayüzü ekran görüntüsü</a:t>
+            </a:r>
+          </a:p>
+          <a:p>
+            <a:r>
+              <a:t>🎬 Video: Scratch ile basit oyun yapımı (3-5 dk)</a:t>
+            </a:r>
+          </a:p>
+          <a:p>
+            <a:r>
+              <a:t>💡 Ekran kaydı: Adım adım Scratch projesi</a:t>
+            </a:r>
+          </a:p>
+          <a:p>
+            <a:r>
+              <a:t>📸 Görsel: Paint araçları ekran görüntüsü</a:t>
+            </a:r>
+          </a:p>
+          <a:p>
+            <a:r>
+              <a:t>🎬 Video: Paint ile basit çizim teknikleri</a:t>
+            </a:r>
+          </a:p>
+        </p:txBody>
+      </p:sp>
+      <p:sp>
+        <p:nvSpPr>
+          <p:cNvPr id="4" name="Slide Number Placeholder 3"/>
+          <p:cNvSpPr>
+            <a:spLocks noGrp="1"/>
+          </p:cNvSpPr>
+          <p:nvPr>
+            <p:ph type="sldNum" idx="5" sz="quarter"/>
+          </p:nvPr>
+        </p:nvSpPr>
+        <p:spPr/>
+      </p:sp>
+    </p:spTree>
+  </p:cSld>
+  <p:clrMapOvr>
+    <a:masterClrMapping/>
+  </p:clrMapOvr>
+</p:notes>
+</file>
+
+<file path=ppt/notesSlides/notesSlide45.xml><?xml version="1.0" encoding="utf-8"?>
+<p:notes xmlns:a="http://schemas.openxmlformats.org/drawingml/2006/main" xmlns:p="http://schemas.openxmlformats.org/presentationml/2006/main" xmlns:r="http://schemas.openxmlformats.org/officeDocument/2006/relationships">
+  <p:cSld>
+    <p:spTree>
+      <p:nvGrpSpPr>
+        <p:cNvPr id="1" name=""/>
+        <p:cNvGrpSpPr/>
+        <p:nvPr/>
+      </p:nvGrpSpPr>
+      <p:grpSpPr>
+        <a:xfrm>
+          <a:off x="0" y="0"/>
+          <a:ext cx="0" cy="0"/>
+          <a:chOff x="0" y="0"/>
+          <a:chExt cx="0" cy="0"/>
+        </a:xfrm>
+      </p:grpSpPr>
+      <p:sp>
+        <p:nvSpPr>
+          <p:cNvPr id="2" name="Slide Image Placeholder 1"/>
+          <p:cNvSpPr>
+            <a:spLocks noGrp="1"/>
+          </p:cNvSpPr>
+          <p:nvPr>
+            <p:ph type="sldImg" idx="2"/>
+          </p:nvPr>
+        </p:nvSpPr>
+        <p:spPr/>
+      </p:sp>
+      <p:sp>
+        <p:nvSpPr>
+          <p:cNvPr id="3" name="Notes Placeholder 2"/>
+          <p:cNvSpPr>
+            <a:spLocks noGrp="1"/>
+          </p:cNvSpPr>
+          <p:nvPr>
+            <p:ph type="body" idx="3" sz="quarter"/>
+          </p:nvPr>
+        </p:nvSpPr>
+        <p:spPr/>
+        <p:txBody>
+          <a:bodyPr/>
+          <a:lstStyle/>
+          <a:p>
+            <a:r>
+              <a:t>🎨 GÖRSELLEŞTİRME ÖNERİLERİ:</a:t>
+            </a:r>
+          </a:p>
+          <a:p/>
+          <a:p>
+            <a:r>
+              <a:t>📸 Görsel: CPU, RAM ve anakart fotoğrafları</a:t>
+            </a:r>
+          </a:p>
+          <a:p>
+            <a:r>
+              <a:t>🎬 Video: Bilgisayar donanımı tanıtım videosu (1-2 dk)</a:t>
+            </a:r>
+          </a:p>
+          <a:p>
+            <a:r>
+              <a:t>💡 İnfografik: Bilgisayar bileşenleri şeması</a:t>
+            </a:r>
+          </a:p>
+          <a:p>
+            <a:r>
+              <a:t>📸 Görsel: Scratch arayüzü ekran görüntüsü</a:t>
+            </a:r>
+          </a:p>
+          <a:p>
+            <a:r>
+              <a:t>🎬 Video: Scratch ile basit oyun yapımı (3-5 dk)</a:t>
+            </a:r>
+          </a:p>
+          <a:p>
+            <a:r>
+              <a:t>💡 Ekran kaydı: Adım adım Scratch projesi</a:t>
+            </a:r>
+          </a:p>
+          <a:p>
+            <a:r>
+              <a:t>📸 Görsel: Koşullu yapılar akış diyagramı</a:t>
+            </a:r>
+          </a:p>
+          <a:p>
+            <a:r>
+              <a:t>🎬 Video: Koşullu ifadeler Scratch'te</a:t>
+            </a:r>
+          </a:p>
+          <a:p>
+            <a:r>
+              <a:t>📸 Görsel: PowerPoint arayüzü ve araçları</a:t>
+            </a:r>
+          </a:p>
+          <a:p>
+            <a:r>
+              <a:t>🎬 Video: Etkili sunum hazırlama ipuçları</a:t>
+            </a:r>
+          </a:p>
+          <a:p>
+            <a:r>
+              <a:t>💡 Ekran kaydı: PowerPoint temel özellikler</a:t>
+            </a:r>
+          </a:p>
+        </p:txBody>
+      </p:sp>
+      <p:sp>
+        <p:nvSpPr>
+          <p:cNvPr id="4" name="Slide Number Placeholder 3"/>
+          <p:cNvSpPr>
+            <a:spLocks noGrp="1"/>
+          </p:cNvSpPr>
+          <p:nvPr>
+            <p:ph type="sldNum" idx="5" sz="quarter"/>
+          </p:nvPr>
+        </p:nvSpPr>
+        <p:spPr/>
+      </p:sp>
+    </p:spTree>
+  </p:cSld>
+  <p:clrMapOvr>
+    <a:masterClrMapping/>
+  </p:clrMapOvr>
+</p:notes>
+</file>
+
+<file path=ppt/notesSlides/notesSlide46.xml><?xml version="1.0" encoding="utf-8"?>
+<p:notes xmlns:a="http://schemas.openxmlformats.org/drawingml/2006/main" xmlns:p="http://schemas.openxmlformats.org/presentationml/2006/main" xmlns:r="http://schemas.openxmlformats.org/officeDocument/2006/relationships">
+  <p:cSld>
+    <p:spTree>
+      <p:nvGrpSpPr>
+        <p:cNvPr id="1" name=""/>
+        <p:cNvGrpSpPr/>
+        <p:nvPr/>
+      </p:nvGrpSpPr>
+      <p:grpSpPr>
+        <a:xfrm>
+          <a:off x="0" y="0"/>
+          <a:ext cx="0" cy="0"/>
+          <a:chOff x="0" y="0"/>
+          <a:chExt cx="0" cy="0"/>
+        </a:xfrm>
+      </p:grpSpPr>
+      <p:sp>
+        <p:nvSpPr>
+          <p:cNvPr id="2" name="Slide Image Placeholder 1"/>
+          <p:cNvSpPr>
+            <a:spLocks noGrp="1"/>
+          </p:cNvSpPr>
+          <p:nvPr>
+            <p:ph type="sldImg" idx="2"/>
+          </p:nvPr>
+        </p:nvSpPr>
+        <p:spPr/>
+      </p:sp>
+      <p:sp>
+        <p:nvSpPr>
+          <p:cNvPr id="3" name="Notes Placeholder 2"/>
+          <p:cNvSpPr>
+            <a:spLocks noGrp="1"/>
+          </p:cNvSpPr>
+          <p:nvPr>
+            <p:ph type="body" idx="3" sz="quarter"/>
+          </p:nvPr>
+        </p:nvSpPr>
+        <p:spPr/>
+        <p:txBody>
+          <a:bodyPr/>
+          <a:lstStyle/>
+          <a:p>
+            <a:r>
+              <a:t>🎨 GÖRSELLEŞTİRME ÖNERİLERİ:</a:t>
+            </a:r>
+          </a:p>
+          <a:p/>
+          <a:p>
+            <a:r>
+              <a:t>📸 Görsel: CPU, RAM ve anakart fotoğrafları</a:t>
+            </a:r>
+          </a:p>
+          <a:p>
+            <a:r>
+              <a:t>🎬 Video: Bilgisayar donanımı tanıtım videosu (1-2 dk)</a:t>
+            </a:r>
+          </a:p>
+          <a:p>
+            <a:r>
+              <a:t>💡 İnfografik: Bilgisayar bileşenleri şeması</a:t>
+            </a:r>
+          </a:p>
+          <a:p>
+            <a:r>
+              <a:t>📸 Görsel: Scratch arayüzü ekran görüntüsü</a:t>
+            </a:r>
+          </a:p>
+          <a:p>
+            <a:r>
+              <a:t>🎬 Video: Scratch ile basit oyun yapımı (3-5 dk)</a:t>
+            </a:r>
+          </a:p>
+          <a:p>
+            <a:r>
+              <a:t>💡 Ekran kaydı: Adım adım Scratch projesi</a:t>
+            </a:r>
+          </a:p>
+          <a:p>
+            <a:r>
+              <a:t>📸 Görsel: Temel tasarım prensipleri</a:t>
+            </a:r>
+          </a:p>
+          <a:p>
+            <a:r>
+              <a:t>🎬 Video: Dijital tasarıma giriş</a:t>
+            </a:r>
+          </a:p>
+          <a:p>
+            <a:r>
+              <a:t>💡 İnfografik: Renk teorisi ve uyumu</a:t>
+            </a:r>
+          </a:p>
+          <a:p>
+            <a:r>
+              <a:t>📸 Görsel: PowerPoint arayüzü ve araçları</a:t>
+            </a:r>
+          </a:p>
+          <a:p>
+            <a:r>
+              <a:t>🎬 Video: Etkili sunum hazırlama ipuçları</a:t>
+            </a:r>
+          </a:p>
+          <a:p>
+            <a:r>
+              <a:t>💡 Ekran kaydı: PowerPoint temel özellikler</a:t>
+            </a:r>
+          </a:p>
+        </p:txBody>
+      </p:sp>
+      <p:sp>
+        <p:nvSpPr>
+          <p:cNvPr id="4" name="Slide Number Placeholder 3"/>
+          <p:cNvSpPr>
+            <a:spLocks noGrp="1"/>
+          </p:cNvSpPr>
+          <p:nvPr>
+            <p:ph type="sldNum" idx="5" sz="quarter"/>
+          </p:nvPr>
+        </p:nvSpPr>
+        <p:spPr/>
+      </p:sp>
+    </p:spTree>
+  </p:cSld>
+  <p:clrMapOvr>
+    <a:masterClrMapping/>
+  </p:clrMapOvr>
+</p:notes>
+</file>
+
+<file path=ppt/notesSlides/notesSlide47.xml><?xml version="1.0" encoding="utf-8"?>
+<p:notes xmlns:a="http://schemas.openxmlformats.org/drawingml/2006/main" xmlns:p="http://schemas.openxmlformats.org/presentationml/2006/main" xmlns:r="http://schemas.openxmlformats.org/officeDocument/2006/relationships">
+  <p:cSld>
+    <p:spTree>
+      <p:nvGrpSpPr>
+        <p:cNvPr id="1" name=""/>
+        <p:cNvGrpSpPr/>
+        <p:nvPr/>
+      </p:nvGrpSpPr>
+      <p:grpSpPr>
+        <a:xfrm>
+          <a:off x="0" y="0"/>
+          <a:ext cx="0" cy="0"/>
+          <a:chOff x="0" y="0"/>
+          <a:chExt cx="0" cy="0"/>
+        </a:xfrm>
+      </p:grpSpPr>
+      <p:sp>
+        <p:nvSpPr>
+          <p:cNvPr id="2" name="Slide Image Placeholder 1"/>
+          <p:cNvSpPr>
+            <a:spLocks noGrp="1"/>
+          </p:cNvSpPr>
+          <p:nvPr>
+            <p:ph type="sldImg" idx="2"/>
+          </p:nvPr>
+        </p:nvSpPr>
+        <p:spPr/>
+      </p:sp>
+      <p:sp>
+        <p:nvSpPr>
+          <p:cNvPr id="3" name="Notes Placeholder 2"/>
+          <p:cNvSpPr>
+            <a:spLocks noGrp="1"/>
+          </p:cNvSpPr>
+          <p:nvPr>
+            <p:ph type="body" idx="3" sz="quarter"/>
+          </p:nvPr>
+        </p:nvSpPr>
+        <p:spPr/>
+        <p:txBody>
+          <a:bodyPr/>
+          <a:lstStyle/>
+          <a:p>
+            <a:r>
+              <a:t>🎨 GÖRSELLEŞTİRME ÖNERİLERİ:</a:t>
+            </a:r>
+          </a:p>
+          <a:p/>
+          <a:p>
+            <a:r>
+              <a:t>📸 Görsel: CPU, RAM ve anakart fotoğrafları</a:t>
+            </a:r>
+          </a:p>
+          <a:p>
+            <a:r>
+              <a:t>🎬 Video: Bilgisayar donanımı tanıtım videosu (1-2 dk)</a:t>
+            </a:r>
+          </a:p>
+          <a:p>
+            <a:r>
+              <a:t>💡 İnfografik: Bilgisayar bileşenleri şeması</a:t>
+            </a:r>
+          </a:p>
+          <a:p>
+            <a:r>
+              <a:t>📸 Görsel: LAN ve WAN ağ topolojileri şeması</a:t>
+            </a:r>
+          </a:p>
+          <a:p>
+            <a:r>
+              <a:t>🎬 Video: İnternet nasıl çalışır? Animasyonlu anlatım</a:t>
+            </a:r>
+          </a:p>
+          <a:p>
+            <a:r>
+              <a:t>💡 İnfografik: Ev ağı kurulumu diyagramı</a:t>
+            </a:r>
+          </a:p>
+          <a:p>
+            <a:r>
+              <a:t>📸 Görsel: Scratch arayüzü ekran görüntüsü</a:t>
+            </a:r>
+          </a:p>
+          <a:p>
+            <a:r>
+              <a:t>🎬 Video: Scratch ile basit oyun yapımı (3-5 dk)</a:t>
+            </a:r>
+          </a:p>
+          <a:p>
+            <a:r>
+              <a:t>💡 Ekran kaydı: Adım adım Scratch projesi</a:t>
+            </a:r>
+          </a:p>
+          <a:p>
+            <a:r>
+              <a:t>📸 Görsel: PowerPoint arayüzü ve araçları</a:t>
+            </a:r>
+          </a:p>
+          <a:p>
+            <a:r>
+              <a:t>🎬 Video: Etkili sunum hazırlama ipuçları</a:t>
+            </a:r>
+          </a:p>
+          <a:p>
+            <a:r>
+              <a:t>💡 Ekran kaydı: PowerPoint temel özellikler</a:t>
+            </a:r>
+          </a:p>
+        </p:txBody>
+      </p:sp>
+      <p:sp>
+        <p:nvSpPr>
+          <p:cNvPr id="4" name="Slide Number Placeholder 3"/>
+          <p:cNvSpPr>
+            <a:spLocks noGrp="1"/>
+          </p:cNvSpPr>
+          <p:nvPr>
+            <p:ph type="sldNum" idx="5" sz="quarter"/>
+          </p:nvPr>
+        </p:nvSpPr>
+        <p:spPr/>
+      </p:sp>
+    </p:spTree>
+  </p:cSld>
+  <p:clrMapOvr>
+    <a:masterClrMapping/>
+  </p:clrMapOvr>
+</p:notes>
+</file>
+
+<file path=ppt/notesSlides/notesSlide48.xml><?xml version="1.0" encoding="utf-8"?>
+<p:notes xmlns:a="http://schemas.openxmlformats.org/drawingml/2006/main" xmlns:p="http://schemas.openxmlformats.org/presentationml/2006/main" xmlns:r="http://schemas.openxmlformats.org/officeDocument/2006/relationships">
+  <p:cSld>
+    <p:spTree>
+      <p:nvGrpSpPr>
+        <p:cNvPr id="1" name=""/>
+        <p:cNvGrpSpPr/>
+        <p:nvPr/>
+      </p:nvGrpSpPr>
+      <p:grpSpPr>
+        <a:xfrm>
+          <a:off x="0" y="0"/>
+          <a:ext cx="0" cy="0"/>
+          <a:chOff x="0" y="0"/>
+          <a:chExt cx="0" cy="0"/>
+        </a:xfrm>
+      </p:grpSpPr>
+      <p:sp>
+        <p:nvSpPr>
+          <p:cNvPr id="2" name="Slide Image Placeholder 1"/>
+          <p:cNvSpPr>
+            <a:spLocks noGrp="1"/>
+          </p:cNvSpPr>
+          <p:nvPr>
+            <p:ph type="sldImg" idx="2"/>
+          </p:nvPr>
+        </p:nvSpPr>
+        <p:spPr/>
+      </p:sp>
+      <p:sp>
+        <p:nvSpPr>
+          <p:cNvPr id="3" name="Notes Placeholder 2"/>
+          <p:cNvSpPr>
+            <a:spLocks noGrp="1"/>
+          </p:cNvSpPr>
+          <p:nvPr>
+            <p:ph type="body" idx="3" sz="quarter"/>
+          </p:nvPr>
+        </p:nvSpPr>
+        <p:spPr/>
+        <p:txBody>
+          <a:bodyPr/>
+          <a:lstStyle/>
+          <a:p>
+            <a:r>
+              <a:t>🎨 GÖRSELLEŞTİRME ÖNERİLERİ:</a:t>
+            </a:r>
+          </a:p>
+          <a:p/>
+          <a:p>
+            <a:r>
+              <a:t>📸 Görsel: LAN ve WAN ağ topolojileri şeması</a:t>
+            </a:r>
+          </a:p>
+          <a:p>
+            <a:r>
+              <a:t>🎬 Video: İnternet nasıl çalışır? Animasyonlu anlatım</a:t>
+            </a:r>
+          </a:p>
+          <a:p>
+            <a:r>
+              <a:t>💡 İnfografik: Ev ağı kurulumu diyagramı</a:t>
+            </a:r>
+          </a:p>
+          <a:p>
+            <a:r>
+              <a:t>📸 Görsel: Telif hakları sembolleri (©, ®, ™)</a:t>
+            </a:r>
+          </a:p>
+          <a:p>
+            <a:r>
+              <a:t>🎬 Video: Dijital etik ve telif hakları</a:t>
+            </a:r>
+          </a:p>
+          <a:p>
+            <a:r>
+              <a:t>💡 İnfografik: Lisans türleri karşılaştırması</a:t>
+            </a:r>
+          </a:p>
+          <a:p>
+            <a:r>
+              <a:t>📸 Görsel: Koşullu yapılar akış diyagramı</a:t>
+            </a:r>
+          </a:p>
+          <a:p>
+            <a:r>
+              <a:t>🎬 Video: Koşullu ifadeler Scratch'te</a:t>
+            </a:r>
+          </a:p>
+          <a:p>
+            <a:r>
+              <a:t>📸 Görsel: Temel tasarım prensipleri</a:t>
+            </a:r>
+          </a:p>
+          <a:p>
+            <a:r>
+              <a:t>🎬 Video: Dijital tasarıma giriş</a:t>
+            </a:r>
+          </a:p>
+          <a:p>
+            <a:r>
+              <a:t>💡 İnfografik: Renk teorisi ve uyumu</a:t>
+            </a:r>
+          </a:p>
+          <a:p>
+            <a:r>
+              <a:t>📸 Görsel: PowerPoint arayüzü ve araçları</a:t>
+            </a:r>
+          </a:p>
+          <a:p>
+            <a:r>
+              <a:t>🎬 Video: Etkili sunum hazırlama ipuçları</a:t>
+            </a:r>
+          </a:p>
+          <a:p>
+            <a:r>
+              <a:t>💡 Ekran kaydı: PowerPoint temel özellikler</a:t>
+            </a:r>
+          </a:p>
+        </p:txBody>
+      </p:sp>
+      <p:sp>
+        <p:nvSpPr>
+          <p:cNvPr id="4" name="Slide Number Placeholder 3"/>
+          <p:cNvSpPr>
+            <a:spLocks noGrp="1"/>
+          </p:cNvSpPr>
+          <p:nvPr>
+            <p:ph type="sldNum" idx="5" sz="quarter"/>
+          </p:nvPr>
+        </p:nvSpPr>
+        <p:spPr/>
+      </p:sp>
+    </p:spTree>
+  </p:cSld>
+  <p:clrMapOvr>
+    <a:masterClrMapping/>
+  </p:clrMapOvr>
+</p:notes>
+</file>
+
+<file path=ppt/notesSlides/notesSlide49.xml><?xml version="1.0" encoding="utf-8"?>
+<p:notes xmlns:a="http://schemas.openxmlformats.org/drawingml/2006/main" xmlns:p="http://schemas.openxmlformats.org/presentationml/2006/main" xmlns:r="http://schemas.openxmlformats.org/officeDocument/2006/relationships">
+  <p:cSld>
+    <p:spTree>
+      <p:nvGrpSpPr>
+        <p:cNvPr id="1" name=""/>
+        <p:cNvGrpSpPr/>
+        <p:nvPr/>
+      </p:nvGrpSpPr>
+      <p:grpSpPr>
+        <a:xfrm>
+          <a:off x="0" y="0"/>
+          <a:ext cx="0" cy="0"/>
+          <a:chOff x="0" y="0"/>
+          <a:chExt cx="0" cy="0"/>
+        </a:xfrm>
+      </p:grpSpPr>
+      <p:sp>
+        <p:nvSpPr>
+          <p:cNvPr id="2" name="Slide Image Placeholder 1"/>
+          <p:cNvSpPr>
+            <a:spLocks noGrp="1"/>
+          </p:cNvSpPr>
+          <p:nvPr>
+            <p:ph type="sldImg" idx="2"/>
+          </p:nvPr>
+        </p:nvSpPr>
+        <p:spPr/>
+      </p:sp>
+      <p:sp>
+        <p:nvSpPr>
+          <p:cNvPr id="3" name="Notes Placeholder 2"/>
+          <p:cNvSpPr>
+            <a:spLocks noGrp="1"/>
+          </p:cNvSpPr>
+          <p:nvPr>
+            <p:ph type="body" idx="3" sz="quarter"/>
+          </p:nvPr>
+        </p:nvSpPr>
+        <p:spPr/>
+        <p:txBody>
+          <a:bodyPr/>
+          <a:lstStyle/>
+          <a:p>
+            <a:r>
+              <a:t>🎨 GÖRSELLEŞTİRME ÖNERİLERİ:</a:t>
+            </a:r>
+          </a:p>
+          <a:p/>
+          <a:p>
+            <a:r>
+              <a:t>📸 Görsel: LAN ve WAN ağ topolojileri şeması</a:t>
+            </a:r>
+          </a:p>
+          <a:p>
+            <a:r>
+              <a:t>🎬 Video: İnternet nasıl çalışır? Animasyonlu anlatım</a:t>
+            </a:r>
+          </a:p>
+          <a:p>
+            <a:r>
+              <a:t>💡 İnfografik: Ev ağı kurulumu diyagramı</a:t>
+            </a:r>
+          </a:p>
+          <a:p>
+            <a:r>
+              <a:t>📸 Görsel: Temel tasarım prensipleri</a:t>
+            </a:r>
+          </a:p>
+          <a:p>
+            <a:r>
+              <a:t>🎬 Video: Dijital tasarıma giriş</a:t>
+            </a:r>
+          </a:p>
+          <a:p>
+            <a:r>
+              <a:t>💡 İnfografik: Renk teorisi ve uyumu</a:t>
+            </a:r>
+          </a:p>
+          <a:p>
+            <a:r>
+              <a:t>📸 Görsel: PowerPoint arayüzü ve araçları</a:t>
+            </a:r>
+          </a:p>
+          <a:p>
+            <a:r>
+              <a:t>🎬 Video: Etkili sunum hazırlama ipuçları</a:t>
+            </a:r>
+          </a:p>
+          <a:p>
+            <a:r>
+              <a:t>💡 Ekran kaydı: PowerPoint temel özellikler</a:t>
             </a:r>
           </a:p>
         </p:txBody>
@@ -1254,7 +5868,392 @@
           <a:lstStyle/>
           <a:p>
             <a:r>
-              <a:t>Örnek: Ham veri verin, öğrenciler tablo haline getirsin</a:t>
+              <a:t>Etkinlik: Öğrencilere veri örnekleri verin, hangi türe ait olduklarını bulsunlar</a:t>
+            </a:r>
+          </a:p>
+          <a:p/>
+          <a:p>
+            <a:r>
+              <a:t>🎨 GÖRSELLEŞTİRME ÖNERİLERİ:</a:t>
+            </a:r>
+          </a:p>
+          <a:p/>
+          <a:p>
+            <a:r>
+              <a:t>📸 Görsel: LAN ve WAN ağ topolojileri şeması</a:t>
+            </a:r>
+          </a:p>
+          <a:p>
+            <a:r>
+              <a:t>🎬 Video: İnternet nasıl çalışır? Animasyonlu anlatım</a:t>
+            </a:r>
+          </a:p>
+          <a:p>
+            <a:r>
+              <a:t>💡 İnfografik: Ev ağı kurulumu diyagramı</a:t>
+            </a:r>
+          </a:p>
+          <a:p>
+            <a:r>
+              <a:t>📸 Görsel: Farklı grafik türleri örnekleri</a:t>
+            </a:r>
+          </a:p>
+          <a:p>
+            <a:r>
+              <a:t>🎬 Video: Veri görselleştirme önemi</a:t>
+            </a:r>
+          </a:p>
+          <a:p>
+            <a:r>
+              <a:t>💡 İnfografik: Grafik türleri ve kullanım alanları</a:t>
+            </a:r>
+          </a:p>
+          <a:p>
+            <a:r>
+              <a:t>📸 Görsel: Temel tasarım prensipleri</a:t>
+            </a:r>
+          </a:p>
+          <a:p>
+            <a:r>
+              <a:t>🎬 Video: Dijital tasarıma giriş</a:t>
+            </a:r>
+          </a:p>
+          <a:p>
+            <a:r>
+              <a:t>💡 İnfografik: Renk teorisi ve uyumu</a:t>
+            </a:r>
+          </a:p>
+        </p:txBody>
+      </p:sp>
+      <p:sp>
+        <p:nvSpPr>
+          <p:cNvPr id="4" name="Slide Number Placeholder 3"/>
+          <p:cNvSpPr>
+            <a:spLocks noGrp="1"/>
+          </p:cNvSpPr>
+          <p:nvPr>
+            <p:ph type="sldNum" idx="5" sz="quarter"/>
+          </p:nvPr>
+        </p:nvSpPr>
+        <p:spPr/>
+      </p:sp>
+    </p:spTree>
+  </p:cSld>
+  <p:clrMapOvr>
+    <a:masterClrMapping/>
+  </p:clrMapOvr>
+</p:notes>
+</file>
+
+<file path=ppt/notesSlides/notesSlide50.xml><?xml version="1.0" encoding="utf-8"?>
+<p:notes xmlns:a="http://schemas.openxmlformats.org/drawingml/2006/main" xmlns:p="http://schemas.openxmlformats.org/presentationml/2006/main" xmlns:r="http://schemas.openxmlformats.org/officeDocument/2006/relationships">
+  <p:cSld>
+    <p:spTree>
+      <p:nvGrpSpPr>
+        <p:cNvPr id="1" name=""/>
+        <p:cNvGrpSpPr/>
+        <p:nvPr/>
+      </p:nvGrpSpPr>
+      <p:grpSpPr>
+        <a:xfrm>
+          <a:off x="0" y="0"/>
+          <a:ext cx="0" cy="0"/>
+          <a:chOff x="0" y="0"/>
+          <a:chExt cx="0" cy="0"/>
+        </a:xfrm>
+      </p:grpSpPr>
+      <p:sp>
+        <p:nvSpPr>
+          <p:cNvPr id="2" name="Slide Image Placeholder 1"/>
+          <p:cNvSpPr>
+            <a:spLocks noGrp="1"/>
+          </p:cNvSpPr>
+          <p:nvPr>
+            <p:ph type="sldImg" idx="2"/>
+          </p:nvPr>
+        </p:nvSpPr>
+        <p:spPr/>
+      </p:sp>
+      <p:sp>
+        <p:nvSpPr>
+          <p:cNvPr id="3" name="Notes Placeholder 2"/>
+          <p:cNvSpPr>
+            <a:spLocks noGrp="1"/>
+          </p:cNvSpPr>
+          <p:nvPr>
+            <p:ph type="body" idx="3" sz="quarter"/>
+          </p:nvPr>
+        </p:nvSpPr>
+        <p:spPr/>
+        <p:txBody>
+          <a:bodyPr/>
+          <a:lstStyle/>
+          <a:p>
+            <a:r>
+              <a:t>🎨 GÖRSELLEŞTİRME ÖNERİLERİ:</a:t>
+            </a:r>
+          </a:p>
+          <a:p/>
+          <a:p>
+            <a:r>
+              <a:t>📸 Görsel: LAN ve WAN ağ topolojileri şeması</a:t>
+            </a:r>
+          </a:p>
+          <a:p>
+            <a:r>
+              <a:t>🎬 Video: İnternet nasıl çalışır? Animasyonlu anlatım</a:t>
+            </a:r>
+          </a:p>
+          <a:p>
+            <a:r>
+              <a:t>💡 İnfografik: Ev ağı kurulumu diyagramı</a:t>
+            </a:r>
+          </a:p>
+          <a:p>
+            <a:r>
+              <a:t>📸 Görsel: PowerPoint arayüzü ve araçları</a:t>
+            </a:r>
+          </a:p>
+          <a:p>
+            <a:r>
+              <a:t>🎬 Video: Etkili sunum hazırlama ipuçları</a:t>
+            </a:r>
+          </a:p>
+          <a:p>
+            <a:r>
+              <a:t>💡 Ekran kaydı: PowerPoint temel özellikler</a:t>
+            </a:r>
+          </a:p>
+        </p:txBody>
+      </p:sp>
+      <p:sp>
+        <p:nvSpPr>
+          <p:cNvPr id="4" name="Slide Number Placeholder 3"/>
+          <p:cNvSpPr>
+            <a:spLocks noGrp="1"/>
+          </p:cNvSpPr>
+          <p:nvPr>
+            <p:ph type="sldNum" idx="5" sz="quarter"/>
+          </p:nvPr>
+        </p:nvSpPr>
+        <p:spPr/>
+      </p:sp>
+    </p:spTree>
+  </p:cSld>
+  <p:clrMapOvr>
+    <a:masterClrMapping/>
+  </p:clrMapOvr>
+</p:notes>
+</file>
+
+<file path=ppt/notesSlides/notesSlide51.xml><?xml version="1.0" encoding="utf-8"?>
+<p:notes xmlns:a="http://schemas.openxmlformats.org/drawingml/2006/main" xmlns:p="http://schemas.openxmlformats.org/presentationml/2006/main" xmlns:r="http://schemas.openxmlformats.org/officeDocument/2006/relationships">
+  <p:cSld>
+    <p:spTree>
+      <p:nvGrpSpPr>
+        <p:cNvPr id="1" name=""/>
+        <p:cNvGrpSpPr/>
+        <p:nvPr/>
+      </p:nvGrpSpPr>
+      <p:grpSpPr>
+        <a:xfrm>
+          <a:off x="0" y="0"/>
+          <a:ext cx="0" cy="0"/>
+          <a:chOff x="0" y="0"/>
+          <a:chExt cx="0" cy="0"/>
+        </a:xfrm>
+      </p:grpSpPr>
+      <p:sp>
+        <p:nvSpPr>
+          <p:cNvPr id="2" name="Slide Image Placeholder 1"/>
+          <p:cNvSpPr>
+            <a:spLocks noGrp="1"/>
+          </p:cNvSpPr>
+          <p:nvPr>
+            <p:ph type="sldImg" idx="2"/>
+          </p:nvPr>
+        </p:nvSpPr>
+        <p:spPr/>
+      </p:sp>
+      <p:sp>
+        <p:nvSpPr>
+          <p:cNvPr id="3" name="Notes Placeholder 2"/>
+          <p:cNvSpPr>
+            <a:spLocks noGrp="1"/>
+          </p:cNvSpPr>
+          <p:nvPr>
+            <p:ph type="body" idx="3" sz="quarter"/>
+          </p:nvPr>
+        </p:nvSpPr>
+        <p:spPr/>
+        <p:txBody>
+          <a:bodyPr/>
+          <a:lstStyle/>
+          <a:p>
+            <a:r>
+              <a:t>🎨 GÖRSELLEŞTİRME ÖNERİLERİ:</a:t>
+            </a:r>
+          </a:p>
+          <a:p/>
+          <a:p>
+            <a:r>
+              <a:t>📸 Görsel: LAN ve WAN ağ topolojileri şeması</a:t>
+            </a:r>
+          </a:p>
+          <a:p>
+            <a:r>
+              <a:t>🎬 Video: İnternet nasıl çalışır? Animasyonlu anlatım</a:t>
+            </a:r>
+          </a:p>
+          <a:p>
+            <a:r>
+              <a:t>💡 İnfografik: Ev ağı kurulumu diyagramı</a:t>
+            </a:r>
+          </a:p>
+          <a:p>
+            <a:r>
+              <a:t>📸 Görsel: PowerPoint arayüzü ve araçları</a:t>
+            </a:r>
+          </a:p>
+          <a:p>
+            <a:r>
+              <a:t>🎬 Video: Etkili sunum hazırlama ipuçları</a:t>
+            </a:r>
+          </a:p>
+          <a:p>
+            <a:r>
+              <a:t>💡 Ekran kaydı: PowerPoint temel özellikler</a:t>
+            </a:r>
+          </a:p>
+        </p:txBody>
+      </p:sp>
+      <p:sp>
+        <p:nvSpPr>
+          <p:cNvPr id="4" name="Slide Number Placeholder 3"/>
+          <p:cNvSpPr>
+            <a:spLocks noGrp="1"/>
+          </p:cNvSpPr>
+          <p:nvPr>
+            <p:ph type="sldNum" idx="5" sz="quarter"/>
+          </p:nvPr>
+        </p:nvSpPr>
+        <p:spPr/>
+      </p:sp>
+    </p:spTree>
+  </p:cSld>
+  <p:clrMapOvr>
+    <a:masterClrMapping/>
+  </p:clrMapOvr>
+</p:notes>
+</file>
+
+<file path=ppt/notesSlides/notesSlide52.xml><?xml version="1.0" encoding="utf-8"?>
+<p:notes xmlns:a="http://schemas.openxmlformats.org/drawingml/2006/main" xmlns:p="http://schemas.openxmlformats.org/presentationml/2006/main" xmlns:r="http://schemas.openxmlformats.org/officeDocument/2006/relationships">
+  <p:cSld>
+    <p:spTree>
+      <p:nvGrpSpPr>
+        <p:cNvPr id="1" name=""/>
+        <p:cNvGrpSpPr/>
+        <p:nvPr/>
+      </p:nvGrpSpPr>
+      <p:grpSpPr>
+        <a:xfrm>
+          <a:off x="0" y="0"/>
+          <a:ext cx="0" cy="0"/>
+          <a:chOff x="0" y="0"/>
+          <a:chExt cx="0" cy="0"/>
+        </a:xfrm>
+      </p:grpSpPr>
+      <p:sp>
+        <p:nvSpPr>
+          <p:cNvPr id="2" name="Slide Image Placeholder 1"/>
+          <p:cNvSpPr>
+            <a:spLocks noGrp="1"/>
+          </p:cNvSpPr>
+          <p:nvPr>
+            <p:ph type="sldImg" idx="2"/>
+          </p:nvPr>
+        </p:nvSpPr>
+        <p:spPr/>
+      </p:sp>
+      <p:sp>
+        <p:nvSpPr>
+          <p:cNvPr id="3" name="Notes Placeholder 2"/>
+          <p:cNvSpPr>
+            <a:spLocks noGrp="1"/>
+          </p:cNvSpPr>
+          <p:nvPr>
+            <p:ph type="body" idx="3" sz="quarter"/>
+          </p:nvPr>
+        </p:nvSpPr>
+        <p:spPr/>
+        <p:txBody>
+          <a:bodyPr/>
+          <a:lstStyle/>
+          <a:p>
+            <a:r>
+              <a:t>🎨 GÖRSELLEŞTİRME ÖNERİLERİ:</a:t>
+            </a:r>
+          </a:p>
+          <a:p/>
+          <a:p>
+            <a:r>
+              <a:t>📸 Görsel: CPU, RAM ve anakart fotoğrafları</a:t>
+            </a:r>
+          </a:p>
+          <a:p>
+            <a:r>
+              <a:t>🎬 Video: Bilgisayar donanımı tanıtım videosu (1-2 dk)</a:t>
+            </a:r>
+          </a:p>
+          <a:p>
+            <a:r>
+              <a:t>💡 İnfografik: Bilgisayar bileşenleri şeması</a:t>
+            </a:r>
+          </a:p>
+          <a:p>
+            <a:r>
+              <a:t>📸 Görsel: Scratch arayüzü ekran görüntüsü</a:t>
+            </a:r>
+          </a:p>
+          <a:p>
+            <a:r>
+              <a:t>🎬 Video: Scratch ile basit oyun yapımı (3-5 dk)</a:t>
+            </a:r>
+          </a:p>
+          <a:p>
+            <a:r>
+              <a:t>💡 Ekran kaydı: Adım adım Scratch projesi</a:t>
+            </a:r>
+          </a:p>
+          <a:p>
+            <a:r>
+              <a:t>📸 Görsel: Temel tasarım prensipleri</a:t>
+            </a:r>
+          </a:p>
+          <a:p>
+            <a:r>
+              <a:t>🎬 Video: Dijital tasarıma giriş</a:t>
+            </a:r>
+          </a:p>
+          <a:p>
+            <a:r>
+              <a:t>💡 İnfografik: Renk teorisi ve uyumu</a:t>
+            </a:r>
+          </a:p>
+          <a:p>
+            <a:r>
+              <a:t>📸 Görsel: PowerPoint arayüzü ve araçları</a:t>
+            </a:r>
+          </a:p>
+          <a:p>
+            <a:r>
+              <a:t>🎬 Video: Etkili sunum hazırlama ipuçları</a:t>
+            </a:r>
+          </a:p>
+          <a:p>
+            <a:r>
+              <a:t>💡 Ekran kaydı: PowerPoint temel özellikler</a:t>
             </a:r>
           </a:p>
         </p:txBody>
@@ -1324,7 +6323,69 @@
           <a:lstStyle/>
           <a:p>
             <a:r>
-              <a:t>Görsel: Her grafik türünden örnek gösterin</a:t>
+              <a:t>Örnek: Ham veri verin, öğrenciler tablo haline getirsin</a:t>
+            </a:r>
+          </a:p>
+          <a:p/>
+          <a:p>
+            <a:r>
+              <a:t>🎨 GÖRSELLEŞTİRME ÖNERİLERİ:</a:t>
+            </a:r>
+          </a:p>
+          <a:p/>
+          <a:p>
+            <a:r>
+              <a:t>📸 Görsel: LAN ve WAN ağ topolojileri şeması</a:t>
+            </a:r>
+          </a:p>
+          <a:p>
+            <a:r>
+              <a:t>🎬 Video: İnternet nasıl çalışır? Animasyonlu anlatım</a:t>
+            </a:r>
+          </a:p>
+          <a:p>
+            <a:r>
+              <a:t>💡 İnfografik: Ev ağı kurulumu diyagramı</a:t>
+            </a:r>
+          </a:p>
+          <a:p>
+            <a:r>
+              <a:t>📸 Görsel: Akış şeması örnekleri</a:t>
+            </a:r>
+          </a:p>
+          <a:p>
+            <a:r>
+              <a:t>🎬 Video: Algoritma nedir? Günlük hayattan örnekler</a:t>
+            </a:r>
+          </a:p>
+          <a:p>
+            <a:r>
+              <a:t>💡 İnfografik: Akış şeması sembolleri</a:t>
+            </a:r>
+          </a:p>
+          <a:p>
+            <a:r>
+              <a:t>📸 Görsel: Döngü mantığı şeması</a:t>
+            </a:r>
+          </a:p>
+          <a:p>
+            <a:r>
+              <a:t>🎬 Video: Döngüler Scratch'te nasıl kullanılır?</a:t>
+            </a:r>
+          </a:p>
+          <a:p>
+            <a:r>
+              <a:t>📸 Görsel: Farklı grafik türleri örnekleri</a:t>
+            </a:r>
+          </a:p>
+          <a:p>
+            <a:r>
+              <a:t>🎬 Video: Veri görselleştirme önemi</a:t>
+            </a:r>
+          </a:p>
+          <a:p>
+            <a:r>
+              <a:t>💡 İnfografik: Grafik türleri ve kullanım alanları</a:t>
             </a:r>
           </a:p>
         </p:txBody>
@@ -1394,7 +6455,69 @@
           <a:lstStyle/>
           <a:p>
             <a:r>
-              <a:t>Etkinlik: İyi ve kötü grafik örnekleri gösterin, farkları tartışın</a:t>
+              <a:t>Görsel: Her grafik türünden örnek gösterin</a:t>
+            </a:r>
+          </a:p>
+          <a:p/>
+          <a:p>
+            <a:r>
+              <a:t>🎨 GÖRSELLEŞTİRME ÖNERİLERİ:</a:t>
+            </a:r>
+          </a:p>
+          <a:p/>
+          <a:p>
+            <a:r>
+              <a:t>📸 Görsel: CPU, RAM ve anakart fotoğrafları</a:t>
+            </a:r>
+          </a:p>
+          <a:p>
+            <a:r>
+              <a:t>🎬 Video: Bilgisayar donanımı tanıtım videosu (1-2 dk)</a:t>
+            </a:r>
+          </a:p>
+          <a:p>
+            <a:r>
+              <a:t>💡 İnfografik: Bilgisayar bileşenleri şeması</a:t>
+            </a:r>
+          </a:p>
+          <a:p>
+            <a:r>
+              <a:t>📸 Görsel: LAN ve WAN ağ topolojileri şeması</a:t>
+            </a:r>
+          </a:p>
+          <a:p>
+            <a:r>
+              <a:t>🎬 Video: İnternet nasıl çalışır? Animasyonlu anlatım</a:t>
+            </a:r>
+          </a:p>
+          <a:p>
+            <a:r>
+              <a:t>💡 İnfografik: Ev ağı kurulumu diyagramı</a:t>
+            </a:r>
+          </a:p>
+          <a:p>
+            <a:r>
+              <a:t>📸 Görsel: Değişken kavramı görselleştirmesi</a:t>
+            </a:r>
+          </a:p>
+          <a:p>
+            <a:r>
+              <a:t>🎬 Video: Scratch'te değişken kullanımı</a:t>
+            </a:r>
+          </a:p>
+          <a:p>
+            <a:r>
+              <a:t>📸 Görsel: Farklı grafik türleri örnekleri</a:t>
+            </a:r>
+          </a:p>
+          <a:p>
+            <a:r>
+              <a:t>🎬 Video: Veri görselleştirme önemi</a:t>
+            </a:r>
+          </a:p>
+          <a:p>
+            <a:r>
+              <a:t>💡 İnfografik: Grafik türleri ve kullanım alanları</a:t>
             </a:r>
           </a:p>
         </p:txBody>
@@ -1464,7 +6587,74 @@
           <a:lstStyle/>
           <a:p>
             <a:r>
-              <a:t>Gösterim: Excel/Sheets açın, basit tablo oluşturun</a:t>
+              <a:t>Etkinlik: İyi ve kötü grafik örnekleri gösterin, farkları tartışın</a:t>
+            </a:r>
+          </a:p>
+          <a:p/>
+          <a:p>
+            <a:r>
+              <a:t>🎨 GÖRSELLEŞTİRME ÖNERİLERİ:</a:t>
+            </a:r>
+          </a:p>
+          <a:p/>
+          <a:p>
+            <a:r>
+              <a:t>📸 Görsel: LAN ve WAN ağ topolojileri şeması</a:t>
+            </a:r>
+          </a:p>
+          <a:p>
+            <a:r>
+              <a:t>🎬 Video: İnternet nasıl çalışır? Animasyonlu anlatım</a:t>
+            </a:r>
+          </a:p>
+          <a:p>
+            <a:r>
+              <a:t>💡 İnfografik: Ev ağı kurulumu diyagramı</a:t>
+            </a:r>
+          </a:p>
+          <a:p>
+            <a:r>
+              <a:t>📸 Görsel: Scratch arayüzü ekran görüntüsü</a:t>
+            </a:r>
+          </a:p>
+          <a:p>
+            <a:r>
+              <a:t>🎬 Video: Scratch ile basit oyun yapımı (3-5 dk)</a:t>
+            </a:r>
+          </a:p>
+          <a:p>
+            <a:r>
+              <a:t>💡 Ekran kaydı: Adım adım Scratch projesi</a:t>
+            </a:r>
+          </a:p>
+          <a:p>
+            <a:r>
+              <a:t>📸 Görsel: Farklı grafik türleri örnekleri</a:t>
+            </a:r>
+          </a:p>
+          <a:p>
+            <a:r>
+              <a:t>🎬 Video: Veri görselleştirme önemi</a:t>
+            </a:r>
+          </a:p>
+          <a:p>
+            <a:r>
+              <a:t>💡 İnfografik: Grafik türleri ve kullanım alanları</a:t>
+            </a:r>
+          </a:p>
+          <a:p>
+            <a:r>
+              <a:t>📸 Görsel: Temel tasarım prensipleri</a:t>
+            </a:r>
+          </a:p>
+          <a:p>
+            <a:r>
+              <a:t>🎬 Video: Dijital tasarıma giriş</a:t>
+            </a:r>
+          </a:p>
+          <a:p>
+            <a:r>
+              <a:t>💡 İnfografik: Renk teorisi ve uyumu</a:t>
             </a:r>
           </a:p>
         </p:txBody>
@@ -1534,7 +6724,119 @@
           <a:lstStyle/>
           <a:p>
             <a:r>
-              <a:t>Etkinlik: Öğrencilere Excel'de formül yazdırın</a:t>
+              <a:t>Gösterim: Excel/Sheets açın, basit tablo oluşturun</a:t>
+            </a:r>
+          </a:p>
+          <a:p/>
+          <a:p>
+            <a:r>
+              <a:t>🎨 GÖRSELLEŞTİRME ÖNERİLERİ:</a:t>
+            </a:r>
+          </a:p>
+          <a:p/>
+          <a:p>
+            <a:r>
+              <a:t>📸 Görsel: CPU, RAM ve anakart fotoğrafları</a:t>
+            </a:r>
+          </a:p>
+          <a:p>
+            <a:r>
+              <a:t>🎬 Video: Bilgisayar donanımı tanıtım videosu (1-2 dk)</a:t>
+            </a:r>
+          </a:p>
+          <a:p>
+            <a:r>
+              <a:t>💡 İnfografik: Bilgisayar bileşenleri şeması</a:t>
+            </a:r>
+          </a:p>
+          <a:p>
+            <a:r>
+              <a:t>📸 Görsel: LAN ve WAN ağ topolojileri şeması</a:t>
+            </a:r>
+          </a:p>
+          <a:p>
+            <a:r>
+              <a:t>🎬 Video: İnternet nasıl çalışır? Animasyonlu anlatım</a:t>
+            </a:r>
+          </a:p>
+          <a:p>
+            <a:r>
+              <a:t>💡 İnfografik: Ev ağı kurulumu diyagramı</a:t>
+            </a:r>
+          </a:p>
+          <a:p>
+            <a:r>
+              <a:t>📸 Görsel: Scratch arayüzü ekran görüntüsü</a:t>
+            </a:r>
+          </a:p>
+          <a:p>
+            <a:r>
+              <a:t>🎬 Video: Scratch ile basit oyun yapımı (3-5 dk)</a:t>
+            </a:r>
+          </a:p>
+          <a:p>
+            <a:r>
+              <a:t>💡 Ekran kaydı: Adım adım Scratch projesi</a:t>
+            </a:r>
+          </a:p>
+          <a:p>
+            <a:r>
+              <a:t>📸 Görsel: Akış şeması örnekleri</a:t>
+            </a:r>
+          </a:p>
+          <a:p>
+            <a:r>
+              <a:t>🎬 Video: Algoritma nedir? Günlük hayattan örnekler</a:t>
+            </a:r>
+          </a:p>
+          <a:p>
+            <a:r>
+              <a:t>💡 İnfografik: Akış şeması sembolleri</a:t>
+            </a:r>
+          </a:p>
+          <a:p>
+            <a:r>
+              <a:t>📸 Görsel: Farklı grafik türleri örnekleri</a:t>
+            </a:r>
+          </a:p>
+          <a:p>
+            <a:r>
+              <a:t>🎬 Video: Veri görselleştirme önemi</a:t>
+            </a:r>
+          </a:p>
+          <a:p>
+            <a:r>
+              <a:t>💡 İnfografik: Grafik türleri ve kullanım alanları</a:t>
+            </a:r>
+          </a:p>
+          <a:p>
+            <a:r>
+              <a:t>📸 Görsel: Excel arayüzü ekran görüntüsü</a:t>
+            </a:r>
+          </a:p>
+          <a:p>
+            <a:r>
+              <a:t>🎬 Video: Excel temel işlemler (2-3 dk)</a:t>
+            </a:r>
+          </a:p>
+          <a:p>
+            <a:r>
+              <a:t>💡 Ekran kaydı: Formül kullanımı demo</a:t>
+            </a:r>
+          </a:p>
+          <a:p>
+            <a:r>
+              <a:t>📸 Görsel: Temel tasarım prensipleri</a:t>
+            </a:r>
+          </a:p>
+          <a:p>
+            <a:r>
+              <a:t>🎬 Video: Dijital tasarıma giriş</a:t>
+            </a:r>
+          </a:p>
+          <a:p>
+            <a:r>
+              <a:t>💡 İnfografik: Renk teorisi ve uyumu</a:t>
             </a:r>
           </a:p>
         </p:txBody>
@@ -4697,6 +9999,7 @@
                 <a:defRPr sz="2000"/>
               </a:pPr>
               <a:r>
+                <a:rPr sz="1400"/>
                 <a:t>Tablolama programları veri için çok kullanışlı!</a:t>
               </a:r>
             </a:p>
@@ -4716,6 +10019,7 @@
                 <a:defRPr sz="2000" b="1"/>
               </a:pPr>
               <a:r>
+                <a:rPr sz="1400"/>
                 <a:t>✅ Temel Kavramlar:</a:t>
               </a:r>
             </a:p>
@@ -4727,6 +10031,7 @@
                 <a:defRPr sz="1800"/>
               </a:pPr>
               <a:r>
+                <a:rPr sz="1400"/>
                 <a:t>    • Hücre: Tek bir veri kutusu (A1, B2)</a:t>
               </a:r>
             </a:p>
@@ -4738,6 +10043,7 @@
                 <a:defRPr sz="1800"/>
               </a:pPr>
               <a:r>
+                <a:rPr sz="1400"/>
                 <a:t>    • Satır: Yatay</a:t>
               </a:r>
             </a:p>
@@ -4749,6 +10055,7 @@
                 <a:defRPr sz="1800"/>
               </a:pPr>
               <a:r>
+                <a:rPr sz="1400"/>
                 <a:t>    • Sütun: Dikey</a:t>
               </a:r>
             </a:p>
@@ -4760,6 +10067,7 @@
                 <a:defRPr sz="1800"/>
               </a:pPr>
               <a:r>
+                <a:rPr sz="1400"/>
                 <a:t>    • Formül: Hesaplamalar</a:t>
               </a:r>
             </a:p>
@@ -4779,6 +10087,7 @@
                 <a:defRPr sz="2000" b="1"/>
               </a:pPr>
               <a:r>
+                <a:rPr sz="1400"/>
                 <a:t>📌 Tablo Oluşturma Adımları:</a:t>
               </a:r>
             </a:p>
@@ -4798,6 +10107,7 @@
                 <a:defRPr sz="2000"/>
               </a:pPr>
               <a:r>
+                <a:rPr sz="1400"/>
                 <a:t>1️⃣ Başlıkları Yaz:</a:t>
               </a:r>
             </a:p>
@@ -4809,6 +10119,7 @@
                 <a:defRPr sz="1800"/>
               </a:pPr>
               <a:r>
+                <a:rPr sz="1400"/>
                 <a:t>    • İlk satıra sütun adları</a:t>
               </a:r>
             </a:p>
@@ -4828,6 +10139,7 @@
                 <a:defRPr sz="2000"/>
               </a:pPr>
               <a:r>
+                <a:rPr sz="1400"/>
                 <a:t>2️⃣ Verileri Gir:</a:t>
               </a:r>
             </a:p>
@@ -4839,6 +10151,7 @@
                 <a:defRPr sz="1800"/>
               </a:pPr>
               <a:r>
+                <a:rPr sz="1400"/>
                 <a:t>    • Her satıra bir kayıt</a:t>
               </a:r>
             </a:p>
@@ -4858,6 +10171,7 @@
                 <a:defRPr sz="2000"/>
               </a:pPr>
               <a:r>
+                <a:rPr sz="1400"/>
                 <a:t>3️⃣ Biçimlendir:</a:t>
               </a:r>
             </a:p>
@@ -4869,6 +10183,7 @@
                 <a:defRPr sz="1800"/>
               </a:pPr>
               <a:r>
+                <a:rPr sz="1400"/>
                 <a:t>    • Kalın başlıklar</a:t>
               </a:r>
             </a:p>
@@ -4880,6 +10195,7 @@
                 <a:defRPr sz="1800"/>
               </a:pPr>
               <a:r>
+                <a:rPr sz="1400"/>
                 <a:t>    • Kenarlıklar ekle</a:t>
               </a:r>
             </a:p>
@@ -4891,6 +10207,7 @@
                 <a:defRPr sz="1800"/>
               </a:pPr>
               <a:r>
+                <a:rPr sz="1400"/>
                 <a:t>    • Renkler kullan</a:t>
               </a:r>
             </a:p>
@@ -4910,6 +10227,7 @@
                 <a:defRPr sz="2000"/>
               </a:pPr>
               <a:r>
+                <a:rPr sz="1400"/>
                 <a:t>4️⃣ Sırala:</a:t>
               </a:r>
             </a:p>
@@ -4921,6 +10239,7 @@
                 <a:defRPr sz="1800"/>
               </a:pPr>
               <a:r>
+                <a:rPr sz="1400"/>
                 <a:t>    • Veri → Sırala</a:t>
               </a:r>
             </a:p>
@@ -4940,6 +10259,7 @@
                 <a:defRPr sz="2000"/>
               </a:pPr>
               <a:r>
+                <a:rPr sz="1400"/>
                 <a:t>5️⃣ Filtrele:</a:t>
               </a:r>
             </a:p>
@@ -4951,6 +10271,7 @@
                 <a:defRPr sz="1800"/>
               </a:pPr>
               <a:r>
+                <a:rPr sz="1400"/>
                 <a:t>    • Belirli verileri göster</a:t>
               </a:r>
             </a:p>
@@ -4970,6 +10291,7 @@
                 <a:defRPr sz="2000" b="1"/>
               </a:pPr>
               <a:r>
+                <a:rPr sz="1400"/>
                 <a:t>💡 Kısayollar:</a:t>
               </a:r>
             </a:p>
@@ -4981,6 +10303,7 @@
                 <a:defRPr sz="1800"/>
               </a:pPr>
               <a:r>
+                <a:rPr sz="1400"/>
                 <a:t>    • Ctrl+C: Kopyala</a:t>
               </a:r>
             </a:p>
@@ -4992,6 +10315,7 @@
                 <a:defRPr sz="1800"/>
               </a:pPr>
               <a:r>
+                <a:rPr sz="1400"/>
                 <a:t>    • Ctrl+V: Yapıştır</a:t>
               </a:r>
             </a:p>
@@ -5003,6 +10327,7 @@
                 <a:defRPr sz="1800"/>
               </a:pPr>
               <a:r>
+                <a:rPr sz="1400"/>
                 <a:t>    • Ctrl+Z: Geri al</a:t>
               </a:r>
             </a:p>
@@ -5107,6 +10432,7 @@
                 <a:defRPr sz="2000"/>
               </a:pPr>
               <a:r>
+                <a:rPr sz="1600"/>
                 <a:t>Excel'de otomatik hesaplama!</a:t>
               </a:r>
             </a:p>
@@ -5126,6 +10452,7 @@
                 <a:defRPr sz="2000" b="1"/>
               </a:pPr>
               <a:r>
+                <a:rPr sz="1600"/>
                 <a:t>✅ Temel Formüller:</a:t>
               </a:r>
             </a:p>
@@ -5145,6 +10472,7 @@
                 <a:defRPr sz="2000"/>
               </a:pPr>
               <a:r>
+                <a:rPr sz="1600"/>
                 <a:t>➕ Toplama:</a:t>
               </a:r>
             </a:p>
@@ -5156,6 +10484,7 @@
                 <a:defRPr sz="1800"/>
               </a:pPr>
               <a:r>
+                <a:rPr sz="1600"/>
                 <a:t>    • =A1+B1</a:t>
               </a:r>
             </a:p>
@@ -5167,6 +10496,7 @@
                 <a:defRPr sz="1800"/>
               </a:pPr>
               <a:r>
+                <a:rPr sz="1600"/>
                 <a:t>    • =SUM(A1:A10) → A1'den A10'a kadar topla</a:t>
               </a:r>
             </a:p>
@@ -5186,6 +10516,7 @@
                 <a:defRPr sz="2000"/>
               </a:pPr>
               <a:r>
+                <a:rPr sz="1600"/>
                 <a:t>➗ Ortalama:</a:t>
               </a:r>
             </a:p>
@@ -5197,6 +10528,7 @@
                 <a:defRPr sz="1800"/>
               </a:pPr>
               <a:r>
+                <a:rPr sz="1600"/>
                 <a:t>    • =AVERAGE(A1:A10)</a:t>
               </a:r>
             </a:p>
@@ -5216,6 +10548,7 @@
                 <a:defRPr sz="2000"/>
               </a:pPr>
               <a:r>
+                <a:rPr sz="1600"/>
                 <a:t>🔢 Sayma:</a:t>
               </a:r>
             </a:p>
@@ -5227,6 +10560,7 @@
                 <a:defRPr sz="1800"/>
               </a:pPr>
               <a:r>
+                <a:rPr sz="1600"/>
                 <a:t>    • =COUNT(A1:A10) → Kaç sayı var?</a:t>
               </a:r>
             </a:p>
@@ -5246,6 +10580,7 @@
                 <a:defRPr sz="2000"/>
               </a:pPr>
               <a:r>
+                <a:rPr sz="1600"/>
                 <a:t>📊 En Büyük/Küçük:</a:t>
               </a:r>
             </a:p>
@@ -5257,6 +10592,7 @@
                 <a:defRPr sz="1800"/>
               </a:pPr>
               <a:r>
+                <a:rPr sz="1600"/>
                 <a:t>    • =MAX(A1:A10)</a:t>
               </a:r>
             </a:p>
@@ -5268,6 +10604,7 @@
                 <a:defRPr sz="1800"/>
               </a:pPr>
               <a:r>
+                <a:rPr sz="1600"/>
                 <a:t>    • =MIN(A1:A10)</a:t>
               </a:r>
             </a:p>
@@ -5287,6 +10624,7 @@
                 <a:defRPr sz="2000" b="1"/>
               </a:pPr>
               <a:r>
+                <a:rPr sz="1600"/>
                 <a:t>📌 Formül Yazma Kuralları:</a:t>
               </a:r>
             </a:p>
@@ -5298,6 +10636,7 @@
                 <a:defRPr sz="1800"/>
               </a:pPr>
               <a:r>
+                <a:rPr sz="1600"/>
                 <a:t>    • '=' ile başla</a:t>
               </a:r>
             </a:p>
@@ -5309,6 +10648,7 @@
                 <a:defRPr sz="1800"/>
               </a:pPr>
               <a:r>
+                <a:rPr sz="1600"/>
                 <a:t>    • Hücre adreslerini kullan (A1, B2)</a:t>
               </a:r>
             </a:p>
@@ -5320,6 +10660,7 @@
                 <a:defRPr sz="1800"/>
               </a:pPr>
               <a:r>
+                <a:rPr sz="1600"/>
                 <a:t>    • Operatörler: +, -, *, /</a:t>
               </a:r>
             </a:p>
@@ -5339,6 +10680,7 @@
                 <a:defRPr sz="2000" b="1"/>
               </a:pPr>
               <a:r>
+                <a:rPr sz="1600"/>
                 <a:t>💡 Örnek: Not Ortalaması</a:t>
               </a:r>
             </a:p>
@@ -5350,6 +10692,7 @@
                 <a:defRPr sz="2000"/>
               </a:pPr>
               <a:r>
+                <a:rPr sz="1600"/>
                 <a:t>| Ders       | Not |</a:t>
               </a:r>
             </a:p>
@@ -5361,6 +10704,7 @@
                 <a:defRPr sz="2000"/>
               </a:pPr>
               <a:r>
+                <a:rPr sz="1600"/>
                 <a:t>| Matematik  | 85  |</a:t>
               </a:r>
             </a:p>
@@ -5372,6 +10716,7 @@
                 <a:defRPr sz="2000"/>
               </a:pPr>
               <a:r>
+                <a:rPr sz="1600"/>
                 <a:t>| Türkçe     | 90  |</a:t>
               </a:r>
             </a:p>
@@ -5383,6 +10728,7 @@
                 <a:defRPr sz="2000"/>
               </a:pPr>
               <a:r>
+                <a:rPr sz="1600"/>
                 <a:t>| Fen        | 78  |</a:t>
               </a:r>
             </a:p>
@@ -5394,6 +10740,7 @@
                 <a:defRPr sz="2000"/>
               </a:pPr>
               <a:r>
+                <a:rPr sz="1600"/>
                 <a:t>| Ortalama   | =AVERAGE(B2:B4) |</a:t>
               </a:r>
             </a:p>
@@ -5498,6 +10845,7 @@
                 <a:defRPr sz="2000"/>
               </a:pPr>
               <a:r>
+                <a:rPr sz="1400"/>
                 <a:t>Tablodan grafik yapmak çok kolay!</a:t>
               </a:r>
             </a:p>
@@ -5517,6 +10865,7 @@
                 <a:defRPr sz="2000" b="1"/>
               </a:pPr>
               <a:r>
+                <a:rPr sz="1400"/>
                 <a:t>✅ Grafik Oluşturma Adımları:</a:t>
               </a:r>
             </a:p>
@@ -5536,6 +10885,7 @@
                 <a:defRPr sz="2000"/>
               </a:pPr>
               <a:r>
+                <a:rPr sz="1400"/>
                 <a:t>1️⃣ Veriyi Seç:</a:t>
               </a:r>
             </a:p>
@@ -5547,6 +10897,7 @@
                 <a:defRPr sz="1800"/>
               </a:pPr>
               <a:r>
+                <a:rPr sz="1400"/>
                 <a:t>    • Grafik yapılacak hücreleri seç</a:t>
               </a:r>
             </a:p>
@@ -5566,6 +10917,7 @@
                 <a:defRPr sz="2000"/>
               </a:pPr>
               <a:r>
+                <a:rPr sz="1400"/>
                 <a:t>2️⃣ Ekle → Grafik:</a:t>
               </a:r>
             </a:p>
@@ -5577,6 +10929,7 @@
                 <a:defRPr sz="1800"/>
               </a:pPr>
               <a:r>
+                <a:rPr sz="1400"/>
                 <a:t>    • Excel: Insert → Chart</a:t>
               </a:r>
             </a:p>
@@ -5588,6 +10941,7 @@
                 <a:defRPr sz="1800"/>
               </a:pPr>
               <a:r>
+                <a:rPr sz="1400"/>
                 <a:t>    • Sheets: Insert → Chart</a:t>
               </a:r>
             </a:p>
@@ -5607,6 +10961,7 @@
                 <a:defRPr sz="2000"/>
               </a:pPr>
               <a:r>
+                <a:rPr sz="1400"/>
                 <a:t>3️⃣ Grafik Türünü Seç:</a:t>
               </a:r>
             </a:p>
@@ -5618,6 +10973,7 @@
                 <a:defRPr sz="1800"/>
               </a:pPr>
               <a:r>
+                <a:rPr sz="1400"/>
                 <a:t>    • Sütun, Çizgi, Pasta...</a:t>
               </a:r>
             </a:p>
@@ -5637,6 +10993,7 @@
                 <a:defRPr sz="2000"/>
               </a:pPr>
               <a:r>
+                <a:rPr sz="1400"/>
                 <a:t>4️⃣ Özelleştir:</a:t>
               </a:r>
             </a:p>
@@ -5648,6 +11005,7 @@
                 <a:defRPr sz="1800"/>
               </a:pPr>
               <a:r>
+                <a:rPr sz="1400"/>
                 <a:t>    • Başlık ekle</a:t>
               </a:r>
             </a:p>
@@ -5659,6 +11017,7 @@
                 <a:defRPr sz="1800"/>
               </a:pPr>
               <a:r>
+                <a:rPr sz="1400"/>
                 <a:t>    • Renkleri değiştir</a:t>
               </a:r>
             </a:p>
@@ -5670,6 +11029,7 @@
                 <a:defRPr sz="1800"/>
               </a:pPr>
               <a:r>
+                <a:rPr sz="1400"/>
                 <a:t>    • Eksen etiketleri</a:t>
               </a:r>
             </a:p>
@@ -5689,6 +11049,7 @@
                 <a:defRPr sz="2000"/>
               </a:pPr>
               <a:r>
+                <a:rPr sz="1400"/>
                 <a:t>5️⃣ Kaydet/Paylaş:</a:t>
               </a:r>
             </a:p>
@@ -5700,6 +11061,7 @@
                 <a:defRPr sz="1800"/>
               </a:pPr>
               <a:r>
+                <a:rPr sz="1400"/>
                 <a:t>    • Resim olarak kaydet</a:t>
               </a:r>
             </a:p>
@@ -5711,6 +11073,7 @@
                 <a:defRPr sz="1800"/>
               </a:pPr>
               <a:r>
+                <a:rPr sz="1400"/>
                 <a:t>    • Sunuma ekle</a:t>
               </a:r>
             </a:p>
@@ -5730,6 +11093,7 @@
                 <a:defRPr sz="2000" b="1"/>
               </a:pPr>
               <a:r>
+                <a:rPr sz="1400"/>
                 <a:t>📌 Örnek: Aylık Sıcaklık Grafiği</a:t>
               </a:r>
             </a:p>
@@ -5741,6 +11105,7 @@
                 <a:defRPr sz="2000"/>
               </a:pPr>
               <a:r>
+                <a:rPr sz="1400"/>
                 <a:t>| Ay      | Sıcaklık |</a:t>
               </a:r>
             </a:p>
@@ -5752,6 +11117,7 @@
                 <a:defRPr sz="2000"/>
               </a:pPr>
               <a:r>
+                <a:rPr sz="1400"/>
                 <a:t>| Ocak    | 5°C      |</a:t>
               </a:r>
             </a:p>
@@ -5763,6 +11129,7 @@
                 <a:defRPr sz="2000"/>
               </a:pPr>
               <a:r>
+                <a:rPr sz="1400"/>
                 <a:t>| Şubat   | 7°C      |</a:t>
               </a:r>
             </a:p>
@@ -5774,6 +11141,7 @@
                 <a:defRPr sz="2000"/>
               </a:pPr>
               <a:r>
+                <a:rPr sz="1400"/>
                 <a:t>| Mart    | 12°C     |</a:t>
               </a:r>
             </a:p>
@@ -5785,6 +11153,7 @@
                 <a:defRPr sz="2000"/>
               </a:pPr>
               <a:r>
+                <a:rPr sz="1400"/>
                 <a:t>→ Çizgi grafiği yap</a:t>
               </a:r>
             </a:p>
@@ -5889,6 +11258,7 @@
                 <a:defRPr sz="2000"/>
               </a:pPr>
               <a:r>
+                <a:rPr sz="1400"/>
                 <a:t>Veriyi inceleyip sonuç çıkarmak</a:t>
               </a:r>
             </a:p>
@@ -5908,6 +11278,7 @@
                 <a:defRPr sz="2000" b="1"/>
               </a:pPr>
               <a:r>
+                <a:rPr sz="1400"/>
                 <a:t>✅ Analiz Soruları:</a:t>
               </a:r>
             </a:p>
@@ -5919,6 +11290,7 @@
                 <a:defRPr sz="1800"/>
               </a:pPr>
               <a:r>
+                <a:rPr sz="1400"/>
                 <a:t>    • En yüksek değer nedir?</a:t>
               </a:r>
             </a:p>
@@ -5930,6 +11302,7 @@
                 <a:defRPr sz="1800"/>
               </a:pPr>
               <a:r>
+                <a:rPr sz="1400"/>
                 <a:t>    • En düşük değer nedir?</a:t>
               </a:r>
             </a:p>
@@ -5941,6 +11314,7 @@
                 <a:defRPr sz="1800"/>
               </a:pPr>
               <a:r>
+                <a:rPr sz="1400"/>
                 <a:t>    • Ortalama nedir?</a:t>
               </a:r>
             </a:p>
@@ -5952,6 +11326,7 @@
                 <a:defRPr sz="1800"/>
               </a:pPr>
               <a:r>
+                <a:rPr sz="1400"/>
                 <a:t>    • Bir kalıp var mı?</a:t>
               </a:r>
             </a:p>
@@ -5963,6 +11338,7 @@
                 <a:defRPr sz="1800"/>
               </a:pPr>
               <a:r>
+                <a:rPr sz="1400"/>
                 <a:t>    • İlişki var mı?</a:t>
               </a:r>
             </a:p>
@@ -5982,6 +11358,7 @@
                 <a:defRPr sz="2000" b="1"/>
               </a:pPr>
               <a:r>
+                <a:rPr sz="1400"/>
                 <a:t>📌 Merkezi Eğilim Ölçüleri:</a:t>
               </a:r>
             </a:p>
@@ -6001,6 +11378,7 @@
                 <a:defRPr sz="2000"/>
               </a:pPr>
               <a:r>
+                <a:rPr sz="1400"/>
                 <a:t>📊 Ortalama (Mean):</a:t>
               </a:r>
             </a:p>
@@ -6012,6 +11390,7 @@
                 <a:defRPr sz="1800"/>
               </a:pPr>
               <a:r>
+                <a:rPr sz="1400"/>
                 <a:t>    • Tüm değerleri topla, sayıya böl</a:t>
               </a:r>
             </a:p>
@@ -6023,6 +11402,7 @@
                 <a:defRPr sz="1800"/>
               </a:pPr>
               <a:r>
+                <a:rPr sz="1400"/>
                 <a:t>    • Örnek: (10+20+30)/3 = 20</a:t>
               </a:r>
             </a:p>
@@ -6042,6 +11422,7 @@
                 <a:defRPr sz="2000"/>
               </a:pPr>
               <a:r>
+                <a:rPr sz="1400"/>
                 <a:t>📊 Medyan (Median):</a:t>
               </a:r>
             </a:p>
@@ -6053,6 +11434,7 @@
                 <a:defRPr sz="1800"/>
               </a:pPr>
               <a:r>
+                <a:rPr sz="1400"/>
                 <a:t>    • Ortadaki değer</a:t>
               </a:r>
             </a:p>
@@ -6064,6 +11446,7 @@
                 <a:defRPr sz="1800"/>
               </a:pPr>
               <a:r>
+                <a:rPr sz="1400"/>
                 <a:t>    • Örnek: 10, 15, 20 → Medyan: 15</a:t>
               </a:r>
             </a:p>
@@ -6083,6 +11466,7 @@
                 <a:defRPr sz="2000"/>
               </a:pPr>
               <a:r>
+                <a:rPr sz="1400"/>
                 <a:t>📊 Mod (Mode):</a:t>
               </a:r>
             </a:p>
@@ -6094,6 +11478,7 @@
                 <a:defRPr sz="1800"/>
               </a:pPr>
               <a:r>
+                <a:rPr sz="1400"/>
                 <a:t>    • En çok tekrar eden</a:t>
               </a:r>
             </a:p>
@@ -6105,6 +11490,7 @@
                 <a:defRPr sz="1800"/>
               </a:pPr>
               <a:r>
+                <a:rPr sz="1400"/>
                 <a:t>    • Örnek: 5, 5, 7, 9 → Mod: 5</a:t>
               </a:r>
             </a:p>
@@ -6124,6 +11510,7 @@
                 <a:defRPr sz="2000" b="1"/>
               </a:pPr>
               <a:r>
+                <a:rPr sz="1400"/>
                 <a:t>💡 Hangisini Kullan?</a:t>
               </a:r>
             </a:p>
@@ -6135,6 +11522,7 @@
                 <a:defRPr sz="1800"/>
               </a:pPr>
               <a:r>
+                <a:rPr sz="1400"/>
                 <a:t>    • Genelde → Ortalama</a:t>
               </a:r>
             </a:p>
@@ -6146,6 +11534,7 @@
                 <a:defRPr sz="1800"/>
               </a:pPr>
               <a:r>
+                <a:rPr sz="1400"/>
                 <a:t>    • Aşırı değerler varsa → Medyan</a:t>
               </a:r>
             </a:p>
@@ -6157,6 +11546,7 @@
                 <a:defRPr sz="1800"/>
               </a:pPr>
               <a:r>
+                <a:rPr sz="1400"/>
                 <a:t>    • Sıklık önemliyse → Mod</a:t>
               </a:r>
             </a:p>
@@ -6261,6 +11651,7 @@
                 <a:defRPr sz="2000"/>
               </a:pPr>
               <a:r>
+                <a:rPr sz="1400"/>
                 <a:t>Veriye dayalı kararlar daha sağlıklı!</a:t>
               </a:r>
             </a:p>
@@ -6280,6 +11671,7 @@
                 <a:defRPr sz="2000" b="1"/>
               </a:pPr>
               <a:r>
+                <a:rPr sz="1400"/>
                 <a:t>✅ Veri Odaklı Karar Örneği:</a:t>
               </a:r>
             </a:p>
@@ -6299,6 +11691,7 @@
                 <a:defRPr sz="2000" b="1"/>
               </a:pPr>
               <a:r>
+                <a:rPr sz="1400"/>
                 <a:t>📌 Problem:</a:t>
               </a:r>
             </a:p>
@@ -6310,6 +11703,7 @@
                 <a:defRPr sz="2000"/>
               </a:pPr>
               <a:r>
+                <a:rPr sz="1400"/>
                 <a:t>Okul kütüphanesine hangi kitapları alalım?</a:t>
               </a:r>
             </a:p>
@@ -6329,6 +11723,7 @@
                 <a:defRPr sz="2000"/>
               </a:pPr>
               <a:r>
+                <a:rPr sz="1400"/>
                 <a:t>📊 Veri Toplama:</a:t>
               </a:r>
             </a:p>
@@ -6340,6 +11735,7 @@
                 <a:defRPr sz="1800"/>
               </a:pPr>
               <a:r>
+                <a:rPr sz="1400"/>
                 <a:t>    • Anket: En sevilen kitap türü?</a:t>
               </a:r>
             </a:p>
@@ -6351,6 +11747,7 @@
                 <a:defRPr sz="1800"/>
               </a:pPr>
               <a:r>
+                <a:rPr sz="1400"/>
                 <a:t>    • Gözlem: Hangi kitaplar çok ödünç alınıyor?</a:t>
               </a:r>
             </a:p>
@@ -6362,6 +11759,7 @@
                 <a:defRPr sz="1800"/>
               </a:pPr>
               <a:r>
+                <a:rPr sz="1400"/>
                 <a:t>    • Kayıt: Rafta eksik ne var?</a:t>
               </a:r>
             </a:p>
@@ -6381,6 +11779,7 @@
                 <a:defRPr sz="2000"/>
               </a:pPr>
               <a:r>
+                <a:rPr sz="1400"/>
                 <a:t>📈 Analiz:</a:t>
               </a:r>
             </a:p>
@@ -6392,6 +11791,7 @@
                 <a:defRPr sz="1800"/>
               </a:pPr>
               <a:r>
+                <a:rPr sz="1400"/>
                 <a:t>    • %40 macera</a:t>
               </a:r>
             </a:p>
@@ -6403,6 +11803,7 @@
                 <a:defRPr sz="1800"/>
               </a:pPr>
               <a:r>
+                <a:rPr sz="1400"/>
                 <a:t>    • %30 bilim kurgu</a:t>
               </a:r>
             </a:p>
@@ -6414,6 +11815,7 @@
                 <a:defRPr sz="1800"/>
               </a:pPr>
               <a:r>
+                <a:rPr sz="1400"/>
                 <a:t>    • %20 roman</a:t>
               </a:r>
             </a:p>
@@ -6425,6 +11827,7 @@
                 <a:defRPr sz="1800"/>
               </a:pPr>
               <a:r>
+                <a:rPr sz="1400"/>
                 <a:t>    • %10 diğer</a:t>
               </a:r>
             </a:p>
@@ -6444,6 +11847,7 @@
                 <a:defRPr sz="2000" b="1"/>
               </a:pPr>
               <a:r>
+                <a:rPr sz="1400"/>
                 <a:t>✅ Karar:</a:t>
               </a:r>
             </a:p>
@@ -6455,6 +11859,7 @@
                 <a:defRPr sz="2000"/>
               </a:pPr>
               <a:r>
+                <a:rPr sz="1400"/>
                 <a:t>Yeni kitapların %40'ı macera olsun!</a:t>
               </a:r>
             </a:p>
@@ -6474,6 +11879,7 @@
                 <a:defRPr sz="2000" b="1"/>
               </a:pPr>
               <a:r>
+                <a:rPr sz="1400"/>
                 <a:t>💡 Veriye dayalı karar:</a:t>
               </a:r>
             </a:p>
@@ -6485,6 +11891,7 @@
                 <a:defRPr sz="1800"/>
               </a:pPr>
               <a:r>
+                <a:rPr sz="1400"/>
                 <a:t>    • Objektif (tarafsız)</a:t>
               </a:r>
             </a:p>
@@ -6496,6 +11903,7 @@
                 <a:defRPr sz="1800"/>
               </a:pPr>
               <a:r>
+                <a:rPr sz="1400"/>
                 <a:t>    • Kanıta dayalı</a:t>
               </a:r>
             </a:p>
@@ -6507,6 +11915,7 @@
                 <a:defRPr sz="1800"/>
               </a:pPr>
               <a:r>
+                <a:rPr sz="1400"/>
                 <a:t>    • Savunulabilir</a:t>
               </a:r>
             </a:p>
@@ -6526,6 +11935,7 @@
                 <a:defRPr sz="2000"/>
               </a:pPr>
               <a:r>
+                <a:rPr sz="1400"/>
                 <a:t>⚠️ Dikkat:</a:t>
               </a:r>
             </a:p>
@@ -6537,6 +11947,7 @@
                 <a:defRPr sz="2000"/>
               </a:pPr>
               <a:r>
+                <a:rPr sz="1400"/>
                 <a:t>Veri yanlış veya eksikse, karar da yanlış olur!</a:t>
               </a:r>
             </a:p>
@@ -6641,6 +12052,7 @@
                 <a:defRPr sz="2000"/>
               </a:pPr>
               <a:r>
+                <a:rPr sz="1400"/>
                 <a:t>Veri toplarken/paylaşırken dikkatli ol!</a:t>
               </a:r>
             </a:p>
@@ -6660,6 +12072,7 @@
                 <a:defRPr sz="2000" b="1"/>
               </a:pPr>
               <a:r>
+                <a:rPr sz="1400"/>
                 <a:t>✅ Kişisel Veri Nedir?</a:t>
               </a:r>
             </a:p>
@@ -6671,6 +12084,7 @@
                 <a:defRPr sz="1800"/>
               </a:pPr>
               <a:r>
+                <a:rPr sz="1400"/>
                 <a:t>    • İsim, soyisim</a:t>
               </a:r>
             </a:p>
@@ -6682,6 +12096,7 @@
                 <a:defRPr sz="1800"/>
               </a:pPr>
               <a:r>
+                <a:rPr sz="1400"/>
                 <a:t>    • Doğum tarihi</a:t>
               </a:r>
             </a:p>
@@ -6693,6 +12108,7 @@
                 <a:defRPr sz="1800"/>
               </a:pPr>
               <a:r>
+                <a:rPr sz="1400"/>
                 <a:t>    • Adres, telefon</a:t>
               </a:r>
             </a:p>
@@ -6704,6 +12120,7 @@
                 <a:defRPr sz="1800"/>
               </a:pPr>
               <a:r>
+                <a:rPr sz="1400"/>
                 <a:t>    • Fotoğraflar</a:t>
               </a:r>
             </a:p>
@@ -6715,6 +12132,7 @@
                 <a:defRPr sz="1800"/>
               </a:pPr>
               <a:r>
+                <a:rPr sz="1400"/>
                 <a:t>    • Sağlık bilgileri</a:t>
               </a:r>
             </a:p>
@@ -6734,6 +12152,7 @@
                 <a:defRPr sz="2000" b="1"/>
               </a:pPr>
               <a:r>
+                <a:rPr sz="1400"/>
                 <a:t>📌 Veri Toplama Etik Kuralları:</a:t>
               </a:r>
             </a:p>
@@ -6753,6 +12172,7 @@
                 <a:defRPr sz="2000"/>
               </a:pPr>
               <a:r>
+                <a:rPr sz="1400"/>
                 <a:t>🔐 İzin Al:</a:t>
               </a:r>
             </a:p>
@@ -6764,6 +12184,7 @@
                 <a:defRPr sz="1800"/>
               </a:pPr>
               <a:r>
+                <a:rPr sz="1400"/>
                 <a:t>    • Kişilere sor, onay al</a:t>
               </a:r>
             </a:p>
@@ -6783,6 +12204,7 @@
                 <a:defRPr sz="2000"/>
               </a:pPr>
               <a:r>
+                <a:rPr sz="1400"/>
                 <a:t>🔒 Gizli Tut:</a:t>
               </a:r>
             </a:p>
@@ -6794,6 +12216,7 @@
                 <a:defRPr sz="1800"/>
               </a:pPr>
               <a:r>
+                <a:rPr sz="1400"/>
                 <a:t>    • Kişisel verileri paylaşma</a:t>
               </a:r>
             </a:p>
@@ -6813,6 +12236,7 @@
                 <a:defRPr sz="2000"/>
               </a:pPr>
               <a:r>
+                <a:rPr sz="1400"/>
                 <a:t>📊 Anonim Yap:</a:t>
               </a:r>
             </a:p>
@@ -6824,6 +12248,7 @@
                 <a:defRPr sz="1800"/>
               </a:pPr>
               <a:r>
+                <a:rPr sz="1400"/>
                 <a:t>    • İsim kullanma, genel göster</a:t>
               </a:r>
             </a:p>
@@ -6835,6 +12260,7 @@
                 <a:defRPr sz="1800"/>
               </a:pPr>
               <a:r>
+                <a:rPr sz="1400"/>
                 <a:t>    • Örnek: 'Öğrenci 1, Öğrenci 2'</a:t>
               </a:r>
             </a:p>
@@ -6854,6 +12280,7 @@
                 <a:defRPr sz="2000" b="1"/>
               </a:pPr>
               <a:r>
+                <a:rPr sz="1400"/>
                 <a:t>🎯 Amacını Belirt:</a:t>
               </a:r>
             </a:p>
@@ -6865,6 +12292,7 @@
                 <a:defRPr sz="1800"/>
               </a:pPr>
               <a:r>
+                <a:rPr sz="1400"/>
                 <a:t>    • Veri ne için kullanılacak?</a:t>
               </a:r>
             </a:p>
@@ -6884,6 +12312,7 @@
                 <a:defRPr sz="2000"/>
               </a:pPr>
               <a:r>
+                <a:rPr sz="1400"/>
                 <a:t>🗑️ Gereksiz Veri Toplama:</a:t>
               </a:r>
             </a:p>
@@ -6895,6 +12324,7 @@
                 <a:defRPr sz="1800"/>
               </a:pPr>
               <a:r>
+                <a:rPr sz="1400"/>
                 <a:t>    • Sadece gerekli veriyi topla</a:t>
               </a:r>
             </a:p>
@@ -6914,6 +12344,7 @@
                 <a:defRPr sz="2000" b="1"/>
               </a:pPr>
               <a:r>
+                <a:rPr sz="1400"/>
                 <a:t>💡 KVKK (Kişisel Verilerin Korunması Kanunu):</a:t>
               </a:r>
             </a:p>
@@ -6925,6 +12356,7 @@
                 <a:defRPr sz="2000"/>
               </a:pPr>
               <a:r>
+                <a:rPr sz="1400"/>
                 <a:t>Türkiye'de veri güvenliğini koruyan yasa</a:t>
               </a:r>
             </a:p>
@@ -7029,6 +12461,7 @@
                 <a:defRPr sz="2000"/>
               </a:pPr>
               <a:r>
+                <a:rPr sz="1400"/>
                 <a:t>Bu ünitede neler öğrendik?</a:t>
               </a:r>
             </a:p>
@@ -7048,6 +12481,7 @@
                 <a:defRPr sz="2000" b="1"/>
               </a:pPr>
               <a:r>
+                <a:rPr sz="1400"/>
                 <a:t>✅ Veri ve bilgi kavramları</a:t>
               </a:r>
             </a:p>
@@ -7059,6 +12493,7 @@
                 <a:defRPr sz="2000" b="1"/>
               </a:pPr>
               <a:r>
+                <a:rPr sz="1400"/>
                 <a:t>✅ Veri toplama yöntemleri (anket, gözlem, deney)</a:t>
               </a:r>
             </a:p>
@@ -7070,6 +12505,7 @@
                 <a:defRPr sz="2000" b="1"/>
               </a:pPr>
               <a:r>
+                <a:rPr sz="1400"/>
                 <a:t>✅ Veri türleri (sayısal, kategorik)</a:t>
               </a:r>
             </a:p>
@@ -7081,6 +12517,7 @@
                 <a:defRPr sz="2000" b="1"/>
               </a:pPr>
               <a:r>
+                <a:rPr sz="1400"/>
                 <a:t>✅ Veri düzenleme ve sıralama</a:t>
               </a:r>
             </a:p>
@@ -7092,6 +12529,7 @@
                 <a:defRPr sz="2000" b="1"/>
               </a:pPr>
               <a:r>
+                <a:rPr sz="1400"/>
                 <a:t>✅ Grafik türleri (sütun, çizgi, pasta)</a:t>
               </a:r>
             </a:p>
@@ -7103,6 +12541,7 @@
                 <a:defRPr sz="2000" b="1"/>
               </a:pPr>
               <a:r>
+                <a:rPr sz="1400"/>
                 <a:t>✅ Veri görselleştirme</a:t>
               </a:r>
             </a:p>
@@ -7114,6 +12553,7 @@
                 <a:defRPr sz="2000" b="1"/>
               </a:pPr>
               <a:r>
+                <a:rPr sz="1400"/>
                 <a:t>✅ Excel/Sheets ile tablo oluşturma</a:t>
               </a:r>
             </a:p>
@@ -7125,6 +12565,7 @@
                 <a:defRPr sz="2000" b="1"/>
               </a:pPr>
               <a:r>
+                <a:rPr sz="1400"/>
                 <a:t>✅ Formüller ve fonksiyonlar</a:t>
               </a:r>
             </a:p>
@@ -7136,6 +12577,7 @@
                 <a:defRPr sz="2000" b="1"/>
               </a:pPr>
               <a:r>
+                <a:rPr sz="1400"/>
                 <a:t>✅ Grafik oluşturma</a:t>
               </a:r>
             </a:p>
@@ -7147,6 +12589,7 @@
                 <a:defRPr sz="2000" b="1"/>
               </a:pPr>
               <a:r>
+                <a:rPr sz="1400"/>
                 <a:t>✅ Veri analizi (ortalama, medyan, mod)</a:t>
               </a:r>
             </a:p>
@@ -7158,6 +12601,7 @@
                 <a:defRPr sz="2000" b="1"/>
               </a:pPr>
               <a:r>
+                <a:rPr sz="1400"/>
                 <a:t>✅ Veriye dayalı karar verme</a:t>
               </a:r>
             </a:p>
@@ -7169,6 +12613,7 @@
                 <a:defRPr sz="2000" b="1"/>
               </a:pPr>
               <a:r>
+                <a:rPr sz="1400"/>
                 <a:t>✅ Veri güvenliği ve gizlilik</a:t>
               </a:r>
             </a:p>
@@ -7188,6 +12633,7 @@
                 <a:defRPr sz="2000" b="1"/>
               </a:pPr>
               <a:r>
+                <a:rPr sz="1400"/>
                 <a:t>💡 Anahtar Mesaj:</a:t>
               </a:r>
             </a:p>
@@ -7199,6 +12645,7 @@
                 <a:defRPr sz="2000"/>
               </a:pPr>
               <a:r>
+                <a:rPr sz="1400"/>
                 <a:t>Veri doğru analiz edilirse değerli bilgi haline gelir!</a:t>
               </a:r>
             </a:p>
@@ -7218,6 +12665,7 @@
                 <a:defRPr sz="2000" b="1"/>
               </a:pPr>
               <a:r>
+                <a:rPr sz="1400"/>
                 <a:t>🎯 Artık veri analisti gibi düşünebilirsin!</a:t>
               </a:r>
             </a:p>
@@ -7229,6 +12677,7 @@
                 <a:defRPr sz="2000"/>
               </a:pPr>
               <a:r>
+                <a:rPr sz="1400"/>
                 <a:t>📊 Veriyle dünyayı anlayabilirsin!</a:t>
               </a:r>
             </a:p>
@@ -8121,6 +13570,7 @@
                 <a:defRPr sz="1900"/>
               </a:pPr>
               <a:r>
+                <a:rPr sz="1600"/>
                 <a:t>Kelime işlemci = Metin belgesi oluşturma programı</a:t>
               </a:r>
             </a:p>
@@ -8140,6 +13590,7 @@
                 <a:defRPr sz="1900"/>
               </a:pPr>
               <a:r>
+                <a:rPr sz="1600"/>
                 <a:t>✅ Popüler Kelime İşlemciler:</a:t>
               </a:r>
             </a:p>
@@ -8151,6 +13602,7 @@
                 <a:defRPr sz="1700"/>
               </a:pPr>
               <a:r>
+                <a:rPr sz="1600"/>
                 <a:t>    • Microsoft Word (ücretli)</a:t>
               </a:r>
             </a:p>
@@ -8162,6 +13614,7 @@
                 <a:defRPr sz="1700"/>
               </a:pPr>
               <a:r>
+                <a:rPr sz="1600"/>
                 <a:t>    • Google Docs (ücretsiz, online)</a:t>
               </a:r>
             </a:p>
@@ -8173,6 +13626,7 @@
                 <a:defRPr sz="1700"/>
               </a:pPr>
               <a:r>
+                <a:rPr sz="1600"/>
                 <a:t>    • LibreOffice Writer (ücretsiz)</a:t>
               </a:r>
             </a:p>
@@ -8184,6 +13638,7 @@
                 <a:defRPr sz="1700"/>
               </a:pPr>
               <a:r>
+                <a:rPr sz="1600"/>
                 <a:t>    • Pages (Apple)</a:t>
               </a:r>
             </a:p>
@@ -8203,6 +13658,7 @@
                 <a:defRPr sz="1900"/>
               </a:pPr>
               <a:r>
+                <a:rPr sz="1600"/>
                 <a:t>📌 Ne İçin Kullanılır?</a:t>
               </a:r>
             </a:p>
@@ -8214,6 +13670,7 @@
                 <a:defRPr sz="1700"/>
               </a:pPr>
               <a:r>
+                <a:rPr sz="1600"/>
                 <a:t>    • Ödev yazmak</a:t>
               </a:r>
             </a:p>
@@ -8225,6 +13682,7 @@
                 <a:defRPr sz="1700"/>
               </a:pPr>
               <a:r>
+                <a:rPr sz="1600"/>
                 <a:t>    • Rapor hazırlamak</a:t>
               </a:r>
             </a:p>
@@ -8236,6 +13694,7 @@
                 <a:defRPr sz="1700"/>
               </a:pPr>
               <a:r>
+                <a:rPr sz="1600"/>
                 <a:t>    • Mektup yazmak</a:t>
               </a:r>
             </a:p>
@@ -8247,6 +13706,7 @@
                 <a:defRPr sz="1700"/>
               </a:pPr>
               <a:r>
+                <a:rPr sz="1600"/>
                 <a:t>    • Poster tasarlamak</a:t>
               </a:r>
             </a:p>
@@ -8266,6 +13726,7 @@
                 <a:defRPr sz="1900"/>
               </a:pPr>
               <a:r>
+                <a:rPr sz="1600"/>
                 <a:t>💡 Avantajları:</a:t>
               </a:r>
             </a:p>
@@ -8277,6 +13738,7 @@
                 <a:defRPr sz="1700"/>
               </a:pPr>
               <a:r>
+                <a:rPr sz="1600"/>
                 <a:t>    • Düzenleme kolay</a:t>
               </a:r>
             </a:p>
@@ -8288,6 +13750,7 @@
                 <a:defRPr sz="1700"/>
               </a:pPr>
               <a:r>
+                <a:rPr sz="1600"/>
                 <a:t>    • Yazım hatalarını bulur</a:t>
               </a:r>
             </a:p>
@@ -8299,6 +13762,7 @@
                 <a:defRPr sz="1700"/>
               </a:pPr>
               <a:r>
+                <a:rPr sz="1600"/>
                 <a:t>    • Güzel görünüm</a:t>
               </a:r>
             </a:p>
@@ -8310,6 +13774,7 @@
                 <a:defRPr sz="1700"/>
               </a:pPr>
               <a:r>
+                <a:rPr sz="1600"/>
                 <a:t>    • Yazdırma/paylaşma kolay</a:t>
               </a:r>
             </a:p>
@@ -9043,6 +14508,7 @@
                 <a:defRPr sz="1900"/>
               </a:pPr>
               <a:r>
+                <a:rPr sz="1600"/>
                 <a:t>Belgeye görsel katmak</a:t>
               </a:r>
             </a:p>
@@ -9062,6 +14528,7 @@
                 <a:defRPr sz="1900"/>
               </a:pPr>
               <a:r>
+                <a:rPr sz="1600"/>
                 <a:t>✅ Resim Ekleme:</a:t>
               </a:r>
             </a:p>
@@ -9073,6 +14540,7 @@
                 <a:defRPr sz="1700"/>
               </a:pPr>
               <a:r>
+                <a:rPr sz="1600"/>
                 <a:t>    • Ekle → Resim</a:t>
               </a:r>
             </a:p>
@@ -9084,6 +14552,7 @@
                 <a:defRPr sz="1700"/>
               </a:pPr>
               <a:r>
+                <a:rPr sz="1600"/>
                 <a:t>    • Bilgisayardan yükle</a:t>
               </a:r>
             </a:p>
@@ -9095,6 +14564,7 @@
                 <a:defRPr sz="1700"/>
               </a:pPr>
               <a:r>
+                <a:rPr sz="1600"/>
                 <a:t>    • İnternetten ara (dikkat: telif!)</a:t>
               </a:r>
             </a:p>
@@ -9114,6 +14584,7 @@
                 <a:defRPr sz="1900"/>
               </a:pPr>
               <a:r>
+                <a:rPr sz="1600"/>
                 <a:t>✅ Resim Düzenleme:</a:t>
               </a:r>
             </a:p>
@@ -9125,6 +14596,7 @@
                 <a:defRPr sz="1700"/>
               </a:pPr>
               <a:r>
+                <a:rPr sz="1600"/>
                 <a:t>    • Boyutlandır</a:t>
               </a:r>
             </a:p>
@@ -9136,6 +14608,7 @@
                 <a:defRPr sz="1700"/>
               </a:pPr>
               <a:r>
+                <a:rPr sz="1600"/>
                 <a:t>    • Kırp</a:t>
               </a:r>
             </a:p>
@@ -9147,6 +14620,7 @@
                 <a:defRPr sz="1700"/>
               </a:pPr>
               <a:r>
+                <a:rPr sz="1600"/>
                 <a:t>    • Metin sarma (çevreleme)</a:t>
               </a:r>
             </a:p>
@@ -9166,6 +14640,7 @@
                 <a:defRPr sz="1900"/>
               </a:pPr>
               <a:r>
+                <a:rPr sz="1600"/>
                 <a:t>✅ Şekiller:</a:t>
               </a:r>
             </a:p>
@@ -9177,6 +14652,7 @@
                 <a:defRPr sz="1700"/>
               </a:pPr>
               <a:r>
+                <a:rPr sz="1600"/>
                 <a:t>    • Dikdörtgen, daire, ok</a:t>
               </a:r>
             </a:p>
@@ -9188,6 +14664,7 @@
                 <a:defRPr sz="1700"/>
               </a:pPr>
               <a:r>
+                <a:rPr sz="1600"/>
                 <a:t>    • Akış diyagramı şekilleri</a:t>
               </a:r>
             </a:p>
@@ -9207,6 +14684,7 @@
                 <a:defRPr sz="1900"/>
               </a:pPr>
               <a:r>
+                <a:rPr sz="1600"/>
                 <a:t>✅ SmartArt:</a:t>
               </a:r>
             </a:p>
@@ -9218,6 +14696,7 @@
                 <a:defRPr sz="1700"/>
               </a:pPr>
               <a:r>
+                <a:rPr sz="1600"/>
                 <a:t>    • Şemalar, grafikler</a:t>
               </a:r>
             </a:p>
@@ -9237,6 +14716,7 @@
                 <a:defRPr sz="1900"/>
               </a:pPr>
               <a:r>
+                <a:rPr sz="1600"/>
                 <a:t>⚠️ Telif Hakkı:</a:t>
               </a:r>
             </a:p>
@@ -9248,6 +14728,7 @@
                 <a:defRPr sz="1700"/>
               </a:pPr>
               <a:r>
+                <a:rPr sz="1600"/>
                 <a:t>    • Başkasının resmini kullanırken kaynak göster</a:t>
               </a:r>
             </a:p>
@@ -9259,6 +14740,7 @@
                 <a:defRPr sz="1700"/>
               </a:pPr>
               <a:r>
+                <a:rPr sz="1600"/>
                 <a:t>    • Ücretsiz resim siteleri: Unsplash, Pixabay</a:t>
               </a:r>
             </a:p>
@@ -10033,6 +15515,7 @@
                 <a:defRPr sz="1900"/>
               </a:pPr>
               <a:r>
+                <a:rPr sz="1600"/>
                 <a:t>Online kelime işlemci</a:t>
               </a:r>
             </a:p>
@@ -10052,6 +15535,7 @@
                 <a:defRPr sz="1900"/>
               </a:pPr>
               <a:r>
+                <a:rPr sz="1600"/>
                 <a:t>✅ Google Docs Avantajları:</a:t>
               </a:r>
             </a:p>
@@ -10063,6 +15547,7 @@
                 <a:defRPr sz="1700"/>
               </a:pPr>
               <a:r>
+                <a:rPr sz="1600"/>
                 <a:t>    • Ücretsiz</a:t>
               </a:r>
             </a:p>
@@ -10074,6 +15559,7 @@
                 <a:defRPr sz="1700"/>
               </a:pPr>
               <a:r>
+                <a:rPr sz="1600"/>
                 <a:t>    • Her yerden erişim (internet ile)</a:t>
               </a:r>
             </a:p>
@@ -10085,6 +15571,7 @@
                 <a:defRPr sz="1700"/>
               </a:pPr>
               <a:r>
+                <a:rPr sz="1600"/>
                 <a:t>    • Otomatik kaydetme</a:t>
               </a:r>
             </a:p>
@@ -10096,6 +15583,7 @@
                 <a:defRPr sz="1700"/>
               </a:pPr>
               <a:r>
+                <a:rPr sz="1600"/>
                 <a:t>    • İşbirlikli çalışma</a:t>
               </a:r>
             </a:p>
@@ -10107,6 +15595,7 @@
                 <a:defRPr sz="1700"/>
               </a:pPr>
               <a:r>
+                <a:rPr sz="1600"/>
                 <a:t>    • Yorum yapma</a:t>
               </a:r>
             </a:p>
@@ -10126,6 +15615,7 @@
                 <a:defRPr sz="1900"/>
               </a:pPr>
               <a:r>
+                <a:rPr sz="1600"/>
                 <a:t>✅ Nasıl Kullanılır?</a:t>
               </a:r>
             </a:p>
@@ -10137,6 +15627,7 @@
                 <a:defRPr sz="1700"/>
               </a:pPr>
               <a:r>
+                <a:rPr sz="1600"/>
                 <a:t>    • docs.google.com</a:t>
               </a:r>
             </a:p>
@@ -10148,6 +15639,7 @@
                 <a:defRPr sz="1700"/>
               </a:pPr>
               <a:r>
+                <a:rPr sz="1600"/>
                 <a:t>    • Google hesabı ile giriş</a:t>
               </a:r>
             </a:p>
@@ -10159,6 +15651,7 @@
                 <a:defRPr sz="1700"/>
               </a:pPr>
               <a:r>
+                <a:rPr sz="1600"/>
                 <a:t>    • Yeni belge oluştur</a:t>
               </a:r>
             </a:p>
@@ -10178,6 +15671,7 @@
                 <a:defRPr sz="1900"/>
               </a:pPr>
               <a:r>
+                <a:rPr sz="1600"/>
                 <a:t>✅ Paylaşma:</a:t>
               </a:r>
             </a:p>
@@ -10189,6 +15683,7 @@
                 <a:defRPr sz="1700"/>
               </a:pPr>
               <a:r>
+                <a:rPr sz="1600"/>
                 <a:t>    • Paylaş butonu</a:t>
               </a:r>
             </a:p>
@@ -10200,6 +15695,7 @@
                 <a:defRPr sz="1700"/>
               </a:pPr>
               <a:r>
+                <a:rPr sz="1600"/>
                 <a:t>    • E-posta ile paylaş</a:t>
               </a:r>
             </a:p>
@@ -10211,6 +15707,7 @@
                 <a:defRPr sz="1700"/>
               </a:pPr>
               <a:r>
+                <a:rPr sz="1600"/>
                 <a:t>    • Link ile paylaş</a:t>
               </a:r>
             </a:p>
@@ -10222,6 +15719,7 @@
                 <a:defRPr sz="1700"/>
               </a:pPr>
               <a:r>
+                <a:rPr sz="1600"/>
                 <a:t>    • İzinler: Görüntüleme, Yorum, Düzenleme</a:t>
               </a:r>
             </a:p>
@@ -10241,6 +15739,7 @@
                 <a:defRPr sz="1900"/>
               </a:pPr>
               <a:r>
+                <a:rPr sz="1600"/>
                 <a:t>💡 Grup ödevlerinde çok kullanışlı!</a:t>
               </a:r>
             </a:p>
@@ -10252,6 +15751,7 @@
                 <a:defRPr sz="1900"/>
               </a:pPr>
               <a:r>
+                <a:rPr sz="1600"/>
                 <a:t>Herkes aynı anda çalışabilir</a:t>
               </a:r>
             </a:p>
@@ -10356,6 +15856,7 @@
                 <a:defRPr sz="1900"/>
               </a:pPr>
               <a:r>
+                <a:rPr sz="1600"/>
                 <a:t>Birlikte belge oluşturmak</a:t>
               </a:r>
             </a:p>
@@ -10375,6 +15876,7 @@
                 <a:defRPr sz="1900"/>
               </a:pPr>
               <a:r>
+                <a:rPr sz="1600"/>
                 <a:t>✅ Google Docs ile İşbirliği:</a:t>
               </a:r>
             </a:p>
@@ -10386,6 +15888,7 @@
                 <a:defRPr sz="1700"/>
               </a:pPr>
               <a:r>
+                <a:rPr sz="1600"/>
                 <a:t>    • Aynı anda birden fazla kişi düzenler</a:t>
               </a:r>
             </a:p>
@@ -10397,6 +15900,7 @@
                 <a:defRPr sz="1700"/>
               </a:pPr>
               <a:r>
+                <a:rPr sz="1600"/>
                 <a:t>    • Her kişi farklı renk ile görünür</a:t>
               </a:r>
             </a:p>
@@ -10408,6 +15912,7 @@
                 <a:defRPr sz="1700"/>
               </a:pPr>
               <a:r>
+                <a:rPr sz="1600"/>
                 <a:t>    • Anlık değişiklikler</a:t>
               </a:r>
             </a:p>
@@ -10427,6 +15932,7 @@
                 <a:defRPr sz="1900"/>
               </a:pPr>
               <a:r>
+                <a:rPr sz="1600"/>
                 <a:t>✅ Yorumlar:</a:t>
               </a:r>
             </a:p>
@@ -10438,6 +15944,7 @@
                 <a:defRPr sz="1700"/>
               </a:pPr>
               <a:r>
+                <a:rPr sz="1600"/>
                 <a:t>    • Metin seç → Yorum ekle</a:t>
               </a:r>
             </a:p>
@@ -10449,6 +15956,7 @@
                 <a:defRPr sz="1700"/>
               </a:pPr>
               <a:r>
+                <a:rPr sz="1600"/>
                 <a:t>    • Geri bildirim ver</a:t>
               </a:r>
             </a:p>
@@ -10460,6 +15968,7 @@
                 <a:defRPr sz="1700"/>
               </a:pPr>
               <a:r>
+                <a:rPr sz="1600"/>
                 <a:t>    • Öneri yap</a:t>
               </a:r>
             </a:p>
@@ -10479,6 +15988,7 @@
                 <a:defRPr sz="1900"/>
               </a:pPr>
               <a:r>
+                <a:rPr sz="1600"/>
                 <a:t>✅ Sürüm Geçmişi:</a:t>
               </a:r>
             </a:p>
@@ -10490,6 +16000,7 @@
                 <a:defRPr sz="1700"/>
               </a:pPr>
               <a:r>
+                <a:rPr sz="1600"/>
                 <a:t>    • Dosya → Sürüm geçmişi</a:t>
               </a:r>
             </a:p>
@@ -10501,6 +16012,7 @@
                 <a:defRPr sz="1700"/>
               </a:pPr>
               <a:r>
+                <a:rPr sz="1600"/>
                 <a:t>    • Eski halini gör</a:t>
               </a:r>
             </a:p>
@@ -10512,6 +16024,7 @@
                 <a:defRPr sz="1700"/>
               </a:pPr>
               <a:r>
+                <a:rPr sz="1600"/>
                 <a:t>    • Geri dön</a:t>
               </a:r>
             </a:p>
@@ -10531,6 +16044,7 @@
                 <a:defRPr sz="1900"/>
               </a:pPr>
               <a:r>
+                <a:rPr sz="1600"/>
                 <a:t>✅ Etiket:</a:t>
               </a:r>
             </a:p>
@@ -10542,6 +16056,7 @@
                 <a:defRPr sz="1700"/>
               </a:pPr>
               <a:r>
+                <a:rPr sz="1600"/>
                 <a:t>    • @isim ile etiketle</a:t>
               </a:r>
             </a:p>
@@ -10553,6 +16068,7 @@
                 <a:defRPr sz="1700"/>
               </a:pPr>
               <a:r>
+                <a:rPr sz="1600"/>
                 <a:t>    • Bildirim gider</a:t>
               </a:r>
             </a:p>
@@ -10572,6 +16088,7 @@
                 <a:defRPr sz="1900"/>
               </a:pPr>
               <a:r>
+                <a:rPr sz="1600"/>
                 <a:t>💡 İşbirliği Kuralları:</a:t>
               </a:r>
             </a:p>
@@ -10583,6 +16100,7 @@
                 <a:defRPr sz="1700"/>
               </a:pPr>
               <a:r>
+                <a:rPr sz="1600"/>
                 <a:t>    • Başkasının yazısını silme</a:t>
               </a:r>
             </a:p>
@@ -10594,6 +16112,7 @@
                 <a:defRPr sz="1700"/>
               </a:pPr>
               <a:r>
+                <a:rPr sz="1600"/>
                 <a:t>    • Değişiklikleri yorum olarak öner</a:t>
               </a:r>
             </a:p>
@@ -10605,6 +16124,7 @@
                 <a:defRPr sz="1700"/>
               </a:pPr>
               <a:r>
+                <a:rPr sz="1600"/>
                 <a:t>    • İletişim kur</a:t>
               </a:r>
             </a:p>
@@ -12850,6 +18370,7 @@
                 <a:defRPr sz="1900"/>
               </a:pPr>
               <a:r>
+                <a:rPr sz="1600"/>
                 <a:t>Problemi nasıl çözeriz?</a:t>
               </a:r>
             </a:p>
@@ -12869,6 +18390,7 @@
                 <a:defRPr sz="1900"/>
               </a:pPr>
               <a:r>
+                <a:rPr sz="1600"/>
                 <a:t>✅ Problem Çözme Adımları:</a:t>
               </a:r>
             </a:p>
@@ -12888,6 +18410,7 @@
                 <a:defRPr sz="1900"/>
               </a:pPr>
               <a:r>
+                <a:rPr sz="1600"/>
                 <a:t>1️⃣ Problemi Anla:</a:t>
               </a:r>
             </a:p>
@@ -12899,6 +18422,7 @@
                 <a:defRPr sz="1700"/>
               </a:pPr>
               <a:r>
+                <a:rPr sz="1600"/>
                 <a:t>    • Ne isteniyor?</a:t>
               </a:r>
             </a:p>
@@ -12910,6 +18434,7 @@
                 <a:defRPr sz="1700"/>
               </a:pPr>
               <a:r>
+                <a:rPr sz="1600"/>
                 <a:t>    • Girdi nedir?</a:t>
               </a:r>
             </a:p>
@@ -12921,6 +18446,7 @@
                 <a:defRPr sz="1700"/>
               </a:pPr>
               <a:r>
+                <a:rPr sz="1600"/>
                 <a:t>    • Çıktı nedir?</a:t>
               </a:r>
             </a:p>
@@ -12940,6 +18466,7 @@
                 <a:defRPr sz="1900"/>
               </a:pPr>
               <a:r>
+                <a:rPr sz="1600"/>
                 <a:t>2️⃣ Plan Yap:</a:t>
               </a:r>
             </a:p>
@@ -12951,6 +18478,7 @@
                 <a:defRPr sz="1700"/>
               </a:pPr>
               <a:r>
+                <a:rPr sz="1600"/>
                 <a:t>    • Algoritma tasarla</a:t>
               </a:r>
             </a:p>
@@ -12962,6 +18490,7 @@
                 <a:defRPr sz="1700"/>
               </a:pPr>
               <a:r>
+                <a:rPr sz="1600"/>
                 <a:t>    • Akış diyagramı çiz</a:t>
               </a:r>
             </a:p>
@@ -12981,6 +18510,7 @@
                 <a:defRPr sz="1900"/>
               </a:pPr>
               <a:r>
+                <a:rPr sz="1600"/>
                 <a:t>3️⃣ Uygula:</a:t>
               </a:r>
             </a:p>
@@ -12992,6 +18522,7 @@
                 <a:defRPr sz="1700"/>
               </a:pPr>
               <a:r>
+                <a:rPr sz="1600"/>
                 <a:t>    • Kodu yaz / adımları takip et</a:t>
               </a:r>
             </a:p>
@@ -13011,6 +18542,7 @@
                 <a:defRPr sz="1900"/>
               </a:pPr>
               <a:r>
+                <a:rPr sz="1600"/>
                 <a:t>4️⃣ Test Et:</a:t>
               </a:r>
             </a:p>
@@ -13022,6 +18554,7 @@
                 <a:defRPr sz="1700"/>
               </a:pPr>
               <a:r>
+                <a:rPr sz="1600"/>
                 <a:t>    • Doğru çalışıyor mu?</a:t>
               </a:r>
             </a:p>
@@ -13033,6 +18566,7 @@
                 <a:defRPr sz="1700"/>
               </a:pPr>
               <a:r>
+                <a:rPr sz="1600"/>
                 <a:t>    • Farklı değerler dene</a:t>
               </a:r>
             </a:p>
@@ -13052,6 +18586,7 @@
                 <a:defRPr sz="1900"/>
               </a:pPr>
               <a:r>
+                <a:rPr sz="1600"/>
                 <a:t>5️⃣ İyileştir:</a:t>
               </a:r>
             </a:p>
@@ -13063,6 +18598,7 @@
                 <a:defRPr sz="1700"/>
               </a:pPr>
               <a:r>
+                <a:rPr sz="1600"/>
                 <a:t>    • Daha hızlı yapılabilir mi?</a:t>
               </a:r>
             </a:p>
@@ -13074,6 +18610,7 @@
                 <a:defRPr sz="1700"/>
               </a:pPr>
               <a:r>
+                <a:rPr sz="1600"/>
                 <a:t>    • Daha basit olabilir mi?</a:t>
               </a:r>
             </a:p>
@@ -13093,6 +18630,7 @@
                 <a:defRPr sz="1900"/>
               </a:pPr>
               <a:r>
+                <a:rPr sz="1600"/>
                 <a:t>💡 Bu adımlar her problem için geçerli!</a:t>
               </a:r>
             </a:p>
@@ -13768,6 +19306,7 @@
                 <a:defRPr sz="2000"/>
               </a:pPr>
               <a:r>
+                <a:rPr sz="1600"/>
                 <a:t>Veri = Ham bilgi, işlenmemiş gerçekler</a:t>
               </a:r>
             </a:p>
@@ -13787,6 +19326,7 @@
                 <a:defRPr sz="2000" b="1"/>
               </a:pPr>
               <a:r>
+                <a:rPr sz="1600"/>
                 <a:t>✅ Veri Örnekleri:</a:t>
               </a:r>
             </a:p>
@@ -13798,6 +19338,7 @@
                 <a:defRPr sz="1800"/>
               </a:pPr>
               <a:r>
+                <a:rPr sz="1600"/>
                 <a:t>    • Sayılar: 15, 23, 42</a:t>
               </a:r>
             </a:p>
@@ -13809,6 +19350,7 @@
                 <a:defRPr sz="1800"/>
               </a:pPr>
               <a:r>
+                <a:rPr sz="1600"/>
                 <a:t>    • Metinler: 'Ahmet', 'Ankara'</a:t>
               </a:r>
             </a:p>
@@ -13820,6 +19362,7 @@
                 <a:defRPr sz="1800"/>
               </a:pPr>
               <a:r>
+                <a:rPr sz="1600"/>
                 <a:t>    • Tarihler: 15 Mayıs 2024</a:t>
               </a:r>
             </a:p>
@@ -13831,6 +19374,7 @@
                 <a:defRPr sz="1800"/>
               </a:pPr>
               <a:r>
+                <a:rPr sz="1600"/>
                 <a:t>    • Ölçümler: 25°C, 1.65m</a:t>
               </a:r>
             </a:p>
@@ -13850,6 +19394,7 @@
                 <a:defRPr sz="2000" b="1"/>
               </a:pPr>
               <a:r>
+                <a:rPr sz="1600"/>
                 <a:t>📌 Veri vs Bilgi:</a:t>
               </a:r>
             </a:p>
@@ -13869,6 +19414,7 @@
                 <a:defRPr sz="2000"/>
               </a:pPr>
               <a:r>
+                <a:rPr sz="1600"/>
                 <a:t>📄 Veri (Ham):</a:t>
               </a:r>
             </a:p>
@@ -13880,6 +19426,7 @@
                 <a:defRPr sz="1800"/>
               </a:pPr>
               <a:r>
+                <a:rPr sz="1600"/>
                 <a:t>    • 15, 18, 12, 20, 16</a:t>
               </a:r>
             </a:p>
@@ -13891,6 +19438,7 @@
                 <a:defRPr sz="1800"/>
               </a:pPr>
               <a:r>
+                <a:rPr sz="1600"/>
                 <a:t>    • Tek başına anlamsız</a:t>
               </a:r>
             </a:p>
@@ -13910,6 +19458,7 @@
                 <a:defRPr sz="2000" b="1"/>
               </a:pPr>
               <a:r>
+                <a:rPr sz="1600"/>
                 <a:t>💡 Bilgi (İşlenmiş):</a:t>
               </a:r>
             </a:p>
@@ -13921,6 +19470,7 @@
                 <a:defRPr sz="1800"/>
               </a:pPr>
               <a:r>
+                <a:rPr sz="1600"/>
                 <a:t>    • 'Sınıf ortalaması: 16.2'</a:t>
               </a:r>
             </a:p>
@@ -13932,6 +19482,7 @@
                 <a:defRPr sz="1800"/>
               </a:pPr>
               <a:r>
+                <a:rPr sz="1600"/>
                 <a:t>    • Analiz edilmiş, anlamlı</a:t>
               </a:r>
             </a:p>
@@ -13951,6 +19502,7 @@
                 <a:defRPr sz="2000" b="1"/>
               </a:pPr>
               <a:r>
+                <a:rPr sz="1600"/>
                 <a:t>🎯 Veri → İşleme → Bilgi → Bilgelik</a:t>
               </a:r>
             </a:p>
@@ -13970,6 +19522,7 @@
                 <a:defRPr sz="2000" b="1"/>
               </a:pPr>
               <a:r>
+                <a:rPr sz="1600"/>
                 <a:t>💡 Gerçek Hayat Örneği:</a:t>
               </a:r>
             </a:p>
@@ -13981,6 +19534,7 @@
                 <a:defRPr sz="1800"/>
               </a:pPr>
               <a:r>
+                <a:rPr sz="1600"/>
                 <a:t>    • Veri: Günlük sıcaklık kayıtları</a:t>
               </a:r>
             </a:p>
@@ -13992,6 +19546,7 @@
                 <a:defRPr sz="1800"/>
               </a:pPr>
               <a:r>
+                <a:rPr sz="1600"/>
                 <a:t>    • Bilgi: 'Temmuz en sıcak ay'</a:t>
               </a:r>
             </a:p>
@@ -14003,6 +19558,7 @@
                 <a:defRPr sz="1800"/>
               </a:pPr>
               <a:r>
+                <a:rPr sz="1600"/>
                 <a:t>    • Bilgelik: 'Klimayı Temmuz'da kullan'</a:t>
               </a:r>
             </a:p>
@@ -14107,6 +19663,7 @@
                 <a:defRPr sz="1900"/>
               </a:pPr>
               <a:r>
+                <a:rPr sz="1600"/>
                 <a:t>Klonlama = Sprite'ın kopyalarını oluşturma</a:t>
               </a:r>
             </a:p>
@@ -14126,6 +19683,7 @@
                 <a:defRPr sz="1900"/>
               </a:pPr>
               <a:r>
+                <a:rPr sz="1600"/>
                 <a:t>✅ Neden Kullanılır?</a:t>
               </a:r>
             </a:p>
@@ -14137,6 +19695,7 @@
                 <a:defRPr sz="1700"/>
               </a:pPr>
               <a:r>
+                <a:rPr sz="1600"/>
                 <a:t>    • Çok nesne oluşturmak (düşmanlar, mermiler)</a:t>
               </a:r>
             </a:p>
@@ -14148,6 +19707,7 @@
                 <a:defRPr sz="1700"/>
               </a:pPr>
               <a:r>
+                <a:rPr sz="1600"/>
                 <a:t>    • Dinamik oyunlar</a:t>
               </a:r>
             </a:p>
@@ -14167,6 +19727,7 @@
                 <a:defRPr sz="1900"/>
               </a:pPr>
               <a:r>
+                <a:rPr sz="1600"/>
                 <a:t>✅ Klonlama Blokları:</a:t>
               </a:r>
             </a:p>
@@ -14186,6 +19747,7 @@
                 <a:defRPr sz="1900"/>
               </a:pPr>
               <a:r>
+                <a:rPr sz="1600"/>
                 <a:t>🔹 'Kendimin klonunu oluştur'</a:t>
               </a:r>
             </a:p>
@@ -14197,6 +19759,7 @@
                 <a:defRPr sz="1900"/>
               </a:pPr>
               <a:r>
+                <a:rPr sz="1600"/>
                 <a:t>🔹 'Klon olarak başladığımda'</a:t>
               </a:r>
             </a:p>
@@ -14208,6 +19771,7 @@
                 <a:defRPr sz="1900"/>
               </a:pPr>
               <a:r>
+                <a:rPr sz="1600"/>
                 <a:t>🔹 'Bu klonu sil'</a:t>
               </a:r>
             </a:p>
@@ -14227,6 +19791,7 @@
                 <a:defRPr sz="1900"/>
               </a:pPr>
               <a:r>
+                <a:rPr sz="1600"/>
                 <a:t>📌 Örnek: Yıldız Yağmuru</a:t>
               </a:r>
             </a:p>
@@ -14246,6 +19811,7 @@
                 <a:defRPr sz="1900"/>
               </a:pPr>
               <a:r>
+                <a:rPr sz="1600"/>
                 <a:t>[Yeşil bayrak]</a:t>
               </a:r>
             </a:p>
@@ -14257,6 +19823,7 @@
                 <a:defRPr sz="1900"/>
               </a:pPr>
               <a:r>
+                <a:rPr sz="1600"/>
                 <a:t>[Sürekli tekrarla]</a:t>
               </a:r>
             </a:p>
@@ -14268,6 +19835,7 @@
                 <a:defRPr sz="1700"/>
               </a:pPr>
               <a:r>
+                <a:rPr sz="1600"/>
                 <a:t>    [Kendimin klonunu oluştur]</a:t>
               </a:r>
             </a:p>
@@ -14279,6 +19847,7 @@
                 <a:defRPr sz="1700"/>
               </a:pPr>
               <a:r>
+                <a:rPr sz="1600"/>
                 <a:t>    [1 saniye bekle]</a:t>
               </a:r>
             </a:p>
@@ -14298,6 +19867,7 @@
                 <a:defRPr sz="1900"/>
               </a:pPr>
               <a:r>
+                <a:rPr sz="1600"/>
                 <a:t>[Klon olarak başladığımda]</a:t>
               </a:r>
             </a:p>
@@ -14309,6 +19879,7 @@
                 <a:defRPr sz="1900"/>
               </a:pPr>
               <a:r>
+                <a:rPr sz="1600"/>
                 <a:t>[Rastgele x, y=180]</a:t>
               </a:r>
             </a:p>
@@ -14320,6 +19891,7 @@
                 <a:defRPr sz="1900"/>
               </a:pPr>
               <a:r>
+                <a:rPr sz="1600"/>
                 <a:t>[y &lt; -180 olana kadar]</a:t>
               </a:r>
             </a:p>
@@ -14331,6 +19903,7 @@
                 <a:defRPr sz="1700"/>
               </a:pPr>
               <a:r>
+                <a:rPr sz="1600"/>
                 <a:t>    [y'yi 10 azalt]</a:t>
               </a:r>
             </a:p>
@@ -14342,6 +19915,7 @@
                 <a:defRPr sz="1900"/>
               </a:pPr>
               <a:r>
+                <a:rPr sz="1600"/>
                 <a:t>[Bu klonu sil]</a:t>
               </a:r>
             </a:p>
@@ -14361,6 +19935,7 @@
                 <a:defRPr sz="1900"/>
               </a:pPr>
               <a:r>
+                <a:rPr sz="1600"/>
                 <a:t>💡 Klonlar performans için önemli!</a:t>
               </a:r>
             </a:p>
@@ -14465,6 +20040,7 @@
                 <a:defRPr sz="1900"/>
               </a:pPr>
               <a:r>
+                <a:rPr sz="1600"/>
                 <a:t>Sprite'lar arasında iletişim</a:t>
               </a:r>
             </a:p>
@@ -14484,6 +20060,7 @@
                 <a:defRPr sz="1900"/>
               </a:pPr>
               <a:r>
+                <a:rPr sz="1600"/>
                 <a:t>✅ Mesaj Blokları:</a:t>
               </a:r>
             </a:p>
@@ -14495,6 +20072,7 @@
                 <a:defRPr sz="1700"/>
               </a:pPr>
               <a:r>
+                <a:rPr sz="1600"/>
                 <a:t>    • 'mesaj1 mesajını yayınla'</a:t>
               </a:r>
             </a:p>
@@ -14506,6 +20084,7 @@
                 <a:defRPr sz="1700"/>
               </a:pPr>
               <a:r>
+                <a:rPr sz="1600"/>
                 <a:t>    • 'mesaj1 mesajını aldığımda'</a:t>
               </a:r>
             </a:p>
@@ -14517,6 +20096,7 @@
                 <a:defRPr sz="1700"/>
               </a:pPr>
               <a:r>
+                <a:rPr sz="1600"/>
                 <a:t>    • 'mesaj1 yayınla ve bekle'</a:t>
               </a:r>
             </a:p>
@@ -14536,6 +20116,7 @@
                 <a:defRPr sz="1900"/>
               </a:pPr>
               <a:r>
+                <a:rPr sz="1600"/>
                 <a:t>📌 Örnek: Oyun Başlatma</a:t>
               </a:r>
             </a:p>
@@ -14555,6 +20136,7 @@
                 <a:defRPr sz="1900"/>
               </a:pPr>
               <a:r>
+                <a:rPr sz="1600"/>
                 <a:t>Buton Sprite:</a:t>
               </a:r>
             </a:p>
@@ -14566,6 +20148,7 @@
                 <a:defRPr sz="1900"/>
               </a:pPr>
               <a:r>
+                <a:rPr sz="1600"/>
                 <a:t>[Bu sprite tıklandığında]</a:t>
               </a:r>
             </a:p>
@@ -14577,6 +20160,7 @@
                 <a:defRPr sz="1900"/>
               </a:pPr>
               <a:r>
+                <a:rPr sz="1600"/>
                 <a:t>['OyunBasla' mesajını yayınla]</a:t>
               </a:r>
             </a:p>
@@ -14596,6 +20180,7 @@
                 <a:defRPr sz="1900"/>
               </a:pPr>
               <a:r>
+                <a:rPr sz="1600"/>
                 <a:t>Oyuncu Sprite:</a:t>
               </a:r>
             </a:p>
@@ -14607,6 +20192,7 @@
                 <a:defRPr sz="1900"/>
               </a:pPr>
               <a:r>
+                <a:rPr sz="1600"/>
                 <a:t>['OyunBasla' mesajını aldığında]</a:t>
               </a:r>
             </a:p>
@@ -14618,6 +20204,7 @@
                 <a:defRPr sz="1900"/>
               </a:pPr>
               <a:r>
+                <a:rPr sz="1600"/>
                 <a:t>[Oyun kodları...]</a:t>
               </a:r>
             </a:p>
@@ -14637,6 +20224,7 @@
                 <a:defRPr sz="1900"/>
               </a:pPr>
               <a:r>
+                <a:rPr sz="1600"/>
                 <a:t>Düşman Sprite:</a:t>
               </a:r>
             </a:p>
@@ -14648,6 +20236,7 @@
                 <a:defRPr sz="1900"/>
               </a:pPr>
               <a:r>
+                <a:rPr sz="1600"/>
                 <a:t>['OyunBasla' mesajını aldığında]</a:t>
               </a:r>
             </a:p>
@@ -14659,6 +20248,7 @@
                 <a:defRPr sz="1900"/>
               </a:pPr>
               <a:r>
+                <a:rPr sz="1600"/>
                 <a:t>[Hareket et...]</a:t>
               </a:r>
             </a:p>
@@ -14678,6 +20268,7 @@
                 <a:defRPr sz="1900"/>
               </a:pPr>
               <a:r>
+                <a:rPr sz="1600"/>
                 <a:t>💡 Mesajlar koordinasyon sağlar</a:t>
               </a:r>
             </a:p>
@@ -14689,6 +20280,7 @@
                 <a:defRPr sz="1900"/>
               </a:pPr>
               <a:r>
+                <a:rPr sz="1600"/>
                 <a:t>Tüm sprite'lar senkronize çalışır</a:t>
               </a:r>
             </a:p>
@@ -14793,6 +20385,7 @@
                 <a:defRPr sz="1900"/>
               </a:pPr>
               <a:r>
+                <a:rPr sz="1600"/>
                 <a:t>Çizim yapmak için uzantı</a:t>
               </a:r>
             </a:p>
@@ -14812,6 +20405,7 @@
                 <a:defRPr sz="1900"/>
               </a:pPr>
               <a:r>
+                <a:rPr sz="1600"/>
                 <a:t>✅ Uzantı Ekleme:</a:t>
               </a:r>
             </a:p>
@@ -14823,6 +20417,7 @@
                 <a:defRPr sz="1700"/>
               </a:pPr>
               <a:r>
+                <a:rPr sz="1600"/>
                 <a:t>    • Sol altta 'Uzantı Ekle'</a:t>
               </a:r>
             </a:p>
@@ -14834,6 +20429,7 @@
                 <a:defRPr sz="1700"/>
               </a:pPr>
               <a:r>
+                <a:rPr sz="1600"/>
                 <a:t>    • Kalem'i seç</a:t>
               </a:r>
             </a:p>
@@ -14853,6 +20449,7 @@
                 <a:defRPr sz="1900"/>
               </a:pPr>
               <a:r>
+                <a:rPr sz="1600"/>
                 <a:t>✅ Kalem Blokları:</a:t>
               </a:r>
             </a:p>
@@ -14864,6 +20461,7 @@
                 <a:defRPr sz="1700"/>
               </a:pPr>
               <a:r>
+                <a:rPr sz="1600"/>
                 <a:t>    • 'Hepsini temizle'</a:t>
               </a:r>
             </a:p>
@@ -14875,6 +20473,7 @@
                 <a:defRPr sz="1700"/>
               </a:pPr>
               <a:r>
+                <a:rPr sz="1600"/>
                 <a:t>    • 'Damga'</a:t>
               </a:r>
             </a:p>
@@ -14886,6 +20485,7 @@
                 <a:defRPr sz="1700"/>
               </a:pPr>
               <a:r>
+                <a:rPr sz="1600"/>
                 <a:t>    • 'Kalemi indir/kaldır'</a:t>
               </a:r>
             </a:p>
@@ -14897,6 +20497,7 @@
                 <a:defRPr sz="1700"/>
               </a:pPr>
               <a:r>
+                <a:rPr sz="1600"/>
                 <a:t>    • 'Kalem rengini ... yap'</a:t>
               </a:r>
             </a:p>
@@ -14908,6 +20509,7 @@
                 <a:defRPr sz="1700"/>
               </a:pPr>
               <a:r>
+                <a:rPr sz="1600"/>
                 <a:t>    • 'Kalem kalınlığını ... yap'</a:t>
               </a:r>
             </a:p>
@@ -14927,6 +20529,7 @@
                 <a:defRPr sz="1900"/>
               </a:pPr>
               <a:r>
+                <a:rPr sz="1600"/>
                 <a:t>📌 Proje: Paint Uygulaması</a:t>
               </a:r>
             </a:p>
@@ -14946,6 +20549,7 @@
                 <a:defRPr sz="1900"/>
               </a:pPr>
               <a:r>
+                <a:rPr sz="1600"/>
                 <a:t>[Sürekli tekrarla]</a:t>
               </a:r>
             </a:p>
@@ -14957,6 +20561,7 @@
                 <a:defRPr sz="1700"/>
               </a:pPr>
               <a:r>
+                <a:rPr sz="1600"/>
                 <a:t>    [Fare x, y'ye git]</a:t>
               </a:r>
             </a:p>
@@ -14968,6 +20573,7 @@
                 <a:defRPr sz="1700"/>
               </a:pPr>
               <a:r>
+                <a:rPr sz="1600"/>
                 <a:t>    [Eğer fare tıklandı ise]</a:t>
               </a:r>
             </a:p>
@@ -14979,6 +20585,7 @@
                 <a:defRPr sz="1700"/>
               </a:pPr>
               <a:r>
+                <a:rPr sz="1600"/>
                 <a:t>        [Kalemi indir]</a:t>
               </a:r>
             </a:p>
@@ -14990,6 +20597,7 @@
                 <a:defRPr sz="1700"/>
               </a:pPr>
               <a:r>
+                <a:rPr sz="1600"/>
                 <a:t>    [Değilse]</a:t>
               </a:r>
             </a:p>
@@ -15001,6 +20609,7 @@
                 <a:defRPr sz="1700"/>
               </a:pPr>
               <a:r>
+                <a:rPr sz="1600"/>
                 <a:t>        [Kalemi kaldır]</a:t>
               </a:r>
             </a:p>
@@ -15020,6 +20629,7 @@
                 <a:defRPr sz="1900"/>
               </a:pPr>
               <a:r>
+                <a:rPr sz="1600"/>
                 <a:t>💡 Geometri çizim öğretimi için harika!</a:t>
               </a:r>
             </a:p>
@@ -15463,6 +21073,7 @@
                 <a:defRPr sz="1900"/>
               </a:pPr>
               <a:r>
+                <a:rPr sz="1600"/>
                 <a:t>Final Proje: Kendi platform oyununu yap!</a:t>
               </a:r>
             </a:p>
@@ -15482,6 +21093,7 @@
                 <a:defRPr sz="1900"/>
               </a:pPr>
               <a:r>
+                <a:rPr sz="1600"/>
                 <a:t>✅ Gereksinimler:</a:t>
               </a:r>
             </a:p>
@@ -15493,6 +21105,7 @@
                 <a:defRPr sz="1700"/>
               </a:pPr>
               <a:r>
+                <a:rPr sz="1600"/>
                 <a:t>    • Oyuncu karakteri (zıplama, hareket)</a:t>
               </a:r>
             </a:p>
@@ -15504,6 +21117,7 @@
                 <a:defRPr sz="1700"/>
               </a:pPr>
               <a:r>
+                <a:rPr sz="1600"/>
                 <a:t>    • Platformlar</a:t>
               </a:r>
             </a:p>
@@ -15515,6 +21129,7 @@
                 <a:defRPr sz="1700"/>
               </a:pPr>
               <a:r>
+                <a:rPr sz="1600"/>
                 <a:t>    • Düşmanlar (AI)</a:t>
               </a:r>
             </a:p>
@@ -15526,6 +21141,7 @@
                 <a:defRPr sz="1700"/>
               </a:pPr>
               <a:r>
+                <a:rPr sz="1600"/>
                 <a:t>    • Puanlama sistemi</a:t>
               </a:r>
             </a:p>
@@ -15537,6 +21153,7 @@
                 <a:defRPr sz="1700"/>
               </a:pPr>
               <a:r>
+                <a:rPr sz="1600"/>
                 <a:t>    • Seviye tasarımı</a:t>
               </a:r>
             </a:p>
@@ -15548,6 +21165,7 @@
                 <a:defRPr sz="1700"/>
               </a:pPr>
               <a:r>
+                <a:rPr sz="1600"/>
                 <a:t>    • Yer çekimi mekaniği</a:t>
               </a:r>
             </a:p>
@@ -15567,6 +21185,7 @@
                 <a:defRPr sz="1900"/>
               </a:pPr>
               <a:r>
+                <a:rPr sz="1600"/>
                 <a:t>📌 Teknik Özellikler:</a:t>
               </a:r>
             </a:p>
@@ -15578,6 +21197,7 @@
                 <a:defRPr sz="1700"/>
               </a:pPr>
               <a:r>
+                <a:rPr sz="1600"/>
                 <a:t>    • Klonlama kullan</a:t>
               </a:r>
             </a:p>
@@ -15589,6 +21209,7 @@
                 <a:defRPr sz="1700"/>
               </a:pPr>
               <a:r>
+                <a:rPr sz="1600"/>
                 <a:t>    • Mesajlaşma kullan</a:t>
               </a:r>
             </a:p>
@@ -15600,6 +21221,7 @@
                 <a:defRPr sz="1700"/>
               </a:pPr>
               <a:r>
+                <a:rPr sz="1600"/>
                 <a:t>    • Değişkenler (puan, can)</a:t>
               </a:r>
             </a:p>
@@ -15611,6 +21233,7 @@
                 <a:defRPr sz="1700"/>
               </a:pPr>
               <a:r>
+                <a:rPr sz="1600"/>
                 <a:t>    • Çarpışma algılama</a:t>
               </a:r>
             </a:p>
@@ -15622,6 +21245,7 @@
                 <a:defRPr sz="1700"/>
               </a:pPr>
               <a:r>
+                <a:rPr sz="1600"/>
                 <a:t>    • Ses efektleri</a:t>
               </a:r>
             </a:p>
@@ -15641,6 +21265,7 @@
                 <a:defRPr sz="1900"/>
               </a:pPr>
               <a:r>
+                <a:rPr sz="1600"/>
                 <a:t>💡 Örnek Oyunlar:</a:t>
               </a:r>
             </a:p>
@@ -15652,6 +21277,7 @@
                 <a:defRPr sz="1700"/>
               </a:pPr>
               <a:r>
+                <a:rPr sz="1600"/>
                 <a:t>    • Mario benzeri</a:t>
               </a:r>
             </a:p>
@@ -15663,6 +21289,7 @@
                 <a:defRPr sz="1700"/>
               </a:pPr>
               <a:r>
+                <a:rPr sz="1600"/>
                 <a:t>    • Sonic benzeri</a:t>
               </a:r>
             </a:p>
@@ -15674,6 +21301,7 @@
                 <a:defRPr sz="1700"/>
               </a:pPr>
               <a:r>
+                <a:rPr sz="1600"/>
                 <a:t>    • Geometry Dash benzeri</a:t>
               </a:r>
             </a:p>
@@ -15693,6 +21321,7 @@
                 <a:defRPr sz="1900"/>
               </a:pPr>
               <a:r>
+                <a:rPr sz="1600"/>
                 <a:t>🎯 Bu proje tüm öğrendiklerini birleştiriyor!</a:t>
               </a:r>
             </a:p>
@@ -16683,6 +22312,7 @@
                 <a:defRPr sz="1900"/>
               </a:pPr>
               <a:r>
+                <a:rPr sz="1600"/>
                 <a:t>Güzel ve etkili slayt nasıl olur?</a:t>
               </a:r>
             </a:p>
@@ -16702,6 +22332,7 @@
                 <a:defRPr sz="1900"/>
               </a:pPr>
               <a:r>
+                <a:rPr sz="1600"/>
                 <a:t>✅ Tasarım İlkeleri:</a:t>
               </a:r>
             </a:p>
@@ -16721,6 +22352,7 @@
                 <a:defRPr sz="1900"/>
               </a:pPr>
               <a:r>
+                <a:rPr sz="1600"/>
                 <a:t>🎯 Basitlik:</a:t>
               </a:r>
             </a:p>
@@ -16732,6 +22364,7 @@
                 <a:defRPr sz="1700"/>
               </a:pPr>
               <a:r>
+                <a:rPr sz="1600"/>
                 <a:t>    • Her slayt 1 ana fikir</a:t>
               </a:r>
             </a:p>
@@ -16743,6 +22376,7 @@
                 <a:defRPr sz="1700"/>
               </a:pPr>
               <a:r>
+                <a:rPr sz="1600"/>
                 <a:t>    • Çok metin kullanma</a:t>
               </a:r>
             </a:p>
@@ -16754,6 +22388,7 @@
                 <a:defRPr sz="1700"/>
               </a:pPr>
               <a:r>
+                <a:rPr sz="1600"/>
                 <a:t>    • Boşluk bırak</a:t>
               </a:r>
             </a:p>
@@ -16773,6 +22408,7 @@
                 <a:defRPr sz="1900"/>
               </a:pPr>
               <a:r>
+                <a:rPr sz="1600"/>
                 <a:t>🌈 Renk Uyumu:</a:t>
               </a:r>
             </a:p>
@@ -16784,6 +22420,7 @@
                 <a:defRPr sz="1700"/>
               </a:pPr>
               <a:r>
+                <a:rPr sz="1600"/>
                 <a:t>    • 3-4 renk kullan</a:t>
               </a:r>
             </a:p>
@@ -16795,6 +22432,7 @@
                 <a:defRPr sz="1700"/>
               </a:pPr>
               <a:r>
+                <a:rPr sz="1600"/>
                 <a:t>    • Kontrast önemli (açık arka plan + koyu metin)</a:t>
               </a:r>
             </a:p>
@@ -16814,6 +22452,7 @@
                 <a:defRPr sz="1900"/>
               </a:pPr>
               <a:r>
+                <a:rPr sz="1600"/>
                 <a:t>🔤 Yazı Tipi:</a:t>
               </a:r>
             </a:p>
@@ -16825,6 +22464,7 @@
                 <a:defRPr sz="1700"/>
               </a:pPr>
               <a:r>
+                <a:rPr sz="1600"/>
                 <a:t>    • Okunabilir fontlar (Arial, Calibri)</a:t>
               </a:r>
             </a:p>
@@ -16836,6 +22476,7 @@
                 <a:defRPr sz="1700"/>
               </a:pPr>
               <a:r>
+                <a:rPr sz="1600"/>
                 <a:t>    • Başlık: 28-44 pt</a:t>
               </a:r>
             </a:p>
@@ -16847,6 +22488,7 @@
                 <a:defRPr sz="1700"/>
               </a:pPr>
               <a:r>
+                <a:rPr sz="1600"/>
                 <a:t>    • Metin: 18-24 pt</a:t>
               </a:r>
             </a:p>
@@ -16866,6 +22508,7 @@
                 <a:defRPr sz="1900"/>
               </a:pPr>
               <a:r>
+                <a:rPr sz="1600"/>
                 <a:t>🖼️ Görseller:</a:t>
               </a:r>
             </a:p>
@@ -16877,6 +22520,7 @@
                 <a:defRPr sz="1700"/>
               </a:pPr>
               <a:r>
+                <a:rPr sz="1600"/>
                 <a:t>    • Yüksek çözünürlük</a:t>
               </a:r>
             </a:p>
@@ -16888,6 +22532,7 @@
                 <a:defRPr sz="1700"/>
               </a:pPr>
               <a:r>
+                <a:rPr sz="1600"/>
                 <a:t>    • Konuyla ilgili</a:t>
               </a:r>
             </a:p>
@@ -16899,6 +22544,7 @@
                 <a:defRPr sz="1700"/>
               </a:pPr>
               <a:r>
+                <a:rPr sz="1600"/>
                 <a:t>    • Telif haklarına dikkat</a:t>
               </a:r>
             </a:p>
@@ -16918,6 +22564,7 @@
                 <a:defRPr sz="1900"/>
               </a:pPr>
               <a:r>
+                <a:rPr sz="1600"/>
                 <a:t>💡 6-6 Kuralı:</a:t>
               </a:r>
             </a:p>
@@ -16929,6 +22576,7 @@
                 <a:defRPr sz="1900"/>
               </a:pPr>
               <a:r>
+                <a:rPr sz="1600"/>
                 <a:t>Slayt başına 6 madde, madde başına 6 kelime</a:t>
               </a:r>
             </a:p>
@@ -17033,6 +22681,7 @@
                 <a:defRPr sz="2000"/>
               </a:pPr>
               <a:r>
+                <a:rPr sz="1400"/>
                 <a:t>Veriyi nereden ve nasıl toplarız?</a:t>
               </a:r>
             </a:p>
@@ -17052,6 +22701,7 @@
                 <a:defRPr sz="2000" b="1"/>
               </a:pPr>
               <a:r>
+                <a:rPr sz="1400"/>
                 <a:t>✅ Veri Toplama Yöntemleri:</a:t>
               </a:r>
             </a:p>
@@ -17071,6 +22721,7 @@
                 <a:defRPr sz="2000"/>
               </a:pPr>
               <a:r>
+                <a:rPr sz="1400"/>
                 <a:t>📋 Anket:</a:t>
               </a:r>
             </a:p>
@@ -17082,6 +22733,7 @@
                 <a:defRPr sz="1800"/>
               </a:pPr>
               <a:r>
+                <a:rPr sz="1400"/>
                 <a:t>    • Sorular sor, cevapları topla</a:t>
               </a:r>
             </a:p>
@@ -17093,6 +22745,7 @@
                 <a:defRPr sz="1800"/>
               </a:pPr>
               <a:r>
+                <a:rPr sz="1400"/>
                 <a:t>    • Örnek: 'Favori renginiz nedir?'</a:t>
               </a:r>
             </a:p>
@@ -17112,6 +22765,7 @@
                 <a:defRPr sz="2000"/>
               </a:pPr>
               <a:r>
+                <a:rPr sz="1400"/>
                 <a:t>👀 Gözlem:</a:t>
               </a:r>
             </a:p>
@@ -17123,6 +22777,7 @@
                 <a:defRPr sz="1800"/>
               </a:pPr>
               <a:r>
+                <a:rPr sz="1400"/>
                 <a:t>    • İzle ve kaydet</a:t>
               </a:r>
             </a:p>
@@ -17134,6 +22789,7 @@
                 <a:defRPr sz="1800"/>
               </a:pPr>
               <a:r>
+                <a:rPr sz="1400"/>
                 <a:t>    • Örnek: Trafikteki araç sayısı</a:t>
               </a:r>
             </a:p>
@@ -17153,6 +22809,7 @@
                 <a:defRPr sz="2000"/>
               </a:pPr>
               <a:r>
+                <a:rPr sz="1400"/>
                 <a:t>🧪 Deney:</a:t>
               </a:r>
             </a:p>
@@ -17164,6 +22821,7 @@
                 <a:defRPr sz="1800"/>
               </a:pPr>
               <a:r>
+                <a:rPr sz="1400"/>
                 <a:t>    • Test yap, sonuçları kaydet</a:t>
               </a:r>
             </a:p>
@@ -17175,6 +22833,7 @@
                 <a:defRPr sz="1800"/>
               </a:pPr>
               <a:r>
+                <a:rPr sz="1400"/>
                 <a:t>    • Örnek: Bitki büyümesi ölçümü</a:t>
               </a:r>
             </a:p>
@@ -17194,6 +22853,7 @@
                 <a:defRPr sz="2000"/>
               </a:pPr>
               <a:r>
+                <a:rPr sz="1400"/>
                 <a:t>📱 Sensörler:</a:t>
               </a:r>
             </a:p>
@@ -17205,6 +22865,7 @@
                 <a:defRPr sz="1800"/>
               </a:pPr>
               <a:r>
+                <a:rPr sz="1400"/>
                 <a:t>    • Otomatik veri toplama</a:t>
               </a:r>
             </a:p>
@@ -17216,6 +22877,7 @@
                 <a:defRPr sz="1800"/>
               </a:pPr>
               <a:r>
+                <a:rPr sz="1400"/>
                 <a:t>    • Örnek: Sıcaklık sensörü</a:t>
               </a:r>
             </a:p>
@@ -17235,6 +22897,7 @@
                 <a:defRPr sz="2000"/>
               </a:pPr>
               <a:r>
+                <a:rPr sz="1400"/>
                 <a:t>🌐 İnternet:</a:t>
               </a:r>
             </a:p>
@@ -17246,6 +22909,7 @@
                 <a:defRPr sz="1800"/>
               </a:pPr>
               <a:r>
+                <a:rPr sz="1400"/>
                 <a:t>    • Hazır veri setleri</a:t>
               </a:r>
             </a:p>
@@ -17257,6 +22921,7 @@
                 <a:defRPr sz="1800"/>
               </a:pPr>
               <a:r>
+                <a:rPr sz="1400"/>
                 <a:t>    • Örnek: Hava durumu verileri</a:t>
               </a:r>
             </a:p>
@@ -17276,6 +22941,7 @@
                 <a:defRPr sz="2000" b="1"/>
               </a:pPr>
               <a:r>
+                <a:rPr sz="1400"/>
                 <a:t>💡 Veri toplama planlı olmalı:</a:t>
               </a:r>
             </a:p>
@@ -17287,6 +22953,7 @@
                 <a:defRPr sz="1800"/>
               </a:pPr>
               <a:r>
+                <a:rPr sz="1400"/>
                 <a:t>    • Ne öğrenmek istiyorsun?</a:t>
               </a:r>
             </a:p>
@@ -17298,6 +22965,7 @@
                 <a:defRPr sz="1800"/>
               </a:pPr>
               <a:r>
+                <a:rPr sz="1400"/>
                 <a:t>    • Hangi veriyi toplayacaksın?</a:t>
               </a:r>
             </a:p>
@@ -17309,6 +22977,7 @@
                 <a:defRPr sz="1800"/>
               </a:pPr>
               <a:r>
+                <a:rPr sz="1400"/>
                 <a:t>    • Nasıl toplayacaksın?</a:t>
               </a:r>
             </a:p>
@@ -18097,6 +23766,7 @@
                 <a:defRPr sz="1900"/>
               </a:pPr>
               <a:r>
+                <a:rPr sz="1600"/>
                 <a:t>Sunumu nasıl yapmalısın?</a:t>
               </a:r>
             </a:p>
@@ -18116,6 +23786,7 @@
                 <a:defRPr sz="1900"/>
               </a:pPr>
               <a:r>
+                <a:rPr sz="1600"/>
                 <a:t>✅ Sunum Öncesi:</a:t>
               </a:r>
             </a:p>
@@ -18127,6 +23798,7 @@
                 <a:defRPr sz="1700"/>
               </a:pPr>
               <a:r>
+                <a:rPr sz="1600"/>
                 <a:t>    • Prova yap</a:t>
               </a:r>
             </a:p>
@@ -18138,6 +23810,7 @@
                 <a:defRPr sz="1700"/>
               </a:pPr>
               <a:r>
+                <a:rPr sz="1600"/>
                 <a:t>    • Zamanını ölç</a:t>
               </a:r>
             </a:p>
@@ -18149,6 +23822,7 @@
                 <a:defRPr sz="1700"/>
               </a:pPr>
               <a:r>
+                <a:rPr sz="1600"/>
                 <a:t>    • Ekipmanı kontrol et</a:t>
               </a:r>
             </a:p>
@@ -18168,6 +23842,7 @@
                 <a:defRPr sz="1900"/>
               </a:pPr>
               <a:r>
+                <a:rPr sz="1600"/>
                 <a:t>✅ Sunum Sırasında:</a:t>
               </a:r>
             </a:p>
@@ -18179,6 +23854,7 @@
                 <a:defRPr sz="1700"/>
               </a:pPr>
               <a:r>
+                <a:rPr sz="1600"/>
                 <a:t>    • Göz teması kur</a:t>
               </a:r>
             </a:p>
@@ -18190,6 +23866,7 @@
                 <a:defRPr sz="1700"/>
               </a:pPr>
               <a:r>
+                <a:rPr sz="1600"/>
                 <a:t>    • Net konuş</a:t>
               </a:r>
             </a:p>
@@ -18201,6 +23878,7 @@
                 <a:defRPr sz="1700"/>
               </a:pPr>
               <a:r>
+                <a:rPr sz="1600"/>
                 <a:t>    • Slayta bakma, izleyicilere bak</a:t>
               </a:r>
             </a:p>
@@ -18212,6 +23890,7 @@
                 <a:defRPr sz="1700"/>
               </a:pPr>
               <a:r>
+                <a:rPr sz="1600"/>
                 <a:t>    • Jestlerini kullan</a:t>
               </a:r>
             </a:p>
@@ -18223,6 +23902,7 @@
                 <a:defRPr sz="1700"/>
               </a:pPr>
               <a:r>
+                <a:rPr sz="1600"/>
                 <a:t>    • Kendine güven</a:t>
               </a:r>
             </a:p>
@@ -18242,6 +23922,7 @@
                 <a:defRPr sz="1900"/>
               </a:pPr>
               <a:r>
+                <a:rPr sz="1600"/>
                 <a:t>✅ İçerik:</a:t>
               </a:r>
             </a:p>
@@ -18253,6 +23934,7 @@
                 <a:defRPr sz="1700"/>
               </a:pPr>
               <a:r>
+                <a:rPr sz="1600"/>
                 <a:t>    • Giriş yap</a:t>
               </a:r>
             </a:p>
@@ -18264,6 +23946,7 @@
                 <a:defRPr sz="1700"/>
               </a:pPr>
               <a:r>
+                <a:rPr sz="1600"/>
                 <a:t>    • Ana konuları sun</a:t>
               </a:r>
             </a:p>
@@ -18275,6 +23958,7 @@
                 <a:defRPr sz="1700"/>
               </a:pPr>
               <a:r>
+                <a:rPr sz="1600"/>
                 <a:t>    • Özet yap</a:t>
               </a:r>
             </a:p>
@@ -18286,6 +23970,7 @@
                 <a:defRPr sz="1700"/>
               </a:pPr>
               <a:r>
+                <a:rPr sz="1600"/>
                 <a:t>    • Sorular al</a:t>
               </a:r>
             </a:p>
@@ -18305,6 +23990,7 @@
                 <a:defRPr sz="1900"/>
               </a:pPr>
               <a:r>
+                <a:rPr sz="1600"/>
                 <a:t>💡 Altın Kural:</a:t>
               </a:r>
             </a:p>
@@ -18316,6 +24002,7 @@
                 <a:defRPr sz="1900"/>
               </a:pPr>
               <a:r>
+                <a:rPr sz="1600"/>
                 <a:t>Slayt senin yardımcın, sen sunumu yapıyorsun!</a:t>
               </a:r>
             </a:p>
@@ -18335,6 +24022,7 @@
                 <a:defRPr sz="1900"/>
               </a:pPr>
               <a:r>
+                <a:rPr sz="1600"/>
                 <a:t>⚠️ Yapma:</a:t>
               </a:r>
             </a:p>
@@ -18346,6 +24034,7 @@
                 <a:defRPr sz="1700"/>
               </a:pPr>
               <a:r>
+                <a:rPr sz="1600"/>
                 <a:t>    • Slaytı kelimesi kelimesine okuma</a:t>
               </a:r>
             </a:p>
@@ -18357,6 +24046,7 @@
                 <a:defRPr sz="1700"/>
               </a:pPr>
               <a:r>
+                <a:rPr sz="1600"/>
                 <a:t>    • Hızlı konuşma</a:t>
               </a:r>
             </a:p>
@@ -18368,6 +24058,7 @@
                 <a:defRPr sz="1700"/>
               </a:pPr>
               <a:r>
+                <a:rPr sz="1600"/>
                 <a:t>    • İzleyiciye sırt dönme</a:t>
               </a:r>
             </a:p>
@@ -18721,6 +24412,7 @@
                 <a:defRPr sz="2000"/>
               </a:pPr>
               <a:r>
+                <a:rPr sz="1600"/>
                 <a:t>Veriler farklı türlerde olabilir</a:t>
               </a:r>
             </a:p>
@@ -18740,6 +24432,7 @@
                 <a:defRPr sz="2000" b="1"/>
               </a:pPr>
               <a:r>
+                <a:rPr sz="1600"/>
                 <a:t>✅ 1. Sayısal Veri (Nicel):</a:t>
               </a:r>
             </a:p>
@@ -18759,6 +24452,7 @@
                 <a:defRPr sz="2000"/>
               </a:pPr>
               <a:r>
+                <a:rPr sz="1600"/>
                 <a:t>🔢 Kesikli Veri:</a:t>
               </a:r>
             </a:p>
@@ -18770,6 +24464,7 @@
                 <a:defRPr sz="1800"/>
               </a:pPr>
               <a:r>
+                <a:rPr sz="1600"/>
                 <a:t>    • Tamsayılar</a:t>
               </a:r>
             </a:p>
@@ -18781,6 +24476,7 @@
                 <a:defRPr sz="1800"/>
               </a:pPr>
               <a:r>
+                <a:rPr sz="1600"/>
                 <a:t>    • Örnek: Öğrenci sayısı (25, 30, 28)</a:t>
               </a:r>
             </a:p>
@@ -18800,6 +24496,7 @@
                 <a:defRPr sz="2000"/>
               </a:pPr>
               <a:r>
+                <a:rPr sz="1600"/>
                 <a:t>📏 Sürekli Veri:</a:t>
               </a:r>
             </a:p>
@@ -18811,6 +24508,7 @@
                 <a:defRPr sz="1800"/>
               </a:pPr>
               <a:r>
+                <a:rPr sz="1600"/>
                 <a:t>    • Ondalıklı sayılar</a:t>
               </a:r>
             </a:p>
@@ -18822,6 +24520,7 @@
                 <a:defRPr sz="1800"/>
               </a:pPr>
               <a:r>
+                <a:rPr sz="1600"/>
                 <a:t>    • Örnek: Boy (1.65m), Ağırlık (52.5kg)</a:t>
               </a:r>
             </a:p>
@@ -18841,6 +24540,7 @@
                 <a:defRPr sz="2000" b="1"/>
               </a:pPr>
               <a:r>
+                <a:rPr sz="1600"/>
                 <a:t>✅ 2. Kategorik Veri (Nitel):</a:t>
               </a:r>
             </a:p>
@@ -18860,6 +24560,7 @@
                 <a:defRPr sz="2000"/>
               </a:pPr>
               <a:r>
+                <a:rPr sz="1600"/>
                 <a:t>🏷️ İsimsel:</a:t>
               </a:r>
             </a:p>
@@ -18871,6 +24572,7 @@
                 <a:defRPr sz="1800"/>
               </a:pPr>
               <a:r>
+                <a:rPr sz="1600"/>
                 <a:t>    • Sıralama yok</a:t>
               </a:r>
             </a:p>
@@ -18882,6 +24584,7 @@
                 <a:defRPr sz="1800"/>
               </a:pPr>
               <a:r>
+                <a:rPr sz="1600"/>
                 <a:t>    • Örnek: Renk (kırmızı, mavi), Cinsiyet</a:t>
               </a:r>
             </a:p>
@@ -18901,6 +24604,7 @@
                 <a:defRPr sz="2000"/>
               </a:pPr>
               <a:r>
+                <a:rPr sz="1600"/>
                 <a:t>📊 Sıralı:</a:t>
               </a:r>
             </a:p>
@@ -18912,6 +24616,7 @@
                 <a:defRPr sz="1800"/>
               </a:pPr>
               <a:r>
+                <a:rPr sz="1600"/>
                 <a:t>    • Sıralama var</a:t>
               </a:r>
             </a:p>
@@ -18923,6 +24628,7 @@
                 <a:defRPr sz="1800"/>
               </a:pPr>
               <a:r>
+                <a:rPr sz="1600"/>
                 <a:t>    • Örnek: Not (Pekiyi, İyi, Orta)</a:t>
               </a:r>
             </a:p>
@@ -18942,6 +24648,7 @@
                 <a:defRPr sz="2000" b="1"/>
               </a:pPr>
               <a:r>
+                <a:rPr sz="1600"/>
                 <a:t>💡 Neden Önemli?</a:t>
               </a:r>
             </a:p>
@@ -18953,6 +24660,7 @@
                 <a:defRPr sz="1800"/>
               </a:pPr>
               <a:r>
+                <a:rPr sz="1600"/>
                 <a:t>    • Farklı veri türleri → Farklı analizler</a:t>
               </a:r>
             </a:p>
@@ -18964,6 +24672,7 @@
                 <a:defRPr sz="1800"/>
               </a:pPr>
               <a:r>
+                <a:rPr sz="1600"/>
                 <a:t>    • Sayısal: Ortalama alınabilir</a:t>
               </a:r>
             </a:p>
@@ -18975,6 +24684,7 @@
                 <a:defRPr sz="1800"/>
               </a:pPr>
               <a:r>
+                <a:rPr sz="1600"/>
                 <a:t>    • Kategorik: Frekans sayılır</a:t>
               </a:r>
             </a:p>
@@ -19079,6 +24789,7 @@
                 <a:defRPr sz="2000"/>
               </a:pPr>
               <a:r>
+                <a:rPr sz="1400"/>
                 <a:t>Toplanan veriyi düzenli hale getirmek</a:t>
               </a:r>
             </a:p>
@@ -19098,6 +24809,7 @@
                 <a:defRPr sz="2000" b="1"/>
               </a:pPr>
               <a:r>
+                <a:rPr sz="1400"/>
                 <a:t>✅ Veri Düzenleme Adımları:</a:t>
               </a:r>
             </a:p>
@@ -19117,6 +24829,7 @@
                 <a:defRPr sz="2000"/>
               </a:pPr>
               <a:r>
+                <a:rPr sz="1400"/>
                 <a:t>1️⃣ Temizleme:</a:t>
               </a:r>
             </a:p>
@@ -19128,6 +24841,7 @@
                 <a:defRPr sz="1800"/>
               </a:pPr>
               <a:r>
+                <a:rPr sz="1400"/>
                 <a:t>    • Hatalı verileri bul</a:t>
               </a:r>
             </a:p>
@@ -19139,6 +24853,7 @@
                 <a:defRPr sz="1800"/>
               </a:pPr>
               <a:r>
+                <a:rPr sz="1400"/>
                 <a:t>    • Eksik verileri tamamla veya çıkar</a:t>
               </a:r>
             </a:p>
@@ -19150,6 +24865,7 @@
                 <a:defRPr sz="1800"/>
               </a:pPr>
               <a:r>
+                <a:rPr sz="1400"/>
                 <a:t>    • Tekrar edenleri sil</a:t>
               </a:r>
             </a:p>
@@ -19169,6 +24885,7 @@
                 <a:defRPr sz="2000"/>
               </a:pPr>
               <a:r>
+                <a:rPr sz="1400"/>
                 <a:t>2️⃣ Sıralama:</a:t>
               </a:r>
             </a:p>
@@ -19180,6 +24897,7 @@
                 <a:defRPr sz="1800"/>
               </a:pPr>
               <a:r>
+                <a:rPr sz="1400"/>
                 <a:t>    • Küçükten büyüğe</a:t>
               </a:r>
             </a:p>
@@ -19191,6 +24909,7 @@
                 <a:defRPr sz="1800"/>
               </a:pPr>
               <a:r>
+                <a:rPr sz="1400"/>
                 <a:t>    • A'dan Z'ye</a:t>
               </a:r>
             </a:p>
@@ -19210,6 +24929,7 @@
                 <a:defRPr sz="2000"/>
               </a:pPr>
               <a:r>
+                <a:rPr sz="1400"/>
                 <a:t>3️⃣ Gruplama:</a:t>
               </a:r>
             </a:p>
@@ -19221,6 +24941,7 @@
                 <a:defRPr sz="1800"/>
               </a:pPr>
               <a:r>
+                <a:rPr sz="1400"/>
                 <a:t>    • Benzer verileri bir araya getir</a:t>
               </a:r>
             </a:p>
@@ -19232,6 +24953,7 @@
                 <a:defRPr sz="1800"/>
               </a:pPr>
               <a:r>
+                <a:rPr sz="1400"/>
                 <a:t>    • Örnek: Yaş grupları (0-10, 11-20, 21-30)</a:t>
               </a:r>
             </a:p>
@@ -19251,6 +24973,7 @@
                 <a:defRPr sz="2000"/>
               </a:pPr>
               <a:r>
+                <a:rPr sz="1400"/>
                 <a:t>4️⃣ Tabloya Dönüştürme:</a:t>
               </a:r>
             </a:p>
@@ -19262,6 +24985,7 @@
                 <a:defRPr sz="1800"/>
               </a:pPr>
               <a:r>
+                <a:rPr sz="1400"/>
                 <a:t>    • Satır ve sütunlar</a:t>
               </a:r>
             </a:p>
@@ -19273,6 +24997,7 @@
                 <a:defRPr sz="1800"/>
               </a:pPr>
               <a:r>
+                <a:rPr sz="1400"/>
                 <a:t>    • Başlıklar ekle</a:t>
               </a:r>
             </a:p>
@@ -19292,6 +25017,7 @@
                 <a:defRPr sz="2000" b="1"/>
               </a:pPr>
               <a:r>
+                <a:rPr sz="1400"/>
                 <a:t>📌 Örnek Ham Veri:</a:t>
               </a:r>
             </a:p>
@@ -19303,6 +25029,7 @@
                 <a:defRPr sz="2000"/>
               </a:pPr>
               <a:r>
+                <a:rPr sz="1400"/>
                 <a:t>Ahmet:15, Ayşe:18, 12, Mehmet:20, ??:16</a:t>
               </a:r>
             </a:p>
@@ -19322,6 +25049,7 @@
                 <a:defRPr sz="2000" b="1"/>
               </a:pPr>
               <a:r>
+                <a:rPr sz="1400"/>
                 <a:t>📌 Düzenlenmiş:</a:t>
               </a:r>
             </a:p>
@@ -19333,6 +25061,7 @@
                 <a:defRPr sz="2000"/>
               </a:pPr>
               <a:r>
+                <a:rPr sz="1400"/>
                 <a:t>| İsim   | Yaş |</a:t>
               </a:r>
             </a:p>
@@ -19344,6 +25073,7 @@
                 <a:defRPr sz="2000"/>
               </a:pPr>
               <a:r>
+                <a:rPr sz="1400"/>
                 <a:t>| Ahmet  | 15  |</a:t>
               </a:r>
             </a:p>
@@ -19355,6 +25085,7 @@
                 <a:defRPr sz="2000"/>
               </a:pPr>
               <a:r>
+                <a:rPr sz="1400"/>
                 <a:t>| Ayşe   | 18  |</a:t>
               </a:r>
             </a:p>
@@ -19366,6 +25097,7 @@
                 <a:defRPr sz="2000"/>
               </a:pPr>
               <a:r>
+                <a:rPr sz="1400"/>
                 <a:t>| Mehmet | 20  |</a:t>
               </a:r>
             </a:p>
@@ -19470,6 +25202,7 @@
                 <a:defRPr sz="2000"/>
               </a:pPr>
               <a:r>
+                <a:rPr sz="1400"/>
                 <a:t>Veriyi görsel olarak göstermek</a:t>
               </a:r>
             </a:p>
@@ -19489,6 +25222,7 @@
                 <a:defRPr sz="2000" b="1"/>
               </a:pPr>
               <a:r>
+                <a:rPr sz="1400"/>
                 <a:t>✅ Temel Grafik Türleri:</a:t>
               </a:r>
             </a:p>
@@ -19508,6 +25242,7 @@
                 <a:defRPr sz="2000"/>
               </a:pPr>
               <a:r>
+                <a:rPr sz="1400"/>
                 <a:t>📊 Sütun Grafiği (Bar Chart):</a:t>
               </a:r>
             </a:p>
@@ -19519,6 +25254,7 @@
                 <a:defRPr sz="1800"/>
               </a:pPr>
               <a:r>
+                <a:rPr sz="1400"/>
                 <a:t>    • Kategorileri karşılaştırma</a:t>
               </a:r>
             </a:p>
@@ -19530,6 +25266,7 @@
                 <a:defRPr sz="1800"/>
               </a:pPr>
               <a:r>
+                <a:rPr sz="1400"/>
                 <a:t>    • Örnek: Şehirlere göre nüfus</a:t>
               </a:r>
             </a:p>
@@ -19549,6 +25286,7 @@
                 <a:defRPr sz="2000"/>
               </a:pPr>
               <a:r>
+                <a:rPr sz="1400"/>
                 <a:t>📈 Çizgi Grafiği (Line Chart):</a:t>
               </a:r>
             </a:p>
@@ -19560,6 +25298,7 @@
                 <a:defRPr sz="1800"/>
               </a:pPr>
               <a:r>
+                <a:rPr sz="1400"/>
                 <a:t>    • Zamana göre değişim</a:t>
               </a:r>
             </a:p>
@@ -19571,6 +25310,7 @@
                 <a:defRPr sz="1800"/>
               </a:pPr>
               <a:r>
+                <a:rPr sz="1400"/>
                 <a:t>    • Örnek: Aylara göre sıcaklık</a:t>
               </a:r>
             </a:p>
@@ -19590,6 +25330,7 @@
                 <a:defRPr sz="2000"/>
               </a:pPr>
               <a:r>
+                <a:rPr sz="1400"/>
                 <a:t>🥧 Pasta Grafiği (Pie Chart):</a:t>
               </a:r>
             </a:p>
@@ -19601,6 +25342,7 @@
                 <a:defRPr sz="1800"/>
               </a:pPr>
               <a:r>
+                <a:rPr sz="1400"/>
                 <a:t>    • Yüzdeler, oranlar</a:t>
               </a:r>
             </a:p>
@@ -19612,6 +25354,7 @@
                 <a:defRPr sz="1800"/>
               </a:pPr>
               <a:r>
+                <a:rPr sz="1400"/>
                 <a:t>    • Örnek: Bütçe dağılımı</a:t>
               </a:r>
             </a:p>
@@ -19631,6 +25374,7 @@
                 <a:defRPr sz="2000"/>
               </a:pPr>
               <a:r>
+                <a:rPr sz="1400"/>
                 <a:t>📊 Dağılım Grafiği (Scatter Plot):</a:t>
               </a:r>
             </a:p>
@@ -19642,6 +25386,7 @@
                 <a:defRPr sz="1800"/>
               </a:pPr>
               <a:r>
+                <a:rPr sz="1400"/>
                 <a:t>    • İki değişken arasındaki ilişki</a:t>
               </a:r>
             </a:p>
@@ -19653,6 +25398,7 @@
                 <a:defRPr sz="1800"/>
               </a:pPr>
               <a:r>
+                <a:rPr sz="1400"/>
                 <a:t>    • Örnek: Boy-Kilo ilişkisi</a:t>
               </a:r>
             </a:p>
@@ -19672,6 +25418,7 @@
                 <a:defRPr sz="2000"/>
               </a:pPr>
               <a:r>
+                <a:rPr sz="1400"/>
                 <a:t>📊 Histogram:</a:t>
               </a:r>
             </a:p>
@@ -19683,6 +25430,7 @@
                 <a:defRPr sz="1800"/>
               </a:pPr>
               <a:r>
+                <a:rPr sz="1400"/>
                 <a:t>    • Veri dağılımı</a:t>
               </a:r>
             </a:p>
@@ -19694,6 +25442,7 @@
                 <a:defRPr sz="1800"/>
               </a:pPr>
               <a:r>
+                <a:rPr sz="1400"/>
                 <a:t>    • Örnek: Sınav not dağılımı</a:t>
               </a:r>
             </a:p>
@@ -19713,6 +25462,7 @@
                 <a:defRPr sz="2000" b="1"/>
               </a:pPr>
               <a:r>
+                <a:rPr sz="1400"/>
                 <a:t>💡 Doğru grafik seçimi önemli!</a:t>
               </a:r>
             </a:p>
@@ -19724,6 +25474,7 @@
                 <a:defRPr sz="1800"/>
               </a:pPr>
               <a:r>
+                <a:rPr sz="1400"/>
                 <a:t>    • Zaman göster → Çizgi</a:t>
               </a:r>
             </a:p>
@@ -19735,6 +25486,7 @@
                 <a:defRPr sz="1800"/>
               </a:pPr>
               <a:r>
+                <a:rPr sz="1400"/>
                 <a:t>    • Karşılaştır → Sütun</a:t>
               </a:r>
             </a:p>
@@ -19746,6 +25498,7 @@
                 <a:defRPr sz="1800"/>
               </a:pPr>
               <a:r>
+                <a:rPr sz="1400"/>
                 <a:t>    • Oran göster → Pasta</a:t>
               </a:r>
             </a:p>
@@ -19850,6 +25603,7 @@
                 <a:defRPr sz="2000"/>
               </a:pPr>
               <a:r>
+                <a:rPr sz="1400"/>
                 <a:t>Neden görselleştirme?</a:t>
               </a:r>
             </a:p>
@@ -19869,6 +25623,7 @@
                 <a:defRPr sz="2000" b="1"/>
               </a:pPr>
               <a:r>
+                <a:rPr sz="1400"/>
                 <a:t>✅ Görselleştirme Faydaları:</a:t>
               </a:r>
             </a:p>
@@ -19880,6 +25635,7 @@
                 <a:defRPr sz="1800"/>
               </a:pPr>
               <a:r>
+                <a:rPr sz="1400"/>
                 <a:t>    • Hızlı anlama</a:t>
               </a:r>
             </a:p>
@@ -19891,6 +25647,7 @@
                 <a:defRPr sz="1800"/>
               </a:pPr>
               <a:r>
+                <a:rPr sz="1400"/>
                 <a:t>    • Kalıpları görme</a:t>
               </a:r>
             </a:p>
@@ -19902,6 +25659,7 @@
                 <a:defRPr sz="1800"/>
               </a:pPr>
               <a:r>
+                <a:rPr sz="1400"/>
                 <a:t>    • Karşılaştırma kolaylığı</a:t>
               </a:r>
             </a:p>
@@ -19913,6 +25671,7 @@
                 <a:defRPr sz="1800"/>
               </a:pPr>
               <a:r>
+                <a:rPr sz="1400"/>
                 <a:t>    • İletişim</a:t>
               </a:r>
             </a:p>
@@ -19932,6 +25691,7 @@
                 <a:defRPr sz="2000" b="1"/>
               </a:pPr>
               <a:r>
+                <a:rPr sz="1400"/>
                 <a:t>📌 İyi Görselleştirme:</a:t>
               </a:r>
             </a:p>
@@ -19951,6 +25711,7 @@
                 <a:defRPr sz="2000" b="1"/>
               </a:pPr>
               <a:r>
+                <a:rPr sz="1400"/>
                 <a:t>✅ Basit:</a:t>
               </a:r>
             </a:p>
@@ -19962,6 +25723,7 @@
                 <a:defRPr sz="1800"/>
               </a:pPr>
               <a:r>
+                <a:rPr sz="1400"/>
                 <a:t>    • Karmaşık olmasın</a:t>
               </a:r>
             </a:p>
@@ -19973,6 +25735,7 @@
                 <a:defRPr sz="1800"/>
               </a:pPr>
               <a:r>
+                <a:rPr sz="1400"/>
                 <a:t>    • Ana mesaj net olsun</a:t>
               </a:r>
             </a:p>
@@ -19992,6 +25755,7 @@
                 <a:defRPr sz="2000" b="1"/>
               </a:pPr>
               <a:r>
+                <a:rPr sz="1400"/>
                 <a:t>✅ Açık:</a:t>
               </a:r>
             </a:p>
@@ -20003,6 +25767,7 @@
                 <a:defRPr sz="1800"/>
               </a:pPr>
               <a:r>
+                <a:rPr sz="1400"/>
                 <a:t>    • Başlık var mı?</a:t>
               </a:r>
             </a:p>
@@ -20014,6 +25779,7 @@
                 <a:defRPr sz="1800"/>
               </a:pPr>
               <a:r>
+                <a:rPr sz="1400"/>
                 <a:t>    • Eksen etiketleri var mı?</a:t>
               </a:r>
             </a:p>
@@ -20025,6 +25791,7 @@
                 <a:defRPr sz="1800"/>
               </a:pPr>
               <a:r>
+                <a:rPr sz="1400"/>
                 <a:t>    • Lejant (açıklama) var mı?</a:t>
               </a:r>
             </a:p>
@@ -20044,6 +25811,7 @@
                 <a:defRPr sz="2000" b="1"/>
               </a:pPr>
               <a:r>
+                <a:rPr sz="1400"/>
                 <a:t>✅ Doğru:</a:t>
               </a:r>
             </a:p>
@@ -20055,6 +25823,7 @@
                 <a:defRPr sz="1800"/>
               </a:pPr>
               <a:r>
+                <a:rPr sz="1400"/>
                 <a:t>    • Yanıltıcı olmasın</a:t>
               </a:r>
             </a:p>
@@ -20066,6 +25835,7 @@
                 <a:defRPr sz="1800"/>
               </a:pPr>
               <a:r>
+                <a:rPr sz="1400"/>
                 <a:t>    • Ölçek doğru mu?</a:t>
               </a:r>
             </a:p>
@@ -20085,6 +25855,7 @@
                 <a:defRPr sz="2000" b="1"/>
               </a:pPr>
               <a:r>
+                <a:rPr sz="1400"/>
                 <a:t>✅ Renkli:</a:t>
               </a:r>
             </a:p>
@@ -20096,6 +25867,7 @@
                 <a:defRPr sz="1800"/>
               </a:pPr>
               <a:r>
+                <a:rPr sz="1400"/>
                 <a:t>    • Renk kodlama kullan</a:t>
               </a:r>
             </a:p>
@@ -20107,6 +25879,7 @@
                 <a:defRPr sz="1800"/>
               </a:pPr>
               <a:r>
+                <a:rPr sz="1400"/>
                 <a:t>    • Ama çok fazla renk kullanma</a:t>
               </a:r>
             </a:p>
@@ -20126,6 +25899,7 @@
                 <a:defRPr sz="2000"/>
               </a:pPr>
               <a:r>
+                <a:rPr sz="1400"/>
                 <a:t>❌ Kötü Görselleştirme:</a:t>
               </a:r>
             </a:p>
@@ -20137,6 +25911,7 @@
                 <a:defRPr sz="1800"/>
               </a:pPr>
               <a:r>
+                <a:rPr sz="1400"/>
                 <a:t>    • 3D efektler (gereksiz)</a:t>
               </a:r>
             </a:p>
@@ -20148,6 +25923,7 @@
                 <a:defRPr sz="1800"/>
               </a:pPr>
               <a:r>
+                <a:rPr sz="1400"/>
                 <a:t>    • Yanlış grafik türü</a:t>
               </a:r>
             </a:p>
@@ -20159,6 +25935,7 @@
                 <a:defRPr sz="1800"/>
               </a:pPr>
               <a:r>
+                <a:rPr sz="1400"/>
                 <a:t>    • Eksik etiketler</a:t>
               </a:r>
             </a:p>
